--- a/solution-docs/40-sales-deck/AI-Guardrails-Project-Proposal.pptx
+++ b/solution-docs/40-sales-deck/AI-Guardrails-Project-Proposal.pptx
@@ -19,6 +19,7 @@
     <p:sldId id="267" r:id="rId19"/>
     <p:sldId id="268" r:id="rId20"/>
     <p:sldId id="269" r:id="rId21"/>
+    <p:sldId id="270" r:id="rId22"/>
   </p:sldIdLst>
   <p:sldSz cx="12191695" cy="6858000" type="screen4x3"/>
   <p:notesSz cx="6858000" cy="9144000"/>
@@ -515,7 +516,7 @@
           <a:lstStyle/>
           <a:p>
             <a:r>
-              <a:t>Core message per DECK-BRIEF.md. Subtitle names the ask: Phase 1 — Integration Proof only (AGR-022). The 5-week / one-engineer-plus-AI figure is the proposed resourcing being requested in this proposal — it is a proposal input, not a source-of-truth commitment. Nothing on this slide implies the platform already exists or is proven (AGR-020 is a target, not a result).</a:t>
+              <a:t>Core message per DECK-BRIEF.md. SCOPE NOTE: this proposal defines the MVP as the FULL five-phase roadmap (Phases 1–5 as one program). That supersedes the phase-gated framing in AGREEMENTS.md (AGR-019/AGR-022, which treat Phases 2–5 as separately gated and Phase 5 as a separate expansion). If approved, record a scope-change decision in AGREEMENTS.md. The 5-week / one-engineer-plus-AI figure is the proposed resourcing — a proposal input, not a source-of-truth commitment. Nothing here implies the platform already exists.</a:t>
             </a:r>
           </a:p>
         </p:txBody>
@@ -585,7 +586,7 @@
           <a:lstStyle/>
           <a:p>
             <a:r>
-              <a:t>Source: AGR-022 five gated phases; EXECUTIVE-BRIEF §6, §9. Visual asymmetry required by DECK-BRIEF (Phase 1 foregrounded, 2–5 recede). The 5-week figure applies ONLY to Phase 1 and is this proposal's resourcing estimate — no dates or durations are claimed for Phases 2–5 (SLIDE-OUTLINE slide 12 caveat). Phase 5 is a separate product expansion, never an MVP prerequisite.</a:t>
+              <a:t>Source: AGR-010 (guardrails are not authorization), AGR-018 (cooperative connector is not a hard security boundary), seed.md §6.3 out-of-scope list. Deck brief marks this slide MANDATORY and load-bearing for the security/compliance audience — never cut or soften it. Biggest named risk is false confidence; this slide is the mitigation.</a:t>
             </a:r>
           </a:p>
         </p:txBody>
@@ -655,7 +656,7 @@
           <a:lstStyle/>
           <a:p>
             <a:r>
-              <a:t>Week plan maps Phase 1 deliverables from seed.md §18 / IMPLEMENTATION-STRATEGY (evaluation contract, policy format, Bedrock adapter, LiteLLM connector, observe mode, basic auditing, internal deployment) onto the proposer's 5-week / one-engineer estimate. The estimate is this proposal's own resourcing plan — present it as proposed, not as an org-committed SLA. Scope guarded by AGR-019 MVP boundary.</a:t>
+              <a:t>Phase content: seed.md §18 five-phase sequence. SCOPE NOTE: this proposal re-scopes the MVP to include ALL five phases as one funded program — superseding AGR-022 (phases separately gated) and AGR-019 (Phase 5 capabilities excluded from MVP). If approved, record a scope-change decision in AGREEMENTS.md. Mitigation kept from the original gating idea: weekly demonstrable slices act as internal checkpoints even though funding is granted once.</a:t>
             </a:r>
           </a:p>
         </p:txBody>
@@ -725,7 +726,7 @@
           <a:lstStyle/>
           <a:p>
             <a:r>
-              <a:t>This slide presents the proposer's delivery approach — it is a resourcing proposal, not sourced from AGREEMENTS.md. Keep claims about AI productivity qualitative; no velocity multipliers or percentages are asserted. Human review of AI output is the control that makes the model acceptable to the security/compliance audience.</a:t>
+              <a:t>Dedicated time-estimation slide (proposal requirement). Mapping: one phase per week across the 5-week envelope, delivered by one engineer orchestrating multiple AI models in parallel. Phase deliverables from seed.md §18. This timeline is the proposer's estimate — present as proposed, not an org-committed SLA. Weekly demo = internal gate replacing the funding gates of AGR-022. Week 5 doubles as hardening/review buffer; if anything slips, agent-protection scope is trimmed before core (weeks 1–4) scope is touched.</a:t>
             </a:r>
           </a:p>
         </p:txBody>
@@ -795,7 +796,7 @@
           <a:lstStyle/>
           <a:p>
             <a:r>
-              <a:t>Source: AGR-020 MVP success demonstration, condensed. Phrased as target ('will be considered successful when') — never as achieved (hard prohibition in DECK-BRIEF). Full criteria list also includes packaging-path readiness for customer-managed deployment; covered verbally if asked. This falsifiability is the executive sponsor's risk control.</a:t>
+              <a:t>This slide presents the proposer's delivery approach — it is a resourcing proposal, not sourced from AGREEMENTS.md. Keep claims about AI productivity qualitative; no velocity multipliers or percentages are asserted. Human review of AI output is the control that makes the model acceptable to the security/compliance audience.</a:t>
             </a:r>
           </a:p>
         </p:txBody>
@@ -865,7 +866,77 @@
           <a:lstStyle/>
           <a:p>
             <a:r>
-              <a:t>Source: DECK-BRIEF 'Desired audience action' — restated in substance: approve Phase 1 resourcing (AGR-022), confirm a second independent pilot team (AGR-020, ASM-002/003), pilot runs Observe-first (AGR-011). Explicit not-asking list is required. Close on the decision, not on 'thank you'. Fallback ask if not closed in the room: schedule an architecture deep-dive with 50-architecture/ material.</a:t>
+              <a:t>Source: AGR-020 MVP success demonstration, condensed, plus one agent-protection criterion (tool-call validation, CAP-021) added by this proposal's re-scope of the MVP to all five phases. Phrased as target ('will be considered successful when') — never as achieved (hard prohibition in DECK-BRIEF). This falsifiability is the executive sponsor's risk control.</a:t>
+            </a:r>
+          </a:p>
+        </p:txBody>
+      </p:sp>
+      <p:sp>
+        <p:nvSpPr>
+          <p:cNvPr id="4" name="Slide Number Placeholder 3"/>
+          <p:cNvSpPr>
+            <a:spLocks noGrp="1"/>
+          </p:cNvSpPr>
+          <p:nvPr>
+            <p:ph type="sldNum" idx="5" sz="quarter"/>
+          </p:nvPr>
+        </p:nvSpPr>
+        <p:spPr/>
+      </p:sp>
+    </p:spTree>
+  </p:cSld>
+  <p:clrMapOvr>
+    <a:masterClrMapping/>
+  </p:clrMapOvr>
+</p:notes>
+</file>
+
+<file path=ppt/notesSlides/notesSlide15.xml><?xml version="1.0" encoding="utf-8"?>
+<p:notes xmlns:a="http://schemas.openxmlformats.org/drawingml/2006/main" xmlns:p="http://schemas.openxmlformats.org/presentationml/2006/main" xmlns:r="http://schemas.openxmlformats.org/officeDocument/2006/relationships">
+  <p:cSld>
+    <p:spTree>
+      <p:nvGrpSpPr>
+        <p:cNvPr id="1" name=""/>
+        <p:cNvGrpSpPr/>
+        <p:nvPr/>
+      </p:nvGrpSpPr>
+      <p:grpSpPr>
+        <a:xfrm>
+          <a:off x="0" y="0"/>
+          <a:ext cx="0" cy="0"/>
+          <a:chOff x="0" y="0"/>
+          <a:chExt cx="0" cy="0"/>
+        </a:xfrm>
+      </p:grpSpPr>
+      <p:sp>
+        <p:nvSpPr>
+          <p:cNvPr id="2" name="Slide Image Placeholder 1"/>
+          <p:cNvSpPr>
+            <a:spLocks noGrp="1"/>
+          </p:cNvSpPr>
+          <p:nvPr>
+            <p:ph type="sldImg" idx="2"/>
+          </p:nvPr>
+        </p:nvSpPr>
+        <p:spPr/>
+      </p:sp>
+      <p:sp>
+        <p:nvSpPr>
+          <p:cNvPr id="3" name="Notes Placeholder 2"/>
+          <p:cNvSpPr>
+            <a:spLocks noGrp="1"/>
+          </p:cNvSpPr>
+          <p:nvPr>
+            <p:ph type="body" idx="3" sz="quarter"/>
+          </p:nvPr>
+        </p:nvSpPr>
+        <p:spPr/>
+        <p:txBody>
+          <a:bodyPr/>
+          <a:lstStyle/>
+          <a:p>
+            <a:r>
+              <a:t>Ask restated per this proposal's re-scope: approve the FULL five-phase roadmap as one MVP program (supersedes AGR-022 phase gating — record a scope-change decision if approved). Pilot commitments: second independent LiteLLM instance (AGR-020, ASM-002/003) plus one agentic workload for week-5 agent-protection validation. Observe-first preserved (AGR-011). Close on the decision, not on 'thank you'. Fallback if not closed in the room: architecture deep-dive with 50-architecture/ material.</a:t>
             </a:r>
           </a:p>
         </p:txBody>
@@ -1215,7 +1286,7 @@
           <a:lstStyle/>
           <a:p>
             <a:r>
-              <a:t>Source: seed.md §4 onboarding flow; AGR-021 meaning of 'import' (never credentials transfer, never gateway admin access); CAP-008 generic HTTP Evaluation API. This is the 'how others consume it' slide the proposal audience asked for — keep it at this altitude, resist deep-diving.</a:t>
+              <a:t>Source: seed.md §4 onboarding flow; AGR-021 meaning of 'import' (never credentials transfer, never gateway admin access); CAP-006/007 LiteLLM connector; CAP-008 generic HTTP Evaluation API (the path that serves LangGraph/LangChain/custom-agent teams — framework-agnostic by design, AGR-005); Mode B guarded gateway (AGR-002). One contract on every path (AGR-006). This is the 'how others consume it' slide — keep at this altitude, resist deep-diving.</a:t>
             </a:r>
           </a:p>
         </p:txBody>
@@ -1285,7 +1356,7 @@
           <a:lstStyle/>
           <a:p>
             <a:r>
-              <a:t>Source: AGR-002 three modes; CHARTER §10. Mandatory caveats: Mode A is NOT private/data-local (AGR-009 — say it every time Mode A appears); Modes B and C land in Phases 3–4, not today's ask (AGR-022, phase discipline). Mode colors (blue/amber/green) stay constant across the deck per VISUAL-DIRECTION; green reserved for Mode C's data-local posture only.</a:t>
+              <a:t>Source: AGR-002 three modes; CHARTER §10. Mandatory caveat: Mode A is NOT private/data-local (AGR-009 — say it every time Mode A appears). SCOPE NOTE: this proposal includes Modes B and C inside the MVP (weeks 3–4) — a re-scope versus AGR-022's phase gating; requires a scope-change record if approved. Mode colors (blue/amber/green) stay constant across the deck per VISUAL-DIRECTION; green reserved for Mode C's data-local posture only.</a:t>
             </a:r>
           </a:p>
         </p:txBody>
@@ -1425,7 +1496,7 @@
           <a:lstStyle/>
           <a:p>
             <a:r>
-              <a:t>Source: AGR-010 (guardrails are not authorization), AGR-018 (cooperative connector is not a hard security boundary), seed.md §6.3 out-of-scope list. Deck brief marks this slide MANDATORY and load-bearing for the security/compliance audience — never cut or soften it. Biggest named risk is false confidence; this slide is the mitigation.</a:t>
+              <a:t>Columns 1–2: CAP-001…CAP-017 (CAPABILITIES.md, MVP set). Column 3: CAP-018…CAP-023, CAP-027 (advanced agent protection — catalogued as 'Future' in CAPABILITIES.md, pulled INTO this MVP by this proposal's re-scope; delivered week 5). Emphasize to agent-framework teams (LangGraph etc.): tool-call, retrieval, and memory-write stages are what protects agent behavior, not just chat content. Boundary still holds: tool-call validation is content/policy evaluation — business authorization stays with the application (AGR-010).</a:t>
             </a:r>
           </a:p>
         </p:txBody>
@@ -4655,7 +4726,7 @@
                 </a:solidFill>
                 <a:latin typeface="Calibri"/>
               </a:rPr>
-              <a:t>Project creation proposal — requesting approval for Phase 1 · Integration Proof</a:t>
+              <a:t>Project creation proposal — requesting approval: the AI Guardrails MVP, full five-phase roadmap</a:t>
             </a:r>
           </a:p>
         </p:txBody>
@@ -4778,7 +4849,7 @@
                 </a:solidFill>
                 <a:latin typeface="Calibri"/>
               </a:rPr>
-              <a:t>ROADMAP</a:t>
+              <a:t>HONEST SCOPE</a:t>
             </a:r>
           </a:p>
         </p:txBody>
@@ -4813,7 +4884,7 @@
                 </a:solidFill>
                 <a:latin typeface="Calibri"/>
               </a:rPr>
-              <a:t>The path we propose — one phase at a time</a:t>
+              <a:t>What this is — and what it is not</a:t>
             </a:r>
           </a:p>
         </p:txBody>
@@ -4870,19 +4941,17 @@
         </p:nvSpPr>
         <p:spPr>
           <a:xfrm>
-            <a:off x="548640" y="1600200"/>
-            <a:ext cx="4114800" cy="3108960"/>
+            <a:off x="548640" y="1554480"/>
+            <a:ext cx="5394960" cy="548640"/>
           </a:xfrm>
           <a:prstGeom prst="roundRect">
             <a:avLst/>
           </a:prstGeom>
           <a:solidFill>
-            <a:srgbClr val="E4F0EE"/>
+            <a:srgbClr val="0F766E"/>
           </a:solidFill>
-          <a:ln w="31750">
-            <a:solidFill>
-              <a:srgbClr val="0F766E"/>
-            </a:solidFill>
+          <a:ln>
+            <a:noFill/>
           </a:ln>
           <a:effectLst/>
         </p:spPr>
@@ -4901,118 +4970,166 @@
           </a:fontRef>
         </p:style>
         <p:txBody>
-          <a:bodyPr rtlCol="0" anchor="t" wrap="square" lIns="152400" rIns="76200" tIns="127000" bIns="38100"/>
+          <a:bodyPr rtlCol="0" anchor="ctr" wrap="square" lIns="76200" rIns="76200" tIns="38100" bIns="38100"/>
           <a:lstStyle/>
           <a:p>
             <a:pPr algn="ctr"/>
             <a:r>
-              <a:rPr sz="1300" b="0">
+              <a:rPr sz="1500" b="1">
+                <a:solidFill>
+                  <a:srgbClr val="FFFFFF"/>
+                </a:solidFill>
+                <a:latin typeface="Calibri"/>
+              </a:rPr>
+              <a:t>It is</a:t>
+            </a:r>
+          </a:p>
+        </p:txBody>
+      </p:sp>
+      <p:sp>
+        <p:nvSpPr>
+          <p:cNvPr id="6" name="TextBox 5"/>
+          <p:cNvSpPr txBox="1"/>
+          <p:nvPr/>
+        </p:nvSpPr>
+        <p:spPr>
+          <a:xfrm>
+            <a:off x="685800" y="2286000"/>
+            <a:ext cx="5212080" cy="3291840"/>
+          </a:xfrm>
+          <a:prstGeom prst="rect">
+            <a:avLst/>
+          </a:prstGeom>
+          <a:noFill/>
+        </p:spPr>
+        <p:txBody>
+          <a:bodyPr wrap="square">
+            <a:spAutoFit/>
+          </a:bodyPr>
+          <a:lstStyle/>
+          <a:p>
+            <a:pPr>
+              <a:spcAft>
+                <a:spcPts val="1000"/>
+              </a:spcAft>
+            </a:pPr>
+            <a:r>
+              <a:rPr sz="1400">
+                <a:solidFill>
+                  <a:srgbClr val="0F766E"/>
+                </a:solidFill>
+                <a:latin typeface="Calibri"/>
+              </a:rPr>
+              <a:t>▪  </a:t>
+            </a:r>
+            <a:r>
+              <a:rPr sz="1400" b="1">
                 <a:solidFill>
                   <a:srgbClr val="1F2937"/>
                 </a:solidFill>
                 <a:latin typeface="Calibri"/>
               </a:rPr>
-              <a:t/>
-            </a:r>
-            <a:r>
-              <a:rPr sz="1300" b="1">
+              <a:t>Content evaluation</a:t>
+            </a:r>
+            <a:r>
+              <a:rPr sz="1400">
+                <a:solidFill>
+                  <a:srgbClr val="5B6572"/>
+                </a:solidFill>
+                <a:latin typeface="Calibri"/>
+              </a:rPr>
+              <a:t> — of prompts and responses, against a versioned policy.</a:t>
+            </a:r>
+          </a:p>
+          <a:p>
+            <a:pPr>
+              <a:spcAft>
+                <a:spcPts val="1000"/>
+              </a:spcAft>
+            </a:pPr>
+            <a:r>
+              <a:rPr sz="1400">
                 <a:solidFill>
                   <a:srgbClr val="0F766E"/>
                 </a:solidFill>
                 <a:latin typeface="Calibri"/>
               </a:rPr>
-              <a:t>PHASE 1 — TODAY'S ASK</a:t>
-            </a:r>
-          </a:p>
-          <a:p>
-            <a:r>
-              <a:rPr sz="2200" b="1">
-                <a:solidFill>
-                  <a:srgbClr val="2B3440"/>
-                </a:solidFill>
-                <a:latin typeface="Calibri"/>
-              </a:rPr>
-              <a:t>Integration Proof</a:t>
-            </a:r>
-          </a:p>
-          <a:p>
-            <a:r>
-              <a:rPr sz="600" b="0">
+              <a:t>▪  </a:t>
+            </a:r>
+            <a:r>
+              <a:rPr sz="1400" b="1">
+                <a:solidFill>
+                  <a:srgbClr val="1F2937"/>
+                </a:solidFill>
+                <a:latin typeface="Calibri"/>
+              </a:rPr>
+              <a:t>Consistent enforcement</a:t>
+            </a:r>
+            <a:r>
+              <a:rPr sz="1400">
                 <a:solidFill>
                   <a:srgbClr val="5B6572"/>
                 </a:solidFill>
                 <a:latin typeface="Calibri"/>
               </a:rPr>
-              <a:t/>
-            </a:r>
-          </a:p>
-          <a:p>
-            <a:r>
-              <a:rPr sz="1400" b="0">
+              <a:t> — same decisions and reason codes on every gateway.</a:t>
+            </a:r>
+          </a:p>
+          <a:p>
+            <a:pPr>
+              <a:spcAft>
+                <a:spcPts val="1000"/>
+              </a:spcAft>
+            </a:pPr>
+            <a:r>
+              <a:rPr sz="1400">
+                <a:solidFill>
+                  <a:srgbClr val="0F766E"/>
+                </a:solidFill>
+                <a:latin typeface="Calibri"/>
+              </a:rPr>
+              <a:t>▪  </a:t>
+            </a:r>
+            <a:r>
+              <a:rPr sz="1400" b="1">
                 <a:solidFill>
                   <a:srgbClr val="1F2937"/>
                 </a:solidFill>
                 <a:latin typeface="Calibri"/>
               </a:rPr>
-              <a:t>Prove one reusable policy works across two independent LiteLLM deployments.</a:t>
-            </a:r>
-          </a:p>
-          <a:p>
-            <a:r>
-              <a:rPr sz="600" b="0">
+              <a:t>Audit evidence</a:t>
+            </a:r>
+            <a:r>
+              <a:rPr sz="1400">
                 <a:solidFill>
                   <a:srgbClr val="5B6572"/>
                 </a:solidFill>
                 <a:latin typeface="Calibri"/>
               </a:rPr>
-              <a:t/>
-            </a:r>
-          </a:p>
-          <a:p>
-            <a:r>
-              <a:rPr sz="1500" b="1">
-                <a:solidFill>
-                  <a:srgbClr val="0F766E"/>
-                </a:solidFill>
-                <a:latin typeface="Calibri"/>
-              </a:rPr>
-              <a:t>5 weeks · one engineer + AI models</a:t>
-            </a:r>
-          </a:p>
-          <a:p>
-            <a:r>
-              <a:rPr sz="1300" b="0">
-                <a:solidFill>
-                  <a:srgbClr val="5B6572"/>
-                </a:solidFill>
-                <a:latin typeface="Calibri"/>
-              </a:rPr>
-              <a:t>Small, reversible, falsifiable.</a:t>
-            </a:r>
-          </a:p>
-        </p:txBody>
-      </p:sp>
-      <p:sp>
-        <p:nvSpPr>
-          <p:cNvPr id="6" name="Rounded Rectangle 5"/>
+              <a:t> — who was evaluated, by which policy version, with what result.</a:t>
+            </a:r>
+          </a:p>
+        </p:txBody>
+      </p:sp>
+      <p:sp>
+        <p:nvSpPr>
+          <p:cNvPr id="7" name="Rounded Rectangle 6"/>
           <p:cNvSpPr/>
           <p:nvPr/>
         </p:nvSpPr>
         <p:spPr>
           <a:xfrm>
-            <a:off x="5029200" y="1600200"/>
-            <a:ext cx="6583680" cy="658368"/>
+            <a:off x="6217920" y="1554480"/>
+            <a:ext cx="5394960" cy="548640"/>
           </a:xfrm>
           <a:prstGeom prst="roundRect">
             <a:avLst/>
           </a:prstGeom>
           <a:solidFill>
-            <a:srgbClr val="F2F4F7"/>
+            <a:srgbClr val="2B3440"/>
           </a:solidFill>
-          <a:ln w="12700">
-            <a:solidFill>
-              <a:srgbClr val="C9D1D9"/>
-            </a:solidFill>
+          <a:ln>
+            <a:noFill/>
           </a:ln>
           <a:effectLst/>
         </p:spPr>
@@ -5036,27 +5153,152 @@
           <a:p>
             <a:pPr algn="ctr"/>
             <a:r>
-              <a:rPr sz="1200" b="0">
+              <a:rPr sz="1500" b="1">
+                <a:solidFill>
+                  <a:srgbClr val="FFFFFF"/>
+                </a:solidFill>
+                <a:latin typeface="Calibri"/>
+              </a:rPr>
+              <a:t>It is not</a:t>
+            </a:r>
+          </a:p>
+        </p:txBody>
+      </p:sp>
+      <p:sp>
+        <p:nvSpPr>
+          <p:cNvPr id="8" name="TextBox 7"/>
+          <p:cNvSpPr txBox="1"/>
+          <p:nvPr/>
+        </p:nvSpPr>
+        <p:spPr>
+          <a:xfrm>
+            <a:off x="6355080" y="2286000"/>
+            <a:ext cx="5212080" cy="3566160"/>
+          </a:xfrm>
+          <a:prstGeom prst="rect">
+            <a:avLst/>
+          </a:prstGeom>
+          <a:noFill/>
+        </p:spPr>
+        <p:txBody>
+          <a:bodyPr wrap="square">
+            <a:spAutoFit/>
+          </a:bodyPr>
+          <a:lstStyle/>
+          <a:p>
+            <a:pPr>
+              <a:spcAft>
+                <a:spcPts val="1000"/>
+              </a:spcAft>
+            </a:pPr>
+            <a:r>
+              <a:rPr sz="1400">
+                <a:solidFill>
+                  <a:srgbClr val="0F766E"/>
+                </a:solidFill>
+                <a:latin typeface="Calibri"/>
+              </a:rPr>
+              <a:t>▪  </a:t>
+            </a:r>
+            <a:r>
+              <a:rPr sz="1400" b="1">
                 <a:solidFill>
                   <a:srgbClr val="1F2937"/>
                 </a:solidFill>
                 <a:latin typeface="Calibri"/>
               </a:rPr>
-              <a:t/>
-            </a:r>
-          </a:p>
-        </p:txBody>
-      </p:sp>
-      <p:sp>
-        <p:nvSpPr>
-          <p:cNvPr id="7" name="TextBox 6"/>
+              <a:t>Not authorization</a:t>
+            </a:r>
+            <a:r>
+              <a:rPr sz="1400">
+                <a:solidFill>
+                  <a:srgbClr val="5B6572"/>
+                </a:solidFill>
+                <a:latin typeface="Calibri"/>
+              </a:rPr>
+              <a:t> — “content looks safe” never means “this user may do this” — that stays with your application.</a:t>
+            </a:r>
+          </a:p>
+          <a:p>
+            <a:pPr>
+              <a:spcAft>
+                <a:spcPts val="1000"/>
+              </a:spcAft>
+            </a:pPr>
+            <a:r>
+              <a:rPr sz="1400">
+                <a:solidFill>
+                  <a:srgbClr val="0F766E"/>
+                </a:solidFill>
+                <a:latin typeface="Calibri"/>
+              </a:rPr>
+              <a:t>▪  </a:t>
+            </a:r>
+            <a:r>
+              <a:rPr sz="1400" b="1">
+                <a:solidFill>
+                  <a:srgbClr val="1F2937"/>
+                </a:solidFill>
+                <a:latin typeface="Calibri"/>
+              </a:rPr>
+              <a:t>Not bypass-proof (yet)</a:t>
+            </a:r>
+            <a:r>
+              <a:rPr sz="1400">
+                <a:solidFill>
+                  <a:srgbClr val="5B6572"/>
+                </a:solidFill>
+                <a:latin typeface="Calibri"/>
+              </a:rPr>
+              <a:t> — a cooperatively installed connector can be removed; stronger enforcement postures come later, by design.</a:t>
+            </a:r>
+          </a:p>
+          <a:p>
+            <a:pPr>
+              <a:spcAft>
+                <a:spcPts val="1000"/>
+              </a:spcAft>
+            </a:pPr>
+            <a:r>
+              <a:rPr sz="1400">
+                <a:solidFill>
+                  <a:srgbClr val="0F766E"/>
+                </a:solidFill>
+                <a:latin typeface="Calibri"/>
+              </a:rPr>
+              <a:t>▪  </a:t>
+            </a:r>
+            <a:r>
+              <a:rPr sz="1400" b="1">
+                <a:solidFill>
+                  <a:srgbClr val="1F2937"/>
+                </a:solidFill>
+                <a:latin typeface="Calibri"/>
+              </a:rPr>
+              <a:t>Not a complete AI-security platform</a:t>
+            </a:r>
+            <a:r>
+              <a:rPr sz="1400">
+                <a:solidFill>
+                  <a:srgbClr val="5B6572"/>
+                </a:solidFill>
+                <a:latin typeface="Calibri"/>
+              </a:rPr>
+              <a:t> — not full governance, not DLP, not compliance certification.</a:t>
+            </a:r>
+          </a:p>
+        </p:txBody>
+      </p:sp>
+      <p:sp>
+        <p:nvSpPr>
+          <p:cNvPr id="9" name="TextBox 8"/>
           <p:cNvSpPr txBox="1"/>
           <p:nvPr/>
         </p:nvSpPr>
         <p:spPr>
           <a:xfrm>
-            <a:off x="5212080" y="1673352"/>
-            <a:ext cx="6309360" cy="548640"/>
+            <a:off x="548640" y="5760720"/>
+            <a:ext cx="11064240" cy="548640"/>
           </a:xfrm>
           <a:prstGeom prst="rect">
             <a:avLst/>
@@ -5071,27 +5313,27 @@
           <a:p>
             <a:pPr algn="l"/>
             <a:r>
-              <a:rPr sz="1300" b="1" i="0">
-                <a:solidFill>
-                  <a:srgbClr val="5B6572"/>
-                </a:solidFill>
-                <a:latin typeface="Calibri"/>
-              </a:rPr>
-              <a:t>Phase 2 — Internal multi-team platform</a:t>
-            </a:r>
-          </a:p>
-        </p:txBody>
-      </p:sp>
-      <p:sp>
-        <p:nvSpPr>
-          <p:cNvPr id="8" name="TextBox 7"/>
+              <a:rPr sz="1500" b="1" i="0">
+                <a:solidFill>
+                  <a:srgbClr val="2B3440"/>
+                </a:solidFill>
+                <a:latin typeface="Calibri"/>
+              </a:rPr>
+              <a:t>We state the limits plainly — that is why you can trust what it does claim.</a:t>
+            </a:r>
+          </a:p>
+        </p:txBody>
+      </p:sp>
+      <p:sp>
+        <p:nvSpPr>
+          <p:cNvPr id="10" name="TextBox 9"/>
           <p:cNvSpPr txBox="1"/>
           <p:nvPr/>
         </p:nvSpPr>
         <p:spPr>
           <a:xfrm>
-            <a:off x="5212080" y="1929384"/>
-            <a:ext cx="6309360" cy="320040"/>
+            <a:off x="548640" y="6473952"/>
+            <a:ext cx="8686800" cy="274320"/>
           </a:xfrm>
           <a:prstGeom prst="rect">
             <a:avLst/>
@@ -5106,103 +5348,13 @@
           <a:p>
             <a:pPr algn="l"/>
             <a:r>
-              <a:rPr sz="1100" b="0" i="0">
+              <a:rPr sz="900" b="0" i="0">
                 <a:solidFill>
                   <a:srgbClr val="5B6572"/>
                 </a:solidFill>
                 <a:latin typeface="Calibri"/>
               </a:rPr>
-              <a:t>more teams onboard; completes the MVP demonstration</a:t>
-            </a:r>
-          </a:p>
-        </p:txBody>
-      </p:sp>
-      <p:sp>
-        <p:nvSpPr>
-          <p:cNvPr id="9" name="Rounded Rectangle 8"/>
-          <p:cNvSpPr/>
-          <p:nvPr/>
-        </p:nvSpPr>
-        <p:spPr>
-          <a:xfrm>
-            <a:off x="5029200" y="2404872"/>
-            <a:ext cx="6583680" cy="658368"/>
-          </a:xfrm>
-          <a:prstGeom prst="roundRect">
-            <a:avLst/>
-          </a:prstGeom>
-          <a:solidFill>
-            <a:srgbClr val="F2F4F7"/>
-          </a:solidFill>
-          <a:ln w="12700">
-            <a:solidFill>
-              <a:srgbClr val="C9D1D9"/>
-            </a:solidFill>
-          </a:ln>
-          <a:effectLst/>
-        </p:spPr>
-        <p:style>
-          <a:lnRef idx="1">
-            <a:schemeClr val="accent1"/>
-          </a:lnRef>
-          <a:fillRef idx="3">
-            <a:schemeClr val="accent1"/>
-          </a:fillRef>
-          <a:effectRef idx="2">
-            <a:schemeClr val="accent1"/>
-          </a:effectRef>
-          <a:fontRef idx="minor">
-            <a:schemeClr val="lt1"/>
-          </a:fontRef>
-        </p:style>
-        <p:txBody>
-          <a:bodyPr rtlCol="0" anchor="ctr" wrap="square" lIns="76200" rIns="76200" tIns="38100" bIns="38100"/>
-          <a:lstStyle/>
-          <a:p>
-            <a:pPr algn="ctr"/>
-            <a:r>
-              <a:rPr sz="1200" b="0">
-                <a:solidFill>
-                  <a:srgbClr val="1F2937"/>
-                </a:solidFill>
-                <a:latin typeface="Calibri"/>
-              </a:rPr>
-              <a:t/>
-            </a:r>
-          </a:p>
-        </p:txBody>
-      </p:sp>
-      <p:sp>
-        <p:nvSpPr>
-          <p:cNvPr id="10" name="TextBox 9"/>
-          <p:cNvSpPr txBox="1"/>
-          <p:nvPr/>
-        </p:nvSpPr>
-        <p:spPr>
-          <a:xfrm>
-            <a:off x="5212080" y="2478024"/>
-            <a:ext cx="6309360" cy="548640"/>
-          </a:xfrm>
-          <a:prstGeom prst="rect">
-            <a:avLst/>
-          </a:prstGeom>
-          <a:noFill/>
-        </p:spPr>
-        <p:txBody>
-          <a:bodyPr wrap="square" anchor="t">
-            <a:spAutoFit/>
-          </a:bodyPr>
-          <a:lstStyle/>
-          <a:p>
-            <a:pPr algn="l"/>
-            <a:r>
-              <a:rPr sz="1300" b="1" i="0">
-                <a:solidFill>
-                  <a:srgbClr val="5B6572"/>
-                </a:solidFill>
-                <a:latin typeface="Calibri"/>
-              </a:rPr>
-              <a:t>Phase 3 — Guarded Gateway</a:t>
+              <a:t>AI Guardrails — project creation proposal · internal draft · placeholder styling pending brand</a:t>
             </a:r>
           </a:p>
         </p:txBody>
@@ -5210,396 +5362,6 @@
       <p:sp>
         <p:nvSpPr>
           <p:cNvPr id="11" name="TextBox 10"/>
-          <p:cNvSpPr txBox="1"/>
-          <p:nvPr/>
-        </p:nvSpPr>
-        <p:spPr>
-          <a:xfrm>
-            <a:off x="5212080" y="2734056"/>
-            <a:ext cx="6309360" cy="320040"/>
-          </a:xfrm>
-          <a:prstGeom prst="rect">
-            <a:avLst/>
-          </a:prstGeom>
-          <a:noFill/>
-        </p:spPr>
-        <p:txBody>
-          <a:bodyPr wrap="square" anchor="t">
-            <a:spAutoFit/>
-          </a:bodyPr>
-          <a:lstStyle/>
-          <a:p>
-            <a:pPr algn="l"/>
-            <a:r>
-              <a:rPr sz="1100" b="0" i="0">
-                <a:solidFill>
-                  <a:srgbClr val="5B6572"/>
-                </a:solidFill>
-                <a:latin typeface="Calibri"/>
-              </a:rPr>
-              <a:t>fully managed gateway (Mode B)</a:t>
-            </a:r>
-          </a:p>
-        </p:txBody>
-      </p:sp>
-      <p:sp>
-        <p:nvSpPr>
-          <p:cNvPr id="12" name="Rounded Rectangle 11"/>
-          <p:cNvSpPr/>
-          <p:nvPr/>
-        </p:nvSpPr>
-        <p:spPr>
-          <a:xfrm>
-            <a:off x="5029200" y="3209544"/>
-            <a:ext cx="6583680" cy="658368"/>
-          </a:xfrm>
-          <a:prstGeom prst="roundRect">
-            <a:avLst/>
-          </a:prstGeom>
-          <a:solidFill>
-            <a:srgbClr val="F2F4F7"/>
-          </a:solidFill>
-          <a:ln w="12700">
-            <a:solidFill>
-              <a:srgbClr val="C9D1D9"/>
-            </a:solidFill>
-          </a:ln>
-          <a:effectLst/>
-        </p:spPr>
-        <p:style>
-          <a:lnRef idx="1">
-            <a:schemeClr val="accent1"/>
-          </a:lnRef>
-          <a:fillRef idx="3">
-            <a:schemeClr val="accent1"/>
-          </a:fillRef>
-          <a:effectRef idx="2">
-            <a:schemeClr val="accent1"/>
-          </a:effectRef>
-          <a:fontRef idx="minor">
-            <a:schemeClr val="lt1"/>
-          </a:fontRef>
-        </p:style>
-        <p:txBody>
-          <a:bodyPr rtlCol="0" anchor="ctr" wrap="square" lIns="76200" rIns="76200" tIns="38100" bIns="38100"/>
-          <a:lstStyle/>
-          <a:p>
-            <a:pPr algn="ctr"/>
-            <a:r>
-              <a:rPr sz="1200" b="0">
-                <a:solidFill>
-                  <a:srgbClr val="1F2937"/>
-                </a:solidFill>
-                <a:latin typeface="Calibri"/>
-              </a:rPr>
-              <a:t/>
-            </a:r>
-          </a:p>
-        </p:txBody>
-      </p:sp>
-      <p:sp>
-        <p:nvSpPr>
-          <p:cNvPr id="13" name="TextBox 12"/>
-          <p:cNvSpPr txBox="1"/>
-          <p:nvPr/>
-        </p:nvSpPr>
-        <p:spPr>
-          <a:xfrm>
-            <a:off x="5212080" y="3282696"/>
-            <a:ext cx="6309360" cy="548640"/>
-          </a:xfrm>
-          <a:prstGeom prst="rect">
-            <a:avLst/>
-          </a:prstGeom>
-          <a:noFill/>
-        </p:spPr>
-        <p:txBody>
-          <a:bodyPr wrap="square" anchor="t">
-            <a:spAutoFit/>
-          </a:bodyPr>
-          <a:lstStyle/>
-          <a:p>
-            <a:pPr algn="l"/>
-            <a:r>
-              <a:rPr sz="1300" b="1" i="0">
-                <a:solidFill>
-                  <a:srgbClr val="5B6572"/>
-                </a:solidFill>
-                <a:latin typeface="Calibri"/>
-              </a:rPr>
-              <a:t>Phase 4 — Customer-Managed Runtime</a:t>
-            </a:r>
-          </a:p>
-        </p:txBody>
-      </p:sp>
-      <p:sp>
-        <p:nvSpPr>
-          <p:cNvPr id="14" name="TextBox 13"/>
-          <p:cNvSpPr txBox="1"/>
-          <p:nvPr/>
-        </p:nvSpPr>
-        <p:spPr>
-          <a:xfrm>
-            <a:off x="5212080" y="3538728"/>
-            <a:ext cx="6309360" cy="320040"/>
-          </a:xfrm>
-          <a:prstGeom prst="rect">
-            <a:avLst/>
-          </a:prstGeom>
-          <a:noFill/>
-        </p:spPr>
-        <p:txBody>
-          <a:bodyPr wrap="square" anchor="t">
-            <a:spAutoFit/>
-          </a:bodyPr>
-          <a:lstStyle/>
-          <a:p>
-            <a:pPr algn="l"/>
-            <a:r>
-              <a:rPr sz="1100" b="0" i="0">
-                <a:solidFill>
-                  <a:srgbClr val="5B6572"/>
-                </a:solidFill>
-                <a:latin typeface="Calibri"/>
-              </a:rPr>
-              <a:t>runtime in the customer's AWS account (Mode C)</a:t>
-            </a:r>
-          </a:p>
-        </p:txBody>
-      </p:sp>
-      <p:sp>
-        <p:nvSpPr>
-          <p:cNvPr id="15" name="Rounded Rectangle 14"/>
-          <p:cNvSpPr/>
-          <p:nvPr/>
-        </p:nvSpPr>
-        <p:spPr>
-          <a:xfrm>
-            <a:off x="5029200" y="4014216"/>
-            <a:ext cx="6583680" cy="658368"/>
-          </a:xfrm>
-          <a:prstGeom prst="roundRect">
-            <a:avLst/>
-          </a:prstGeom>
-          <a:solidFill>
-            <a:srgbClr val="F2F4F7"/>
-          </a:solidFill>
-          <a:ln w="12700">
-            <a:solidFill>
-              <a:srgbClr val="C9D1D9"/>
-            </a:solidFill>
-          </a:ln>
-          <a:effectLst/>
-        </p:spPr>
-        <p:style>
-          <a:lnRef idx="1">
-            <a:schemeClr val="accent1"/>
-          </a:lnRef>
-          <a:fillRef idx="3">
-            <a:schemeClr val="accent1"/>
-          </a:fillRef>
-          <a:effectRef idx="2">
-            <a:schemeClr val="accent1"/>
-          </a:effectRef>
-          <a:fontRef idx="minor">
-            <a:schemeClr val="lt1"/>
-          </a:fontRef>
-        </p:style>
-        <p:txBody>
-          <a:bodyPr rtlCol="0" anchor="ctr" wrap="square" lIns="76200" rIns="76200" tIns="38100" bIns="38100"/>
-          <a:lstStyle/>
-          <a:p>
-            <a:pPr algn="ctr"/>
-            <a:r>
-              <a:rPr sz="1200" b="0">
-                <a:solidFill>
-                  <a:srgbClr val="1F2937"/>
-                </a:solidFill>
-                <a:latin typeface="Calibri"/>
-              </a:rPr>
-              <a:t/>
-            </a:r>
-          </a:p>
-        </p:txBody>
-      </p:sp>
-      <p:sp>
-        <p:nvSpPr>
-          <p:cNvPr id="16" name="TextBox 15"/>
-          <p:cNvSpPr txBox="1"/>
-          <p:nvPr/>
-        </p:nvSpPr>
-        <p:spPr>
-          <a:xfrm>
-            <a:off x="5212080" y="4087368"/>
-            <a:ext cx="6309360" cy="548640"/>
-          </a:xfrm>
-          <a:prstGeom prst="rect">
-            <a:avLst/>
-          </a:prstGeom>
-          <a:noFill/>
-        </p:spPr>
-        <p:txBody>
-          <a:bodyPr wrap="square" anchor="t">
-            <a:spAutoFit/>
-          </a:bodyPr>
-          <a:lstStyle/>
-          <a:p>
-            <a:pPr algn="l"/>
-            <a:r>
-              <a:rPr sz="1300" b="1" i="0">
-                <a:solidFill>
-                  <a:srgbClr val="5B6572"/>
-                </a:solidFill>
-                <a:latin typeface="Calibri"/>
-              </a:rPr>
-              <a:t>Phase 5 — Advanced agent protection</a:t>
-            </a:r>
-          </a:p>
-        </p:txBody>
-      </p:sp>
-      <p:sp>
-        <p:nvSpPr>
-          <p:cNvPr id="17" name="TextBox 16"/>
-          <p:cNvSpPr txBox="1"/>
-          <p:nvPr/>
-        </p:nvSpPr>
-        <p:spPr>
-          <a:xfrm>
-            <a:off x="5212080" y="4343400"/>
-            <a:ext cx="6309360" cy="320040"/>
-          </a:xfrm>
-          <a:prstGeom prst="rect">
-            <a:avLst/>
-          </a:prstGeom>
-          <a:noFill/>
-        </p:spPr>
-        <p:txBody>
-          <a:bodyPr wrap="square" anchor="t">
-            <a:spAutoFit/>
-          </a:bodyPr>
-          <a:lstStyle/>
-          <a:p>
-            <a:pPr algn="l"/>
-            <a:r>
-              <a:rPr sz="1100" b="0" i="0">
-                <a:solidFill>
-                  <a:srgbClr val="5B6572"/>
-                </a:solidFill>
-                <a:latin typeface="Calibri"/>
-              </a:rPr>
-              <a:t>tool calls, retrieval, agent workflows — separate expansion</a:t>
-            </a:r>
-          </a:p>
-        </p:txBody>
-      </p:sp>
-      <p:sp>
-        <p:nvSpPr>
-          <p:cNvPr id="18" name="TextBox 17"/>
-          <p:cNvSpPr txBox="1"/>
-          <p:nvPr/>
-        </p:nvSpPr>
-        <p:spPr>
-          <a:xfrm>
-            <a:off x="5029200" y="4892040"/>
-            <a:ext cx="6583680" cy="457200"/>
-          </a:xfrm>
-          <a:prstGeom prst="rect">
-            <a:avLst/>
-          </a:prstGeom>
-          <a:noFill/>
-        </p:spPr>
-        <p:txBody>
-          <a:bodyPr wrap="square" anchor="t">
-            <a:spAutoFit/>
-          </a:bodyPr>
-          <a:lstStyle/>
-          <a:p>
-            <a:pPr algn="l"/>
-            <a:r>
-              <a:rPr sz="1200" b="0" i="1">
-                <a:solidFill>
-                  <a:srgbClr val="5B6572"/>
-                </a:solidFill>
-                <a:latin typeface="Calibri"/>
-              </a:rPr>
-              <a:t>Phases 2–5: separately gated decisions — each funded only after the previous phase proves out. No dates implied.</a:t>
-            </a:r>
-          </a:p>
-        </p:txBody>
-      </p:sp>
-      <p:sp>
-        <p:nvSpPr>
-          <p:cNvPr id="19" name="TextBox 18"/>
-          <p:cNvSpPr txBox="1"/>
-          <p:nvPr/>
-        </p:nvSpPr>
-        <p:spPr>
-          <a:xfrm>
-            <a:off x="548640" y="5760720"/>
-            <a:ext cx="11064240" cy="548640"/>
-          </a:xfrm>
-          <a:prstGeom prst="rect">
-            <a:avLst/>
-          </a:prstGeom>
-          <a:noFill/>
-        </p:spPr>
-        <p:txBody>
-          <a:bodyPr wrap="square" anchor="t">
-            <a:spAutoFit/>
-          </a:bodyPr>
-          <a:lstStyle/>
-          <a:p>
-            <a:pPr algn="l"/>
-            <a:r>
-              <a:rPr sz="1500" b="1" i="0">
-                <a:solidFill>
-                  <a:srgbClr val="2B3440"/>
-                </a:solidFill>
-                <a:latin typeface="Calibri"/>
-              </a:rPr>
-              <a:t>Approving Phase 1 commits you to nothing beyond Phase 1.</a:t>
-            </a:r>
-          </a:p>
-        </p:txBody>
-      </p:sp>
-      <p:sp>
-        <p:nvSpPr>
-          <p:cNvPr id="20" name="TextBox 19"/>
-          <p:cNvSpPr txBox="1"/>
-          <p:nvPr/>
-        </p:nvSpPr>
-        <p:spPr>
-          <a:xfrm>
-            <a:off x="548640" y="6473952"/>
-            <a:ext cx="8686800" cy="274320"/>
-          </a:xfrm>
-          <a:prstGeom prst="rect">
-            <a:avLst/>
-          </a:prstGeom>
-          <a:noFill/>
-        </p:spPr>
-        <p:txBody>
-          <a:bodyPr wrap="square" anchor="t">
-            <a:spAutoFit/>
-          </a:bodyPr>
-          <a:lstStyle/>
-          <a:p>
-            <a:pPr algn="l"/>
-            <a:r>
-              <a:rPr sz="900" b="0" i="0">
-                <a:solidFill>
-                  <a:srgbClr val="5B6572"/>
-                </a:solidFill>
-                <a:latin typeface="Calibri"/>
-              </a:rPr>
-              <a:t>AI Guardrails — project creation proposal · internal draft · placeholder styling pending brand</a:t>
-            </a:r>
-          </a:p>
-        </p:txBody>
-      </p:sp>
-      <p:sp>
-        <p:nvSpPr>
-          <p:cNvPr id="21" name="TextBox 20"/>
           <p:cNvSpPr txBox="1"/>
           <p:nvPr/>
         </p:nvSpPr>
@@ -5680,7 +5442,7 @@
                 </a:solidFill>
                 <a:latin typeface="Calibri"/>
               </a:rPr>
-              <a:t>EXECUTION PLAN</a:t>
+              <a:t>ROADMAP</a:t>
             </a:r>
           </a:p>
         </p:txBody>
@@ -5715,7 +5477,7 @@
                 </a:solidFill>
                 <a:latin typeface="Calibri"/>
               </a:rPr>
-              <a:t>Phase 1 in five weeks</a:t>
+              <a:t>The roadmap is the MVP — five phases, one program</a:t>
             </a:r>
           </a:p>
         </p:txBody>
@@ -5764,451 +5526,948 @@
           </a:p>
         </p:txBody>
       </p:sp>
-      <p:graphicFrame>
-        <p:nvGraphicFramePr>
-          <p:cNvPr id="5" name="Table 4"/>
-          <p:cNvGraphicFramePr>
-            <a:graphicFrameLocks noGrp="1"/>
-          </p:cNvGraphicFramePr>
-          <p:nvPr/>
-        </p:nvGraphicFramePr>
-        <p:xfrm>
-          <a:off x="548640" y="1508760"/>
-          <a:ext cx="11064240" cy="4114800"/>
-        </p:xfrm>
-        <a:graphic>
-          <a:graphicData uri="http://schemas.openxmlformats.org/drawingml/2006/table">
-            <a:tbl>
-              <a:tblPr firstRow="1" bandRow="1">
-                <a:tableStyleId>{5C22544A-7EE6-4342-B048-85BDC9FD1C3A}</a:tableStyleId>
-              </a:tblPr>
-              <a:tblGrid>
-                <a:gridCol w="1005840"/>
-                <a:gridCol w="3017520"/>
-                <a:gridCol w="7040880"/>
-              </a:tblGrid>
-              <a:tr h="685800">
-                <a:tc>
-                  <a:txBody>
-                    <a:bodyPr/>
-                    <a:lstStyle/>
-                    <a:p>
-                      <a:r>
-                        <a:rPr sz="1300" b="1">
-                          <a:solidFill>
-                            <a:srgbClr val="FFFFFF"/>
-                          </a:solidFill>
-                          <a:latin typeface="Calibri"/>
-                        </a:rPr>
-                        <a:t/>
-                      </a:r>
-                    </a:p>
-                  </a:txBody>
-                  <a:tcPr>
-                    <a:solidFill>
-                      <a:srgbClr val="2B3440"/>
-                    </a:solidFill>
-                  </a:tcPr>
-                </a:tc>
-                <a:tc>
-                  <a:txBody>
-                    <a:bodyPr/>
-                    <a:lstStyle/>
-                    <a:p>
-                      <a:r>
-                        <a:rPr sz="1300" b="1">
-                          <a:solidFill>
-                            <a:srgbClr val="FFFFFF"/>
-                          </a:solidFill>
-                          <a:latin typeface="Calibri"/>
-                        </a:rPr>
-                        <a:t>Focus</a:t>
-                      </a:r>
-                    </a:p>
-                  </a:txBody>
-                  <a:tcPr>
-                    <a:solidFill>
-                      <a:srgbClr val="2B3440"/>
-                    </a:solidFill>
-                  </a:tcPr>
-                </a:tc>
-                <a:tc>
-                  <a:txBody>
-                    <a:bodyPr/>
-                    <a:lstStyle/>
-                    <a:p>
-                      <a:r>
-                        <a:rPr sz="1300" b="1">
-                          <a:solidFill>
-                            <a:srgbClr val="FFFFFF"/>
-                          </a:solidFill>
-                          <a:latin typeface="Calibri"/>
-                        </a:rPr>
-                        <a:t>Delivered</a:t>
-                      </a:r>
-                    </a:p>
-                  </a:txBody>
-                  <a:tcPr>
-                    <a:solidFill>
-                      <a:srgbClr val="2B3440"/>
-                    </a:solidFill>
-                  </a:tcPr>
-                </a:tc>
-              </a:tr>
-              <a:tr h="685800">
-                <a:tc>
-                  <a:txBody>
-                    <a:bodyPr/>
-                    <a:lstStyle/>
-                    <a:p>
-                      <a:r>
-                        <a:rPr sz="1250" b="1">
-                          <a:solidFill>
-                            <a:srgbClr val="0F766E"/>
-                          </a:solidFill>
-                          <a:latin typeface="Calibri"/>
-                        </a:rPr>
-                        <a:t>Wk 1</a:t>
-                      </a:r>
-                    </a:p>
-                  </a:txBody>
-                  <a:tcPr>
-                    <a:solidFill>
-                      <a:srgbClr val="FFFFFF"/>
-                    </a:solidFill>
-                  </a:tcPr>
-                </a:tc>
-                <a:tc>
-                  <a:txBody>
-                    <a:bodyPr/>
-                    <a:lstStyle/>
-                    <a:p>
-                      <a:r>
-                        <a:rPr sz="1250" b="1">
-                          <a:solidFill>
-                            <a:srgbClr val="1F2937"/>
-                          </a:solidFill>
-                          <a:latin typeface="Calibri"/>
-                        </a:rPr>
-                        <a:t>Contracts &amp; control plane</a:t>
-                      </a:r>
-                    </a:p>
-                  </a:txBody>
-                  <a:tcPr>
-                    <a:solidFill>
-                      <a:srgbClr val="FFFFFF"/>
-                    </a:solidFill>
-                  </a:tcPr>
-                </a:tc>
-                <a:tc>
-                  <a:txBody>
-                    <a:bodyPr/>
-                    <a:lstStyle/>
-                    <a:p>
-                      <a:r>
-                        <a:rPr sz="1250" b="0">
-                          <a:solidFill>
-                            <a:srgbClr val="5B6572"/>
-                          </a:solidFill>
-                          <a:latin typeface="Calibri"/>
-                        </a:rPr>
-                        <a:t>Policy format, evaluation contract, decision structure; workload registry and policy bindings.</a:t>
-                      </a:r>
-                    </a:p>
-                  </a:txBody>
-                  <a:tcPr>
-                    <a:solidFill>
-                      <a:srgbClr val="FFFFFF"/>
-                    </a:solidFill>
-                  </a:tcPr>
-                </a:tc>
-              </a:tr>
-              <a:tr h="685800">
-                <a:tc>
-                  <a:txBody>
-                    <a:bodyPr/>
-                    <a:lstStyle/>
-                    <a:p>
-                      <a:r>
-                        <a:rPr sz="1250" b="1">
-                          <a:solidFill>
-                            <a:srgbClr val="0F766E"/>
-                          </a:solidFill>
-                          <a:latin typeface="Calibri"/>
-                        </a:rPr>
-                        <a:t>Wk 2</a:t>
-                      </a:r>
-                    </a:p>
-                  </a:txBody>
-                  <a:tcPr>
-                    <a:solidFill>
-                      <a:srgbClr val="F2F4F7"/>
-                    </a:solidFill>
-                  </a:tcPr>
-                </a:tc>
-                <a:tc>
-                  <a:txBody>
-                    <a:bodyPr/>
-                    <a:lstStyle/>
-                    <a:p>
-                      <a:r>
-                        <a:rPr sz="1250" b="1">
-                          <a:solidFill>
-                            <a:srgbClr val="1F2937"/>
-                          </a:solidFill>
-                          <a:latin typeface="Calibri"/>
-                        </a:rPr>
-                        <a:t>Evaluation runtime</a:t>
-                      </a:r>
-                    </a:p>
-                  </a:txBody>
-                  <a:tcPr>
-                    <a:solidFill>
-                      <a:srgbClr val="F2F4F7"/>
-                    </a:solidFill>
-                  </a:tcPr>
-                </a:tc>
-                <a:tc>
-                  <a:txBody>
-                    <a:bodyPr/>
-                    <a:lstStyle/>
-                    <a:p>
-                      <a:r>
-                        <a:rPr sz="1250" b="0">
-                          <a:solidFill>
-                            <a:srgbClr val="5B6572"/>
-                          </a:solidFill>
-                          <a:latin typeface="Calibri"/>
-                        </a:rPr>
-                        <a:t>Evaluation service; Bedrock Guardrails adapter, organization rules, basic PII detection — one normalized decision.</a:t>
-                      </a:r>
-                    </a:p>
-                  </a:txBody>
-                  <a:tcPr>
-                    <a:solidFill>
-                      <a:srgbClr val="F2F4F7"/>
-                    </a:solidFill>
-                  </a:tcPr>
-                </a:tc>
-              </a:tr>
-              <a:tr h="685800">
-                <a:tc>
-                  <a:txBody>
-                    <a:bodyPr/>
-                    <a:lstStyle/>
-                    <a:p>
-                      <a:r>
-                        <a:rPr sz="1250" b="1">
-                          <a:solidFill>
-                            <a:srgbClr val="0F766E"/>
-                          </a:solidFill>
-                          <a:latin typeface="Calibri"/>
-                        </a:rPr>
-                        <a:t>Wk 3</a:t>
-                      </a:r>
-                    </a:p>
-                  </a:txBody>
-                  <a:tcPr>
-                    <a:solidFill>
-                      <a:srgbClr val="FFFFFF"/>
-                    </a:solidFill>
-                  </a:tcPr>
-                </a:tc>
-                <a:tc>
-                  <a:txBody>
-                    <a:bodyPr/>
-                    <a:lstStyle/>
-                    <a:p>
-                      <a:r>
-                        <a:rPr sz="1250" b="1">
-                          <a:solidFill>
-                            <a:srgbClr val="1F2937"/>
-                          </a:solidFill>
-                          <a:latin typeface="Calibri"/>
-                        </a:rPr>
-                        <a:t>LiteLLM connector</a:t>
-                      </a:r>
-                    </a:p>
-                  </a:txBody>
-                  <a:tcPr>
-                    <a:solidFill>
-                      <a:srgbClr val="FFFFFF"/>
-                    </a:solidFill>
-                  </a:tcPr>
-                </a:tc>
-                <a:tc>
-                  <a:txBody>
-                    <a:bodyPr/>
-                    <a:lstStyle/>
-                    <a:p>
-                      <a:r>
-                        <a:rPr sz="1250" b="0">
-                          <a:solidFill>
-                            <a:srgbClr val="5B6572"/>
-                          </a:solidFill>
-                          <a:latin typeface="Calibri"/>
-                        </a:rPr>
-                        <a:t>Pre-call and post-call hooks, observe mode, explicit failure behavior, latency metrics, audit records.</a:t>
-                      </a:r>
-                    </a:p>
-                  </a:txBody>
-                  <a:tcPr>
-                    <a:solidFill>
-                      <a:srgbClr val="FFFFFF"/>
-                    </a:solidFill>
-                  </a:tcPr>
-                </a:tc>
-              </a:tr>
-              <a:tr h="685800">
-                <a:tc>
-                  <a:txBody>
-                    <a:bodyPr/>
-                    <a:lstStyle/>
-                    <a:p>
-                      <a:r>
-                        <a:rPr sz="1250" b="1">
-                          <a:solidFill>
-                            <a:srgbClr val="0F766E"/>
-                          </a:solidFill>
-                          <a:latin typeface="Calibri"/>
-                        </a:rPr>
-                        <a:t>Wk 4</a:t>
-                      </a:r>
-                    </a:p>
-                  </a:txBody>
-                  <a:tcPr>
-                    <a:solidFill>
-                      <a:srgbClr val="F2F4F7"/>
-                    </a:solidFill>
-                  </a:tcPr>
-                </a:tc>
-                <a:tc>
-                  <a:txBody>
-                    <a:bodyPr/>
-                    <a:lstStyle/>
-                    <a:p>
-                      <a:r>
-                        <a:rPr sz="1250" b="1">
-                          <a:solidFill>
-                            <a:srgbClr val="1F2937"/>
-                          </a:solidFill>
-                          <a:latin typeface="Calibri"/>
-                        </a:rPr>
-                        <a:t>Two-instance proof</a:t>
-                      </a:r>
-                    </a:p>
-                  </a:txBody>
-                  <a:tcPr>
-                    <a:solidFill>
-                      <a:srgbClr val="F2F4F7"/>
-                    </a:solidFill>
-                  </a:tcPr>
-                </a:tc>
-                <a:tc>
-                  <a:txBody>
-                    <a:bodyPr/>
-                    <a:lstStyle/>
-                    <a:p>
-                      <a:r>
-                        <a:rPr sz="1250" b="0">
-                          <a:solidFill>
-                            <a:srgbClr val="5B6572"/>
-                          </a:solidFill>
-                          <a:latin typeface="Calibri"/>
-                        </a:rPr>
-                        <a:t>Deploy hosted runtime; onboard two independent LiteLLM instances — one Observe, one Enforce; policy upgrade &amp; rollback.</a:t>
-                      </a:r>
-                    </a:p>
-                  </a:txBody>
-                  <a:tcPr>
-                    <a:solidFill>
-                      <a:srgbClr val="F2F4F7"/>
-                    </a:solidFill>
-                  </a:tcPr>
-                </a:tc>
-              </a:tr>
-              <a:tr h="685800">
-                <a:tc>
-                  <a:txBody>
-                    <a:bodyPr/>
-                    <a:lstStyle/>
-                    <a:p>
-                      <a:r>
-                        <a:rPr sz="1250" b="1">
-                          <a:solidFill>
-                            <a:srgbClr val="0F766E"/>
-                          </a:solidFill>
-                          <a:latin typeface="Calibri"/>
-                        </a:rPr>
-                        <a:t>Wk 5</a:t>
-                      </a:r>
-                    </a:p>
-                  </a:txBody>
-                  <a:tcPr>
-                    <a:solidFill>
-                      <a:srgbClr val="FFFFFF"/>
-                    </a:solidFill>
-                  </a:tcPr>
-                </a:tc>
-                <a:tc>
-                  <a:txBody>
-                    <a:bodyPr/>
-                    <a:lstStyle/>
-                    <a:p>
-                      <a:r>
-                        <a:rPr sz="1250" b="1">
-                          <a:solidFill>
-                            <a:srgbClr val="1F2937"/>
-                          </a:solidFill>
-                          <a:latin typeface="Calibri"/>
-                        </a:rPr>
-                        <a:t>Hardening &amp; decision pack</a:t>
-                      </a:r>
-                    </a:p>
-                  </a:txBody>
-                  <a:tcPr>
-                    <a:solidFill>
-                      <a:srgbClr val="FFFFFF"/>
-                    </a:solidFill>
-                  </a:tcPr>
-                </a:tc>
-                <a:tc>
-                  <a:txBody>
-                    <a:bodyPr/>
-                    <a:lstStyle/>
-                    <a:p>
-                      <a:r>
-                        <a:rPr sz="1250" b="0">
-                          <a:solidFill>
-                            <a:srgbClr val="5B6572"/>
-                          </a:solidFill>
-                          <a:latin typeface="Calibri"/>
-                        </a:rPr>
-                        <a:t>Test and security review, documentation, live demo, measured results → go / no-go input for Phase 2.</a:t>
-                      </a:r>
-                    </a:p>
-                  </a:txBody>
-                  <a:tcPr>
-                    <a:solidFill>
-                      <a:srgbClr val="FFFFFF"/>
-                    </a:solidFill>
-                  </a:tcPr>
-                </a:tc>
-              </a:tr>
-            </a:tbl>
-          </a:graphicData>
-        </a:graphic>
-      </p:graphicFrame>
-      <p:sp>
-        <p:nvSpPr>
-          <p:cNvPr id="6" name="TextBox 5"/>
+      <p:sp>
+        <p:nvSpPr>
+          <p:cNvPr id="5" name="Rounded Rectangle 4"/>
+          <p:cNvSpPr/>
+          <p:nvPr/>
+        </p:nvSpPr>
+        <p:spPr>
+          <a:xfrm>
+            <a:off x="548640" y="1600200"/>
+            <a:ext cx="2121408" cy="548640"/>
+          </a:xfrm>
+          <a:prstGeom prst="roundRect">
+            <a:avLst/>
+          </a:prstGeom>
+          <a:solidFill>
+            <a:srgbClr val="3D7DC8"/>
+          </a:solidFill>
+          <a:ln>
+            <a:noFill/>
+          </a:ln>
+          <a:effectLst/>
+        </p:spPr>
+        <p:style>
+          <a:lnRef idx="1">
+            <a:schemeClr val="accent1"/>
+          </a:lnRef>
+          <a:fillRef idx="3">
+            <a:schemeClr val="accent1"/>
+          </a:fillRef>
+          <a:effectRef idx="2">
+            <a:schemeClr val="accent1"/>
+          </a:effectRef>
+          <a:fontRef idx="minor">
+            <a:schemeClr val="lt1"/>
+          </a:fontRef>
+        </p:style>
+        <p:txBody>
+          <a:bodyPr rtlCol="0" anchor="ctr" wrap="square" lIns="76200" rIns="76200" tIns="38100" bIns="38100"/>
+          <a:lstStyle/>
+          <a:p>
+            <a:pPr algn="ctr"/>
+            <a:r>
+              <a:rPr sz="1300" b="1">
+                <a:solidFill>
+                  <a:srgbClr val="FFFFFF"/>
+                </a:solidFill>
+                <a:latin typeface="Calibri"/>
+              </a:rPr>
+              <a:t>Phase 1</a:t>
+            </a:r>
+          </a:p>
+        </p:txBody>
+      </p:sp>
+      <p:sp>
+        <p:nvSpPr>
+          <p:cNvPr id="6" name="Rounded Rectangle 5"/>
+          <p:cNvSpPr/>
+          <p:nvPr/>
+        </p:nvSpPr>
+        <p:spPr>
+          <a:xfrm>
+            <a:off x="548640" y="2286000"/>
+            <a:ext cx="2121408" cy="2377440"/>
+          </a:xfrm>
+          <a:prstGeom prst="roundRect">
+            <a:avLst/>
+          </a:prstGeom>
+          <a:solidFill>
+            <a:srgbClr val="FFFFFF"/>
+          </a:solidFill>
+          <a:ln w="12700">
+            <a:solidFill>
+              <a:srgbClr val="C9D1D9"/>
+            </a:solidFill>
+          </a:ln>
+          <a:effectLst/>
+        </p:spPr>
+        <p:style>
+          <a:lnRef idx="1">
+            <a:schemeClr val="accent1"/>
+          </a:lnRef>
+          <a:fillRef idx="3">
+            <a:schemeClr val="accent1"/>
+          </a:fillRef>
+          <a:effectRef idx="2">
+            <a:schemeClr val="accent1"/>
+          </a:effectRef>
+          <a:fontRef idx="minor">
+            <a:schemeClr val="lt1"/>
+          </a:fontRef>
+        </p:style>
+        <p:txBody>
+          <a:bodyPr rtlCol="0" anchor="t" wrap="square" lIns="101600" rIns="101600" tIns="101600" bIns="38100"/>
+          <a:lstStyle/>
+          <a:p>
+            <a:pPr algn="ctr"/>
+            <a:r>
+              <a:rPr sz="1100" b="0">
+                <a:solidFill>
+                  <a:srgbClr val="1F2937"/>
+                </a:solidFill>
+                <a:latin typeface="Calibri"/>
+              </a:rPr>
+              <a:t/>
+            </a:r>
+            <a:r>
+              <a:rPr sz="1300" b="1">
+                <a:solidFill>
+                  <a:srgbClr val="1F2937"/>
+                </a:solidFill>
+                <a:latin typeface="Calibri"/>
+              </a:rPr>
+              <a:t>Integration proof</a:t>
+            </a:r>
+          </a:p>
+          <a:p>
+            <a:pPr>
+              <a:spcBef>
+                <a:spcPts val="400"/>
+              </a:spcBef>
+            </a:pPr>
+            <a:r>
+              <a:rPr sz="1100">
+                <a:solidFill>
+                  <a:srgbClr val="5B6572"/>
+                </a:solidFill>
+                <a:latin typeface="Calibri"/>
+              </a:rPr>
+              <a:t>Policy &amp; evaluation separated from any gateway; LiteLLM connector; observe mode.</a:t>
+            </a:r>
+          </a:p>
+        </p:txBody>
+      </p:sp>
+      <p:sp>
+        <p:nvSpPr>
+          <p:cNvPr id="7" name="Right Arrow 6"/>
+          <p:cNvSpPr/>
+          <p:nvPr/>
+        </p:nvSpPr>
+        <p:spPr>
+          <a:xfrm>
+            <a:off x="2688336" y="3291840"/>
+            <a:ext cx="182880" cy="182880"/>
+          </a:xfrm>
+          <a:prstGeom prst="rightArrow">
+            <a:avLst/>
+          </a:prstGeom>
+          <a:solidFill>
+            <a:srgbClr val="5B6572"/>
+          </a:solidFill>
+          <a:ln>
+            <a:noFill/>
+          </a:ln>
+          <a:effectLst/>
+        </p:spPr>
+        <p:style>
+          <a:lnRef idx="1">
+            <a:schemeClr val="accent1"/>
+          </a:lnRef>
+          <a:fillRef idx="3">
+            <a:schemeClr val="accent1"/>
+          </a:fillRef>
+          <a:effectRef idx="2">
+            <a:schemeClr val="accent1"/>
+          </a:effectRef>
+          <a:fontRef idx="minor">
+            <a:schemeClr val="lt1"/>
+          </a:fontRef>
+        </p:style>
+        <p:txBody>
+          <a:bodyPr rtlCol="0" anchor="ctr" wrap="square" lIns="76200" rIns="76200" tIns="38100" bIns="38100"/>
+          <a:lstStyle/>
+          <a:p>
+            <a:pPr algn="ctr"/>
+            <a:r>
+              <a:rPr sz="1300" b="0">
+                <a:solidFill>
+                  <a:srgbClr val="1F2937"/>
+                </a:solidFill>
+                <a:latin typeface="Calibri"/>
+              </a:rPr>
+              <a:t/>
+            </a:r>
+          </a:p>
+        </p:txBody>
+      </p:sp>
+      <p:sp>
+        <p:nvSpPr>
+          <p:cNvPr id="8" name="Rounded Rectangle 7"/>
+          <p:cNvSpPr/>
+          <p:nvPr/>
+        </p:nvSpPr>
+        <p:spPr>
+          <a:xfrm>
+            <a:off x="2889504" y="1600200"/>
+            <a:ext cx="2121408" cy="548640"/>
+          </a:xfrm>
+          <a:prstGeom prst="roundRect">
+            <a:avLst/>
+          </a:prstGeom>
+          <a:solidFill>
+            <a:srgbClr val="3D7DC8"/>
+          </a:solidFill>
+          <a:ln>
+            <a:noFill/>
+          </a:ln>
+          <a:effectLst/>
+        </p:spPr>
+        <p:style>
+          <a:lnRef idx="1">
+            <a:schemeClr val="accent1"/>
+          </a:lnRef>
+          <a:fillRef idx="3">
+            <a:schemeClr val="accent1"/>
+          </a:fillRef>
+          <a:effectRef idx="2">
+            <a:schemeClr val="accent1"/>
+          </a:effectRef>
+          <a:fontRef idx="minor">
+            <a:schemeClr val="lt1"/>
+          </a:fontRef>
+        </p:style>
+        <p:txBody>
+          <a:bodyPr rtlCol="0" anchor="ctr" wrap="square" lIns="76200" rIns="76200" tIns="38100" bIns="38100"/>
+          <a:lstStyle/>
+          <a:p>
+            <a:pPr algn="ctr"/>
+            <a:r>
+              <a:rPr sz="1300" b="1">
+                <a:solidFill>
+                  <a:srgbClr val="FFFFFF"/>
+                </a:solidFill>
+                <a:latin typeface="Calibri"/>
+              </a:rPr>
+              <a:t>Phase 2</a:t>
+            </a:r>
+          </a:p>
+        </p:txBody>
+      </p:sp>
+      <p:sp>
+        <p:nvSpPr>
+          <p:cNvPr id="9" name="Rounded Rectangle 8"/>
+          <p:cNvSpPr/>
+          <p:nvPr/>
+        </p:nvSpPr>
+        <p:spPr>
+          <a:xfrm>
+            <a:off x="2889504" y="2286000"/>
+            <a:ext cx="2121408" cy="2377440"/>
+          </a:xfrm>
+          <a:prstGeom prst="roundRect">
+            <a:avLst/>
+          </a:prstGeom>
+          <a:solidFill>
+            <a:srgbClr val="FFFFFF"/>
+          </a:solidFill>
+          <a:ln w="12700">
+            <a:solidFill>
+              <a:srgbClr val="C9D1D9"/>
+            </a:solidFill>
+          </a:ln>
+          <a:effectLst/>
+        </p:spPr>
+        <p:style>
+          <a:lnRef idx="1">
+            <a:schemeClr val="accent1"/>
+          </a:lnRef>
+          <a:fillRef idx="3">
+            <a:schemeClr val="accent1"/>
+          </a:fillRef>
+          <a:effectRef idx="2">
+            <a:schemeClr val="accent1"/>
+          </a:effectRef>
+          <a:fontRef idx="minor">
+            <a:schemeClr val="lt1"/>
+          </a:fontRef>
+        </p:style>
+        <p:txBody>
+          <a:bodyPr rtlCol="0" anchor="t" wrap="square" lIns="101600" rIns="101600" tIns="101600" bIns="38100"/>
+          <a:lstStyle/>
+          <a:p>
+            <a:pPr algn="ctr"/>
+            <a:r>
+              <a:rPr sz="1100" b="0">
+                <a:solidFill>
+                  <a:srgbClr val="1F2937"/>
+                </a:solidFill>
+                <a:latin typeface="Calibri"/>
+              </a:rPr>
+              <a:t/>
+            </a:r>
+            <a:r>
+              <a:rPr sz="1300" b="1">
+                <a:solidFill>
+                  <a:srgbClr val="1F2937"/>
+                </a:solidFill>
+                <a:latin typeface="Calibri"/>
+              </a:rPr>
+              <a:t>Multi-team platform</a:t>
+            </a:r>
+          </a:p>
+          <a:p>
+            <a:pPr>
+              <a:spcBef>
+                <a:spcPts val="400"/>
+              </a:spcBef>
+            </a:pPr>
+            <a:r>
+              <a:rPr sz="1100">
+                <a:solidFill>
+                  <a:srgbClr val="5B6572"/>
+                </a:solidFill>
+                <a:latin typeface="Calibri"/>
+              </a:rPr>
+              <a:t>Two independent teams on one policy; promotion &amp; rollback proven.</a:t>
+            </a:r>
+          </a:p>
+        </p:txBody>
+      </p:sp>
+      <p:sp>
+        <p:nvSpPr>
+          <p:cNvPr id="10" name="Right Arrow 9"/>
+          <p:cNvSpPr/>
+          <p:nvPr/>
+        </p:nvSpPr>
+        <p:spPr>
+          <a:xfrm>
+            <a:off x="5029200" y="3291840"/>
+            <a:ext cx="182880" cy="182880"/>
+          </a:xfrm>
+          <a:prstGeom prst="rightArrow">
+            <a:avLst/>
+          </a:prstGeom>
+          <a:solidFill>
+            <a:srgbClr val="5B6572"/>
+          </a:solidFill>
+          <a:ln>
+            <a:noFill/>
+          </a:ln>
+          <a:effectLst/>
+        </p:spPr>
+        <p:style>
+          <a:lnRef idx="1">
+            <a:schemeClr val="accent1"/>
+          </a:lnRef>
+          <a:fillRef idx="3">
+            <a:schemeClr val="accent1"/>
+          </a:fillRef>
+          <a:effectRef idx="2">
+            <a:schemeClr val="accent1"/>
+          </a:effectRef>
+          <a:fontRef idx="minor">
+            <a:schemeClr val="lt1"/>
+          </a:fontRef>
+        </p:style>
+        <p:txBody>
+          <a:bodyPr rtlCol="0" anchor="ctr" wrap="square" lIns="76200" rIns="76200" tIns="38100" bIns="38100"/>
+          <a:lstStyle/>
+          <a:p>
+            <a:pPr algn="ctr"/>
+            <a:r>
+              <a:rPr sz="1300" b="0">
+                <a:solidFill>
+                  <a:srgbClr val="1F2937"/>
+                </a:solidFill>
+                <a:latin typeface="Calibri"/>
+              </a:rPr>
+              <a:t/>
+            </a:r>
+          </a:p>
+        </p:txBody>
+      </p:sp>
+      <p:sp>
+        <p:nvSpPr>
+          <p:cNvPr id="11" name="Rounded Rectangle 10"/>
+          <p:cNvSpPr/>
+          <p:nvPr/>
+        </p:nvSpPr>
+        <p:spPr>
+          <a:xfrm>
+            <a:off x="5230368" y="1600200"/>
+            <a:ext cx="2121408" cy="548640"/>
+          </a:xfrm>
+          <a:prstGeom prst="roundRect">
+            <a:avLst/>
+          </a:prstGeom>
+          <a:solidFill>
+            <a:srgbClr val="C9971D"/>
+          </a:solidFill>
+          <a:ln>
+            <a:noFill/>
+          </a:ln>
+          <a:effectLst/>
+        </p:spPr>
+        <p:style>
+          <a:lnRef idx="1">
+            <a:schemeClr val="accent1"/>
+          </a:lnRef>
+          <a:fillRef idx="3">
+            <a:schemeClr val="accent1"/>
+          </a:fillRef>
+          <a:effectRef idx="2">
+            <a:schemeClr val="accent1"/>
+          </a:effectRef>
+          <a:fontRef idx="minor">
+            <a:schemeClr val="lt1"/>
+          </a:fontRef>
+        </p:style>
+        <p:txBody>
+          <a:bodyPr rtlCol="0" anchor="ctr" wrap="square" lIns="76200" rIns="76200" tIns="38100" bIns="38100"/>
+          <a:lstStyle/>
+          <a:p>
+            <a:pPr algn="ctr"/>
+            <a:r>
+              <a:rPr sz="1300" b="1">
+                <a:solidFill>
+                  <a:srgbClr val="FFFFFF"/>
+                </a:solidFill>
+                <a:latin typeface="Calibri"/>
+              </a:rPr>
+              <a:t>Phase 3</a:t>
+            </a:r>
+          </a:p>
+        </p:txBody>
+      </p:sp>
+      <p:sp>
+        <p:nvSpPr>
+          <p:cNvPr id="12" name="Rounded Rectangle 11"/>
+          <p:cNvSpPr/>
+          <p:nvPr/>
+        </p:nvSpPr>
+        <p:spPr>
+          <a:xfrm>
+            <a:off x="5230368" y="2286000"/>
+            <a:ext cx="2121408" cy="2377440"/>
+          </a:xfrm>
+          <a:prstGeom prst="roundRect">
+            <a:avLst/>
+          </a:prstGeom>
+          <a:solidFill>
+            <a:srgbClr val="FFFFFF"/>
+          </a:solidFill>
+          <a:ln w="12700">
+            <a:solidFill>
+              <a:srgbClr val="C9D1D9"/>
+            </a:solidFill>
+          </a:ln>
+          <a:effectLst/>
+        </p:spPr>
+        <p:style>
+          <a:lnRef idx="1">
+            <a:schemeClr val="accent1"/>
+          </a:lnRef>
+          <a:fillRef idx="3">
+            <a:schemeClr val="accent1"/>
+          </a:fillRef>
+          <a:effectRef idx="2">
+            <a:schemeClr val="accent1"/>
+          </a:effectRef>
+          <a:fontRef idx="minor">
+            <a:schemeClr val="lt1"/>
+          </a:fontRef>
+        </p:style>
+        <p:txBody>
+          <a:bodyPr rtlCol="0" anchor="t" wrap="square" lIns="101600" rIns="101600" tIns="101600" bIns="38100"/>
+          <a:lstStyle/>
+          <a:p>
+            <a:pPr algn="ctr"/>
+            <a:r>
+              <a:rPr sz="1100" b="0">
+                <a:solidFill>
+                  <a:srgbClr val="1F2937"/>
+                </a:solidFill>
+                <a:latin typeface="Calibri"/>
+              </a:rPr>
+              <a:t/>
+            </a:r>
+            <a:r>
+              <a:rPr sz="1300" b="1">
+                <a:solidFill>
+                  <a:srgbClr val="1F2937"/>
+                </a:solidFill>
+                <a:latin typeface="Calibri"/>
+              </a:rPr>
+              <a:t>Guarded Gateway</a:t>
+            </a:r>
+          </a:p>
+          <a:p>
+            <a:pPr>
+              <a:spcBef>
+                <a:spcPts val="400"/>
+              </a:spcBef>
+            </a:pPr>
+            <a:r>
+              <a:rPr sz="1100">
+                <a:solidFill>
+                  <a:srgbClr val="5B6572"/>
+                </a:solidFill>
+                <a:latin typeface="Calibri"/>
+              </a:rPr>
+              <a:t>Fully managed, OpenAI-compatible gateway with guardrails built in (Mode B).</a:t>
+            </a:r>
+          </a:p>
+        </p:txBody>
+      </p:sp>
+      <p:sp>
+        <p:nvSpPr>
+          <p:cNvPr id="13" name="Right Arrow 12"/>
+          <p:cNvSpPr/>
+          <p:nvPr/>
+        </p:nvSpPr>
+        <p:spPr>
+          <a:xfrm>
+            <a:off x="7370064" y="3291840"/>
+            <a:ext cx="182880" cy="182880"/>
+          </a:xfrm>
+          <a:prstGeom prst="rightArrow">
+            <a:avLst/>
+          </a:prstGeom>
+          <a:solidFill>
+            <a:srgbClr val="5B6572"/>
+          </a:solidFill>
+          <a:ln>
+            <a:noFill/>
+          </a:ln>
+          <a:effectLst/>
+        </p:spPr>
+        <p:style>
+          <a:lnRef idx="1">
+            <a:schemeClr val="accent1"/>
+          </a:lnRef>
+          <a:fillRef idx="3">
+            <a:schemeClr val="accent1"/>
+          </a:fillRef>
+          <a:effectRef idx="2">
+            <a:schemeClr val="accent1"/>
+          </a:effectRef>
+          <a:fontRef idx="minor">
+            <a:schemeClr val="lt1"/>
+          </a:fontRef>
+        </p:style>
+        <p:txBody>
+          <a:bodyPr rtlCol="0" anchor="ctr" wrap="square" lIns="76200" rIns="76200" tIns="38100" bIns="38100"/>
+          <a:lstStyle/>
+          <a:p>
+            <a:pPr algn="ctr"/>
+            <a:r>
+              <a:rPr sz="1300" b="0">
+                <a:solidFill>
+                  <a:srgbClr val="1F2937"/>
+                </a:solidFill>
+                <a:latin typeface="Calibri"/>
+              </a:rPr>
+              <a:t/>
+            </a:r>
+          </a:p>
+        </p:txBody>
+      </p:sp>
+      <p:sp>
+        <p:nvSpPr>
+          <p:cNvPr id="14" name="Rounded Rectangle 13"/>
+          <p:cNvSpPr/>
+          <p:nvPr/>
+        </p:nvSpPr>
+        <p:spPr>
+          <a:xfrm>
+            <a:off x="7571232" y="1600200"/>
+            <a:ext cx="2121408" cy="548640"/>
+          </a:xfrm>
+          <a:prstGeom prst="roundRect">
+            <a:avLst/>
+          </a:prstGeom>
+          <a:solidFill>
+            <a:srgbClr val="27834A"/>
+          </a:solidFill>
+          <a:ln>
+            <a:noFill/>
+          </a:ln>
+          <a:effectLst/>
+        </p:spPr>
+        <p:style>
+          <a:lnRef idx="1">
+            <a:schemeClr val="accent1"/>
+          </a:lnRef>
+          <a:fillRef idx="3">
+            <a:schemeClr val="accent1"/>
+          </a:fillRef>
+          <a:effectRef idx="2">
+            <a:schemeClr val="accent1"/>
+          </a:effectRef>
+          <a:fontRef idx="minor">
+            <a:schemeClr val="lt1"/>
+          </a:fontRef>
+        </p:style>
+        <p:txBody>
+          <a:bodyPr rtlCol="0" anchor="ctr" wrap="square" lIns="76200" rIns="76200" tIns="38100" bIns="38100"/>
+          <a:lstStyle/>
+          <a:p>
+            <a:pPr algn="ctr"/>
+            <a:r>
+              <a:rPr sz="1300" b="1">
+                <a:solidFill>
+                  <a:srgbClr val="FFFFFF"/>
+                </a:solidFill>
+                <a:latin typeface="Calibri"/>
+              </a:rPr>
+              <a:t>Phase 4</a:t>
+            </a:r>
+          </a:p>
+        </p:txBody>
+      </p:sp>
+      <p:sp>
+        <p:nvSpPr>
+          <p:cNvPr id="15" name="Rounded Rectangle 14"/>
+          <p:cNvSpPr/>
+          <p:nvPr/>
+        </p:nvSpPr>
+        <p:spPr>
+          <a:xfrm>
+            <a:off x="7571232" y="2286000"/>
+            <a:ext cx="2121408" cy="2377440"/>
+          </a:xfrm>
+          <a:prstGeom prst="roundRect">
+            <a:avLst/>
+          </a:prstGeom>
+          <a:solidFill>
+            <a:srgbClr val="FFFFFF"/>
+          </a:solidFill>
+          <a:ln w="12700">
+            <a:solidFill>
+              <a:srgbClr val="C9D1D9"/>
+            </a:solidFill>
+          </a:ln>
+          <a:effectLst/>
+        </p:spPr>
+        <p:style>
+          <a:lnRef idx="1">
+            <a:schemeClr val="accent1"/>
+          </a:lnRef>
+          <a:fillRef idx="3">
+            <a:schemeClr val="accent1"/>
+          </a:fillRef>
+          <a:effectRef idx="2">
+            <a:schemeClr val="accent1"/>
+          </a:effectRef>
+          <a:fontRef idx="minor">
+            <a:schemeClr val="lt1"/>
+          </a:fontRef>
+        </p:style>
+        <p:txBody>
+          <a:bodyPr rtlCol="0" anchor="t" wrap="square" lIns="101600" rIns="101600" tIns="101600" bIns="38100"/>
+          <a:lstStyle/>
+          <a:p>
+            <a:pPr algn="ctr"/>
+            <a:r>
+              <a:rPr sz="1100" b="0">
+                <a:solidFill>
+                  <a:srgbClr val="1F2937"/>
+                </a:solidFill>
+                <a:latin typeface="Calibri"/>
+              </a:rPr>
+              <a:t/>
+            </a:r>
+            <a:r>
+              <a:rPr sz="1300" b="1">
+                <a:solidFill>
+                  <a:srgbClr val="1F2937"/>
+                </a:solidFill>
+                <a:latin typeface="Calibri"/>
+              </a:rPr>
+              <a:t>Customer-managed runtime</a:t>
+            </a:r>
+          </a:p>
+          <a:p>
+            <a:pPr>
+              <a:spcBef>
+                <a:spcPts val="400"/>
+              </a:spcBef>
+            </a:pPr>
+            <a:r>
+              <a:rPr sz="1100">
+                <a:solidFill>
+                  <a:srgbClr val="5B6572"/>
+                </a:solidFill>
+                <a:latin typeface="Calibri"/>
+              </a:rPr>
+              <a:t>Same runtime packaged for the customer's own AWS account (Mode C).</a:t>
+            </a:r>
+          </a:p>
+        </p:txBody>
+      </p:sp>
+      <p:sp>
+        <p:nvSpPr>
+          <p:cNvPr id="16" name="Right Arrow 15"/>
+          <p:cNvSpPr/>
+          <p:nvPr/>
+        </p:nvSpPr>
+        <p:spPr>
+          <a:xfrm>
+            <a:off x="9710928" y="3291840"/>
+            <a:ext cx="182880" cy="182880"/>
+          </a:xfrm>
+          <a:prstGeom prst="rightArrow">
+            <a:avLst/>
+          </a:prstGeom>
+          <a:solidFill>
+            <a:srgbClr val="5B6572"/>
+          </a:solidFill>
+          <a:ln>
+            <a:noFill/>
+          </a:ln>
+          <a:effectLst/>
+        </p:spPr>
+        <p:style>
+          <a:lnRef idx="1">
+            <a:schemeClr val="accent1"/>
+          </a:lnRef>
+          <a:fillRef idx="3">
+            <a:schemeClr val="accent1"/>
+          </a:fillRef>
+          <a:effectRef idx="2">
+            <a:schemeClr val="accent1"/>
+          </a:effectRef>
+          <a:fontRef idx="minor">
+            <a:schemeClr val="lt1"/>
+          </a:fontRef>
+        </p:style>
+        <p:txBody>
+          <a:bodyPr rtlCol="0" anchor="ctr" wrap="square" lIns="76200" rIns="76200" tIns="38100" bIns="38100"/>
+          <a:lstStyle/>
+          <a:p>
+            <a:pPr algn="ctr"/>
+            <a:r>
+              <a:rPr sz="1300" b="0">
+                <a:solidFill>
+                  <a:srgbClr val="1F2937"/>
+                </a:solidFill>
+                <a:latin typeface="Calibri"/>
+              </a:rPr>
+              <a:t/>
+            </a:r>
+          </a:p>
+        </p:txBody>
+      </p:sp>
+      <p:sp>
+        <p:nvSpPr>
+          <p:cNvPr id="17" name="Rounded Rectangle 16"/>
+          <p:cNvSpPr/>
+          <p:nvPr/>
+        </p:nvSpPr>
+        <p:spPr>
+          <a:xfrm>
+            <a:off x="9912096" y="1600200"/>
+            <a:ext cx="2121408" cy="548640"/>
+          </a:xfrm>
+          <a:prstGeom prst="roundRect">
+            <a:avLst/>
+          </a:prstGeom>
+          <a:solidFill>
+            <a:srgbClr val="0F766E"/>
+          </a:solidFill>
+          <a:ln>
+            <a:noFill/>
+          </a:ln>
+          <a:effectLst/>
+        </p:spPr>
+        <p:style>
+          <a:lnRef idx="1">
+            <a:schemeClr val="accent1"/>
+          </a:lnRef>
+          <a:fillRef idx="3">
+            <a:schemeClr val="accent1"/>
+          </a:fillRef>
+          <a:effectRef idx="2">
+            <a:schemeClr val="accent1"/>
+          </a:effectRef>
+          <a:fontRef idx="minor">
+            <a:schemeClr val="lt1"/>
+          </a:fontRef>
+        </p:style>
+        <p:txBody>
+          <a:bodyPr rtlCol="0" anchor="ctr" wrap="square" lIns="76200" rIns="76200" tIns="38100" bIns="38100"/>
+          <a:lstStyle/>
+          <a:p>
+            <a:pPr algn="ctr"/>
+            <a:r>
+              <a:rPr sz="1300" b="1">
+                <a:solidFill>
+                  <a:srgbClr val="FFFFFF"/>
+                </a:solidFill>
+                <a:latin typeface="Calibri"/>
+              </a:rPr>
+              <a:t>Phase 5</a:t>
+            </a:r>
+          </a:p>
+        </p:txBody>
+      </p:sp>
+      <p:sp>
+        <p:nvSpPr>
+          <p:cNvPr id="18" name="Rounded Rectangle 17"/>
+          <p:cNvSpPr/>
+          <p:nvPr/>
+        </p:nvSpPr>
+        <p:spPr>
+          <a:xfrm>
+            <a:off x="9912096" y="2286000"/>
+            <a:ext cx="2121408" cy="2377440"/>
+          </a:xfrm>
+          <a:prstGeom prst="roundRect">
+            <a:avLst/>
+          </a:prstGeom>
+          <a:solidFill>
+            <a:srgbClr val="FFFFFF"/>
+          </a:solidFill>
+          <a:ln w="12700">
+            <a:solidFill>
+              <a:srgbClr val="C9D1D9"/>
+            </a:solidFill>
+          </a:ln>
+          <a:effectLst/>
+        </p:spPr>
+        <p:style>
+          <a:lnRef idx="1">
+            <a:schemeClr val="accent1"/>
+          </a:lnRef>
+          <a:fillRef idx="3">
+            <a:schemeClr val="accent1"/>
+          </a:fillRef>
+          <a:effectRef idx="2">
+            <a:schemeClr val="accent1"/>
+          </a:effectRef>
+          <a:fontRef idx="minor">
+            <a:schemeClr val="lt1"/>
+          </a:fontRef>
+        </p:style>
+        <p:txBody>
+          <a:bodyPr rtlCol="0" anchor="t" wrap="square" lIns="101600" rIns="101600" tIns="101600" bIns="38100"/>
+          <a:lstStyle/>
+          <a:p>
+            <a:pPr algn="ctr"/>
+            <a:r>
+              <a:rPr sz="1100" b="0">
+                <a:solidFill>
+                  <a:srgbClr val="1F2937"/>
+                </a:solidFill>
+                <a:latin typeface="Calibri"/>
+              </a:rPr>
+              <a:t/>
+            </a:r>
+            <a:r>
+              <a:rPr sz="1300" b="1">
+                <a:solidFill>
+                  <a:srgbClr val="1F2937"/>
+                </a:solidFill>
+                <a:latin typeface="Calibri"/>
+              </a:rPr>
+              <a:t>Advanced agent protection</a:t>
+            </a:r>
+          </a:p>
+          <a:p>
+            <a:pPr>
+              <a:spcBef>
+                <a:spcPts val="400"/>
+              </a:spcBef>
+            </a:pPr>
+            <a:r>
+              <a:rPr sz="1100">
+                <a:solidFill>
+                  <a:srgbClr val="5B6572"/>
+                </a:solidFill>
+                <a:latin typeface="Calibri"/>
+              </a:rPr>
+              <a:t>Tool calls, retrieval, memory writes, MCP, human approvals.</a:t>
+            </a:r>
+          </a:p>
+        </p:txBody>
+      </p:sp>
+      <p:sp>
+        <p:nvSpPr>
+          <p:cNvPr id="19" name="Rounded Rectangle 18"/>
+          <p:cNvSpPr/>
+          <p:nvPr/>
+        </p:nvSpPr>
+        <p:spPr>
+          <a:xfrm>
+            <a:off x="548640" y="4892040"/>
+            <a:ext cx="11064240" cy="685800"/>
+          </a:xfrm>
+          <a:prstGeom prst="roundRect">
+            <a:avLst/>
+          </a:prstGeom>
+          <a:solidFill>
+            <a:srgbClr val="E4F0EE"/>
+          </a:solidFill>
+          <a:ln w="25400">
+            <a:solidFill>
+              <a:srgbClr val="0F766E"/>
+            </a:solidFill>
+          </a:ln>
+          <a:effectLst/>
+        </p:spPr>
+        <p:style>
+          <a:lnRef idx="1">
+            <a:schemeClr val="accent1"/>
+          </a:lnRef>
+          <a:fillRef idx="3">
+            <a:schemeClr val="accent1"/>
+          </a:fillRef>
+          <a:effectRef idx="2">
+            <a:schemeClr val="accent1"/>
+          </a:effectRef>
+          <a:fontRef idx="minor">
+            <a:schemeClr val="lt1"/>
+          </a:fontRef>
+        </p:style>
+        <p:txBody>
+          <a:bodyPr rtlCol="0" anchor="ctr" wrap="square" lIns="76200" rIns="76200" tIns="38100" bIns="38100"/>
+          <a:lstStyle/>
+          <a:p>
+            <a:pPr algn="ctr"/>
+            <a:r>
+              <a:rPr sz="1500" b="1">
+                <a:solidFill>
+                  <a:srgbClr val="2B3440"/>
+                </a:solidFill>
+                <a:latin typeface="Calibri"/>
+              </a:rPr>
+              <a:t>One MVP · one approval · delivered as a single 5-week program by one engineer + AI models</a:t>
+            </a:r>
+          </a:p>
+        </p:txBody>
+      </p:sp>
+      <p:sp>
+        <p:nvSpPr>
+          <p:cNvPr id="20" name="TextBox 19"/>
           <p:cNvSpPr txBox="1"/>
           <p:nvPr/>
         </p:nvSpPr>
         <p:spPr>
           <a:xfrm>
             <a:off x="548640" y="5806440"/>
-            <a:ext cx="11064240" cy="502920"/>
+            <a:ext cx="11064240" cy="457200"/>
           </a:xfrm>
           <a:prstGeom prst="rect">
             <a:avLst/>
@@ -6223,20 +6482,20 @@
           <a:p>
             <a:pPr algn="l"/>
             <a:r>
-              <a:rPr sz="1300" b="1" i="0">
+              <a:rPr sz="1400" b="1" i="0">
                 <a:solidFill>
                   <a:srgbClr val="2B3440"/>
                 </a:solidFill>
                 <a:latin typeface="Calibri"/>
               </a:rPr>
-              <a:t>Aggressive but bounded: the scope is frozen to the MVP list. If anything slips, we cut polish — never the two-instance proof.</a:t>
-            </a:r>
-          </a:p>
-        </p:txBody>
-      </p:sp>
-      <p:sp>
-        <p:nvSpPr>
-          <p:cNvPr id="7" name="TextBox 6"/>
+              <a:t>You approve the destination once — and get a working, demonstrable slice at the end of every week.</a:t>
+            </a:r>
+          </a:p>
+        </p:txBody>
+      </p:sp>
+      <p:sp>
+        <p:nvSpPr>
+          <p:cNvPr id="21" name="TextBox 20"/>
           <p:cNvSpPr txBox="1"/>
           <p:nvPr/>
         </p:nvSpPr>
@@ -6271,7 +6530,7 @@
       </p:sp>
       <p:sp>
         <p:nvSpPr>
-          <p:cNvPr id="8" name="TextBox 7"/>
+          <p:cNvPr id="22" name="TextBox 21"/>
           <p:cNvSpPr txBox="1"/>
           <p:nvPr/>
         </p:nvSpPr>
@@ -6352,7 +6611,7 @@
                 </a:solidFill>
                 <a:latin typeface="Calibri"/>
               </a:rPr>
-              <a:t>DELIVERY MODEL</a:t>
+              <a:t>TIMELINE</a:t>
             </a:r>
           </a:p>
         </p:txBody>
@@ -6387,7 +6646,7 @@
                 </a:solidFill>
                 <a:latin typeface="Calibri"/>
               </a:rPr>
-              <a:t>One engineer, multiplied by AI</a:t>
+              <a:t>Time estimation — five weeks, one week per phase</a:t>
             </a:r>
           </a:p>
         </p:txBody>
@@ -6438,20 +6697,320 @@
       </p:sp>
       <p:sp>
         <p:nvSpPr>
-          <p:cNvPr id="5" name="Rounded Rectangle 4"/>
+          <p:cNvPr id="5" name="TextBox 4"/>
+          <p:cNvSpPr txBox="1"/>
+          <p:nvPr/>
+        </p:nvSpPr>
+        <p:spPr>
+          <a:xfrm>
+            <a:off x="7315200" y="1298448"/>
+            <a:ext cx="859536" cy="274320"/>
+          </a:xfrm>
+          <a:prstGeom prst="rect">
+            <a:avLst/>
+          </a:prstGeom>
+          <a:noFill/>
+        </p:spPr>
+        <p:txBody>
+          <a:bodyPr wrap="square" anchor="t">
+            <a:spAutoFit/>
+          </a:bodyPr>
+          <a:lstStyle/>
+          <a:p>
+            <a:pPr algn="ctr"/>
+            <a:r>
+              <a:rPr sz="1100" b="1" i="0">
+                <a:solidFill>
+                  <a:srgbClr val="5B6572"/>
+                </a:solidFill>
+                <a:latin typeface="Calibri"/>
+              </a:rPr>
+              <a:t>W1</a:t>
+            </a:r>
+          </a:p>
+        </p:txBody>
+      </p:sp>
+      <p:sp>
+        <p:nvSpPr>
+          <p:cNvPr id="6" name="TextBox 5"/>
+          <p:cNvSpPr txBox="1"/>
+          <p:nvPr/>
+        </p:nvSpPr>
+        <p:spPr>
+          <a:xfrm>
+            <a:off x="8174736" y="1298448"/>
+            <a:ext cx="859536" cy="274320"/>
+          </a:xfrm>
+          <a:prstGeom prst="rect">
+            <a:avLst/>
+          </a:prstGeom>
+          <a:noFill/>
+        </p:spPr>
+        <p:txBody>
+          <a:bodyPr wrap="square" anchor="t">
+            <a:spAutoFit/>
+          </a:bodyPr>
+          <a:lstStyle/>
+          <a:p>
+            <a:pPr algn="ctr"/>
+            <a:r>
+              <a:rPr sz="1100" b="1" i="0">
+                <a:solidFill>
+                  <a:srgbClr val="5B6572"/>
+                </a:solidFill>
+                <a:latin typeface="Calibri"/>
+              </a:rPr>
+              <a:t>W2</a:t>
+            </a:r>
+          </a:p>
+        </p:txBody>
+      </p:sp>
+      <p:sp>
+        <p:nvSpPr>
+          <p:cNvPr id="7" name="TextBox 6"/>
+          <p:cNvSpPr txBox="1"/>
+          <p:nvPr/>
+        </p:nvSpPr>
+        <p:spPr>
+          <a:xfrm>
+            <a:off x="9034272" y="1298448"/>
+            <a:ext cx="859536" cy="274320"/>
+          </a:xfrm>
+          <a:prstGeom prst="rect">
+            <a:avLst/>
+          </a:prstGeom>
+          <a:noFill/>
+        </p:spPr>
+        <p:txBody>
+          <a:bodyPr wrap="square" anchor="t">
+            <a:spAutoFit/>
+          </a:bodyPr>
+          <a:lstStyle/>
+          <a:p>
+            <a:pPr algn="ctr"/>
+            <a:r>
+              <a:rPr sz="1100" b="1" i="0">
+                <a:solidFill>
+                  <a:srgbClr val="5B6572"/>
+                </a:solidFill>
+                <a:latin typeface="Calibri"/>
+              </a:rPr>
+              <a:t>W3</a:t>
+            </a:r>
+          </a:p>
+        </p:txBody>
+      </p:sp>
+      <p:sp>
+        <p:nvSpPr>
+          <p:cNvPr id="8" name="TextBox 7"/>
+          <p:cNvSpPr txBox="1"/>
+          <p:nvPr/>
+        </p:nvSpPr>
+        <p:spPr>
+          <a:xfrm>
+            <a:off x="9893808" y="1298448"/>
+            <a:ext cx="859536" cy="274320"/>
+          </a:xfrm>
+          <a:prstGeom prst="rect">
+            <a:avLst/>
+          </a:prstGeom>
+          <a:noFill/>
+        </p:spPr>
+        <p:txBody>
+          <a:bodyPr wrap="square" anchor="t">
+            <a:spAutoFit/>
+          </a:bodyPr>
+          <a:lstStyle/>
+          <a:p>
+            <a:pPr algn="ctr"/>
+            <a:r>
+              <a:rPr sz="1100" b="1" i="0">
+                <a:solidFill>
+                  <a:srgbClr val="5B6572"/>
+                </a:solidFill>
+                <a:latin typeface="Calibri"/>
+              </a:rPr>
+              <a:t>W4</a:t>
+            </a:r>
+          </a:p>
+        </p:txBody>
+      </p:sp>
+      <p:sp>
+        <p:nvSpPr>
+          <p:cNvPr id="9" name="TextBox 8"/>
+          <p:cNvSpPr txBox="1"/>
+          <p:nvPr/>
+        </p:nvSpPr>
+        <p:spPr>
+          <a:xfrm>
+            <a:off x="10753344" y="1298448"/>
+            <a:ext cx="859536" cy="274320"/>
+          </a:xfrm>
+          <a:prstGeom prst="rect">
+            <a:avLst/>
+          </a:prstGeom>
+          <a:noFill/>
+        </p:spPr>
+        <p:txBody>
+          <a:bodyPr wrap="square" anchor="t">
+            <a:spAutoFit/>
+          </a:bodyPr>
+          <a:lstStyle/>
+          <a:p>
+            <a:pPr algn="ctr"/>
+            <a:r>
+              <a:rPr sz="1100" b="1" i="0">
+                <a:solidFill>
+                  <a:srgbClr val="5B6572"/>
+                </a:solidFill>
+                <a:latin typeface="Calibri"/>
+              </a:rPr>
+              <a:t>W5</a:t>
+            </a:r>
+          </a:p>
+        </p:txBody>
+      </p:sp>
+      <p:sp>
+        <p:nvSpPr>
+          <p:cNvPr id="10" name="TextBox 9"/>
+          <p:cNvSpPr txBox="1"/>
+          <p:nvPr/>
+        </p:nvSpPr>
+        <p:spPr>
+          <a:xfrm>
+            <a:off x="548640" y="1627632"/>
+            <a:ext cx="6583680" cy="365760"/>
+          </a:xfrm>
+          <a:prstGeom prst="rect">
+            <a:avLst/>
+          </a:prstGeom>
+          <a:noFill/>
+        </p:spPr>
+        <p:txBody>
+          <a:bodyPr wrap="square" anchor="t">
+            <a:spAutoFit/>
+          </a:bodyPr>
+          <a:lstStyle/>
+          <a:p>
+            <a:pPr algn="l"/>
+            <a:r>
+              <a:rPr sz="1350" b="1" i="0">
+                <a:solidFill>
+                  <a:srgbClr val="1F2937"/>
+                </a:solidFill>
+                <a:latin typeface="Calibri"/>
+              </a:rPr>
+              <a:t>Phase 1 · Integration proof</a:t>
+            </a:r>
+          </a:p>
+        </p:txBody>
+      </p:sp>
+      <p:sp>
+        <p:nvSpPr>
+          <p:cNvPr id="11" name="TextBox 10"/>
+          <p:cNvSpPr txBox="1"/>
+          <p:nvPr/>
+        </p:nvSpPr>
+        <p:spPr>
+          <a:xfrm>
+            <a:off x="548640" y="1938528"/>
+            <a:ext cx="6583680" cy="502920"/>
+          </a:xfrm>
+          <a:prstGeom prst="rect">
+            <a:avLst/>
+          </a:prstGeom>
+          <a:noFill/>
+        </p:spPr>
+        <p:txBody>
+          <a:bodyPr wrap="square" anchor="t">
+            <a:spAutoFit/>
+          </a:bodyPr>
+          <a:lstStyle/>
+          <a:p>
+            <a:pPr algn="l"/>
+            <a:r>
+              <a:rPr sz="1100" b="0" i="0">
+                <a:solidFill>
+                  <a:srgbClr val="5B6572"/>
+                </a:solidFill>
+                <a:latin typeface="Calibri"/>
+              </a:rPr>
+              <a:t>Evaluation contract, policy format, Bedrock Guardrails adapter, LiteLLM connector, observe mode.</a:t>
+            </a:r>
+          </a:p>
+        </p:txBody>
+      </p:sp>
+      <p:sp>
+        <p:nvSpPr>
+          <p:cNvPr id="12" name="Rectangle 11"/>
           <p:cNvSpPr/>
           <p:nvPr/>
         </p:nvSpPr>
         <p:spPr>
           <a:xfrm>
-            <a:off x="548640" y="1554480"/>
-            <a:ext cx="4572000" cy="548640"/>
+            <a:off x="7315200" y="1673352"/>
+            <a:ext cx="4297679" cy="658368"/>
+          </a:xfrm>
+          <a:prstGeom prst="rect">
+            <a:avLst/>
+          </a:prstGeom>
+          <a:solidFill>
+            <a:srgbClr val="F2F4F7"/>
+          </a:solidFill>
+          <a:ln w="6350">
+            <a:solidFill>
+              <a:srgbClr val="C9D1D9"/>
+            </a:solidFill>
+          </a:ln>
+          <a:effectLst/>
+        </p:spPr>
+        <p:style>
+          <a:lnRef idx="1">
+            <a:schemeClr val="accent1"/>
+          </a:lnRef>
+          <a:fillRef idx="3">
+            <a:schemeClr val="accent1"/>
+          </a:fillRef>
+          <a:effectRef idx="2">
+            <a:schemeClr val="accent1"/>
+          </a:effectRef>
+          <a:fontRef idx="minor">
+            <a:schemeClr val="lt1"/>
+          </a:fontRef>
+        </p:style>
+        <p:txBody>
+          <a:bodyPr rtlCol="0" anchor="ctr" wrap="square" lIns="76200" rIns="76200" tIns="38100" bIns="38100"/>
+          <a:lstStyle/>
+          <a:p>
+            <a:pPr algn="ctr"/>
+            <a:r>
+              <a:rPr sz="1300" b="0">
+                <a:solidFill>
+                  <a:srgbClr val="1F2937"/>
+                </a:solidFill>
+                <a:latin typeface="Calibri"/>
+              </a:rPr>
+              <a:t/>
+            </a:r>
+          </a:p>
+        </p:txBody>
+      </p:sp>
+      <p:sp>
+        <p:nvSpPr>
+          <p:cNvPr id="13" name="Rounded Rectangle 12"/>
+          <p:cNvSpPr/>
+          <p:nvPr/>
+        </p:nvSpPr>
+        <p:spPr>
+          <a:xfrm>
+            <a:off x="7360920" y="1737360"/>
+            <a:ext cx="768096" cy="530352"/>
           </a:xfrm>
           <a:prstGeom prst="roundRect">
             <a:avLst/>
           </a:prstGeom>
           <a:solidFill>
-            <a:srgbClr val="2B3440"/>
+            <a:srgbClr val="3D7DC8"/>
           </a:solidFill>
           <a:ln>
             <a:noFill/>
@@ -6478,27 +7037,27 @@
           <a:p>
             <a:pPr algn="ctr"/>
             <a:r>
-              <a:rPr sz="1400" b="1">
-                <a:solidFill>
-                  <a:srgbClr val="FFFFFF"/>
-                </a:solidFill>
-                <a:latin typeface="Calibri"/>
-              </a:rPr>
-              <a:t>The engineer owns</a:t>
-            </a:r>
-          </a:p>
-        </p:txBody>
-      </p:sp>
-      <p:sp>
-        <p:nvSpPr>
-          <p:cNvPr id="6" name="TextBox 5"/>
+              <a:rPr sz="1000" b="0">
+                <a:solidFill>
+                  <a:srgbClr val="1F2937"/>
+                </a:solidFill>
+                <a:latin typeface="Calibri"/>
+              </a:rPr>
+              <a:t/>
+            </a:r>
+          </a:p>
+        </p:txBody>
+      </p:sp>
+      <p:sp>
+        <p:nvSpPr>
+          <p:cNvPr id="14" name="TextBox 13"/>
           <p:cNvSpPr txBox="1"/>
           <p:nvPr/>
         </p:nvSpPr>
         <p:spPr>
           <a:xfrm>
-            <a:off x="685800" y="2240280"/>
-            <a:ext cx="4389120" cy="3108960"/>
+            <a:off x="548640" y="2505456"/>
+            <a:ext cx="6583680" cy="365760"/>
           </a:xfrm>
           <a:prstGeom prst="rect">
             <a:avLst/>
@@ -6506,124 +7065,658 @@
           <a:noFill/>
         </p:spPr>
         <p:txBody>
-          <a:bodyPr wrap="square">
+          <a:bodyPr wrap="square" anchor="t">
             <a:spAutoFit/>
           </a:bodyPr>
           <a:lstStyle/>
           <a:p>
-            <a:pPr>
-              <a:spcAft>
-                <a:spcPts val="800"/>
-              </a:spcAft>
-            </a:pPr>
-            <a:r>
-              <a:rPr sz="1300">
-                <a:solidFill>
-                  <a:srgbClr val="0F766E"/>
-                </a:solidFill>
-                <a:latin typeface="Calibri"/>
-              </a:rPr>
-              <a:t>▪  </a:t>
-            </a:r>
-            <a:r>
-              <a:rPr sz="1300" b="1">
+            <a:pPr algn="l"/>
+            <a:r>
+              <a:rPr sz="1350" b="1" i="0">
                 <a:solidFill>
                   <a:srgbClr val="1F2937"/>
                 </a:solidFill>
                 <a:latin typeface="Calibri"/>
               </a:rPr>
-              <a:t>Architecture &amp; decisions</a:t>
-            </a:r>
-            <a:r>
-              <a:rPr sz="1300">
+              <a:t>Phase 2 · Multi-team platform</a:t>
+            </a:r>
+          </a:p>
+        </p:txBody>
+      </p:sp>
+      <p:sp>
+        <p:nvSpPr>
+          <p:cNvPr id="15" name="TextBox 14"/>
+          <p:cNvSpPr txBox="1"/>
+          <p:nvPr/>
+        </p:nvSpPr>
+        <p:spPr>
+          <a:xfrm>
+            <a:off x="548640" y="2816352"/>
+            <a:ext cx="6583680" cy="502920"/>
+          </a:xfrm>
+          <a:prstGeom prst="rect">
+            <a:avLst/>
+          </a:prstGeom>
+          <a:noFill/>
+        </p:spPr>
+        <p:txBody>
+          <a:bodyPr wrap="square" anchor="t">
+            <a:spAutoFit/>
+          </a:bodyPr>
+          <a:lstStyle/>
+          <a:p>
+            <a:pPr algn="l"/>
+            <a:r>
+              <a:rPr sz="1100" b="0" i="0">
                 <a:solidFill>
                   <a:srgbClr val="5B6572"/>
                 </a:solidFill>
                 <a:latin typeface="Calibri"/>
               </a:rPr>
-              <a:t> — scope, contracts, trade-offs.</a:t>
-            </a:r>
-          </a:p>
-          <a:p>
-            <a:pPr>
-              <a:spcAft>
-                <a:spcPts val="800"/>
-              </a:spcAft>
-            </a:pPr>
-            <a:r>
-              <a:rPr sz="1300">
-                <a:solidFill>
-                  <a:srgbClr val="0F766E"/>
-                </a:solidFill>
-                <a:latin typeface="Calibri"/>
-              </a:rPr>
-              <a:t>▪  </a:t>
-            </a:r>
-            <a:r>
-              <a:rPr sz="1300" b="1">
+              <a:t>Second independent LiteLLM instance onboarded; one Observe, one Enforce; policy upgrade &amp; rollback.</a:t>
+            </a:r>
+          </a:p>
+        </p:txBody>
+      </p:sp>
+      <p:sp>
+        <p:nvSpPr>
+          <p:cNvPr id="16" name="Rectangle 15"/>
+          <p:cNvSpPr/>
+          <p:nvPr/>
+        </p:nvSpPr>
+        <p:spPr>
+          <a:xfrm>
+            <a:off x="7315200" y="2551176"/>
+            <a:ext cx="4297679" cy="658368"/>
+          </a:xfrm>
+          <a:prstGeom prst="rect">
+            <a:avLst/>
+          </a:prstGeom>
+          <a:solidFill>
+            <a:srgbClr val="F2F4F7"/>
+          </a:solidFill>
+          <a:ln w="6350">
+            <a:solidFill>
+              <a:srgbClr val="C9D1D9"/>
+            </a:solidFill>
+          </a:ln>
+          <a:effectLst/>
+        </p:spPr>
+        <p:style>
+          <a:lnRef idx="1">
+            <a:schemeClr val="accent1"/>
+          </a:lnRef>
+          <a:fillRef idx="3">
+            <a:schemeClr val="accent1"/>
+          </a:fillRef>
+          <a:effectRef idx="2">
+            <a:schemeClr val="accent1"/>
+          </a:effectRef>
+          <a:fontRef idx="minor">
+            <a:schemeClr val="lt1"/>
+          </a:fontRef>
+        </p:style>
+        <p:txBody>
+          <a:bodyPr rtlCol="0" anchor="ctr" wrap="square" lIns="76200" rIns="76200" tIns="38100" bIns="38100"/>
+          <a:lstStyle/>
+          <a:p>
+            <a:pPr algn="ctr"/>
+            <a:r>
+              <a:rPr sz="1300" b="0">
                 <a:solidFill>
                   <a:srgbClr val="1F2937"/>
                 </a:solidFill>
                 <a:latin typeface="Calibri"/>
               </a:rPr>
-              <a:t>Review &amp; acceptance</a:t>
-            </a:r>
-            <a:r>
-              <a:rPr sz="1300">
+              <a:t/>
+            </a:r>
+          </a:p>
+        </p:txBody>
+      </p:sp>
+      <p:sp>
+        <p:nvSpPr>
+          <p:cNvPr id="17" name="Rounded Rectangle 16"/>
+          <p:cNvSpPr/>
+          <p:nvPr/>
+        </p:nvSpPr>
+        <p:spPr>
+          <a:xfrm>
+            <a:off x="8220456" y="2615184"/>
+            <a:ext cx="768096" cy="530352"/>
+          </a:xfrm>
+          <a:prstGeom prst="roundRect">
+            <a:avLst/>
+          </a:prstGeom>
+          <a:solidFill>
+            <a:srgbClr val="3D7DC8"/>
+          </a:solidFill>
+          <a:ln>
+            <a:noFill/>
+          </a:ln>
+          <a:effectLst/>
+        </p:spPr>
+        <p:style>
+          <a:lnRef idx="1">
+            <a:schemeClr val="accent1"/>
+          </a:lnRef>
+          <a:fillRef idx="3">
+            <a:schemeClr val="accent1"/>
+          </a:fillRef>
+          <a:effectRef idx="2">
+            <a:schemeClr val="accent1"/>
+          </a:effectRef>
+          <a:fontRef idx="minor">
+            <a:schemeClr val="lt1"/>
+          </a:fontRef>
+        </p:style>
+        <p:txBody>
+          <a:bodyPr rtlCol="0" anchor="ctr" wrap="square" lIns="76200" rIns="76200" tIns="38100" bIns="38100"/>
+          <a:lstStyle/>
+          <a:p>
+            <a:pPr algn="ctr"/>
+            <a:r>
+              <a:rPr sz="1000" b="0">
+                <a:solidFill>
+                  <a:srgbClr val="1F2937"/>
+                </a:solidFill>
+                <a:latin typeface="Calibri"/>
+              </a:rPr>
+              <a:t/>
+            </a:r>
+          </a:p>
+        </p:txBody>
+      </p:sp>
+      <p:sp>
+        <p:nvSpPr>
+          <p:cNvPr id="18" name="TextBox 17"/>
+          <p:cNvSpPr txBox="1"/>
+          <p:nvPr/>
+        </p:nvSpPr>
+        <p:spPr>
+          <a:xfrm>
+            <a:off x="548640" y="3383280"/>
+            <a:ext cx="6583680" cy="365760"/>
+          </a:xfrm>
+          <a:prstGeom prst="rect">
+            <a:avLst/>
+          </a:prstGeom>
+          <a:noFill/>
+        </p:spPr>
+        <p:txBody>
+          <a:bodyPr wrap="square" anchor="t">
+            <a:spAutoFit/>
+          </a:bodyPr>
+          <a:lstStyle/>
+          <a:p>
+            <a:pPr algn="l"/>
+            <a:r>
+              <a:rPr sz="1350" b="1" i="0">
+                <a:solidFill>
+                  <a:srgbClr val="1F2937"/>
+                </a:solidFill>
+                <a:latin typeface="Calibri"/>
+              </a:rPr>
+              <a:t>Phase 3 · Guarded Gateway</a:t>
+            </a:r>
+          </a:p>
+        </p:txBody>
+      </p:sp>
+      <p:sp>
+        <p:nvSpPr>
+          <p:cNvPr id="19" name="TextBox 18"/>
+          <p:cNvSpPr txBox="1"/>
+          <p:nvPr/>
+        </p:nvSpPr>
+        <p:spPr>
+          <a:xfrm>
+            <a:off x="548640" y="3694176"/>
+            <a:ext cx="6583680" cy="502920"/>
+          </a:xfrm>
+          <a:prstGeom prst="rect">
+            <a:avLst/>
+          </a:prstGeom>
+          <a:noFill/>
+        </p:spPr>
+        <p:txBody>
+          <a:bodyPr wrap="square" anchor="t">
+            <a:spAutoFit/>
+          </a:bodyPr>
+          <a:lstStyle/>
+          <a:p>
+            <a:pPr algn="l"/>
+            <a:r>
+              <a:rPr sz="1100" b="0" i="0">
                 <a:solidFill>
                   <a:srgbClr val="5B6572"/>
                 </a:solidFill>
                 <a:latin typeface="Calibri"/>
               </a:rPr>
-              <a:t> — every AI-produced change is reviewed before merge.</a:t>
-            </a:r>
-          </a:p>
-          <a:p>
-            <a:pPr>
-              <a:spcAft>
-                <a:spcPts val="800"/>
-              </a:spcAft>
-            </a:pPr>
-            <a:r>
-              <a:rPr sz="1300">
-                <a:solidFill>
-                  <a:srgbClr val="0F766E"/>
-                </a:solidFill>
-                <a:latin typeface="Calibri"/>
-              </a:rPr>
-              <a:t>▪  </a:t>
-            </a:r>
-            <a:r>
-              <a:rPr sz="1300" b="1">
+              <a:t>Managed OpenAI-compatible endpoint with guardrails and model routing (Mode B).</a:t>
+            </a:r>
+          </a:p>
+        </p:txBody>
+      </p:sp>
+      <p:sp>
+        <p:nvSpPr>
+          <p:cNvPr id="20" name="Rectangle 19"/>
+          <p:cNvSpPr/>
+          <p:nvPr/>
+        </p:nvSpPr>
+        <p:spPr>
+          <a:xfrm>
+            <a:off x="7315200" y="3429000"/>
+            <a:ext cx="4297679" cy="658368"/>
+          </a:xfrm>
+          <a:prstGeom prst="rect">
+            <a:avLst/>
+          </a:prstGeom>
+          <a:solidFill>
+            <a:srgbClr val="F2F4F7"/>
+          </a:solidFill>
+          <a:ln w="6350">
+            <a:solidFill>
+              <a:srgbClr val="C9D1D9"/>
+            </a:solidFill>
+          </a:ln>
+          <a:effectLst/>
+        </p:spPr>
+        <p:style>
+          <a:lnRef idx="1">
+            <a:schemeClr val="accent1"/>
+          </a:lnRef>
+          <a:fillRef idx="3">
+            <a:schemeClr val="accent1"/>
+          </a:fillRef>
+          <a:effectRef idx="2">
+            <a:schemeClr val="accent1"/>
+          </a:effectRef>
+          <a:fontRef idx="minor">
+            <a:schemeClr val="lt1"/>
+          </a:fontRef>
+        </p:style>
+        <p:txBody>
+          <a:bodyPr rtlCol="0" anchor="ctr" wrap="square" lIns="76200" rIns="76200" tIns="38100" bIns="38100"/>
+          <a:lstStyle/>
+          <a:p>
+            <a:pPr algn="ctr"/>
+            <a:r>
+              <a:rPr sz="1300" b="0">
                 <a:solidFill>
                   <a:srgbClr val="1F2937"/>
                 </a:solidFill>
                 <a:latin typeface="Calibri"/>
               </a:rPr>
-              <a:t>The demo</a:t>
-            </a:r>
-            <a:r>
-              <a:rPr sz="1300">
+              <a:t/>
+            </a:r>
+          </a:p>
+        </p:txBody>
+      </p:sp>
+      <p:sp>
+        <p:nvSpPr>
+          <p:cNvPr id="21" name="Rounded Rectangle 20"/>
+          <p:cNvSpPr/>
+          <p:nvPr/>
+        </p:nvSpPr>
+        <p:spPr>
+          <a:xfrm>
+            <a:off x="9079992" y="3493008"/>
+            <a:ext cx="768096" cy="530352"/>
+          </a:xfrm>
+          <a:prstGeom prst="roundRect">
+            <a:avLst/>
+          </a:prstGeom>
+          <a:solidFill>
+            <a:srgbClr val="C9971D"/>
+          </a:solidFill>
+          <a:ln>
+            <a:noFill/>
+          </a:ln>
+          <a:effectLst/>
+        </p:spPr>
+        <p:style>
+          <a:lnRef idx="1">
+            <a:schemeClr val="accent1"/>
+          </a:lnRef>
+          <a:fillRef idx="3">
+            <a:schemeClr val="accent1"/>
+          </a:fillRef>
+          <a:effectRef idx="2">
+            <a:schemeClr val="accent1"/>
+          </a:effectRef>
+          <a:fontRef idx="minor">
+            <a:schemeClr val="lt1"/>
+          </a:fontRef>
+        </p:style>
+        <p:txBody>
+          <a:bodyPr rtlCol="0" anchor="ctr" wrap="square" lIns="76200" rIns="76200" tIns="38100" bIns="38100"/>
+          <a:lstStyle/>
+          <a:p>
+            <a:pPr algn="ctr"/>
+            <a:r>
+              <a:rPr sz="1000" b="0">
+                <a:solidFill>
+                  <a:srgbClr val="1F2937"/>
+                </a:solidFill>
+                <a:latin typeface="Calibri"/>
+              </a:rPr>
+              <a:t/>
+            </a:r>
+          </a:p>
+        </p:txBody>
+      </p:sp>
+      <p:sp>
+        <p:nvSpPr>
+          <p:cNvPr id="22" name="TextBox 21"/>
+          <p:cNvSpPr txBox="1"/>
+          <p:nvPr/>
+        </p:nvSpPr>
+        <p:spPr>
+          <a:xfrm>
+            <a:off x="548640" y="4261104"/>
+            <a:ext cx="6583680" cy="365760"/>
+          </a:xfrm>
+          <a:prstGeom prst="rect">
+            <a:avLst/>
+          </a:prstGeom>
+          <a:noFill/>
+        </p:spPr>
+        <p:txBody>
+          <a:bodyPr wrap="square" anchor="t">
+            <a:spAutoFit/>
+          </a:bodyPr>
+          <a:lstStyle/>
+          <a:p>
+            <a:pPr algn="l"/>
+            <a:r>
+              <a:rPr sz="1350" b="1" i="0">
+                <a:solidFill>
+                  <a:srgbClr val="1F2937"/>
+                </a:solidFill>
+                <a:latin typeface="Calibri"/>
+              </a:rPr>
+              <a:t>Phase 4 · Customer-managed runtime</a:t>
+            </a:r>
+          </a:p>
+        </p:txBody>
+      </p:sp>
+      <p:sp>
+        <p:nvSpPr>
+          <p:cNvPr id="23" name="TextBox 22"/>
+          <p:cNvSpPr txBox="1"/>
+          <p:nvPr/>
+        </p:nvSpPr>
+        <p:spPr>
+          <a:xfrm>
+            <a:off x="548640" y="4572000"/>
+            <a:ext cx="6583680" cy="502920"/>
+          </a:xfrm>
+          <a:prstGeom prst="rect">
+            <a:avLst/>
+          </a:prstGeom>
+          <a:noFill/>
+        </p:spPr>
+        <p:txBody>
+          <a:bodyPr wrap="square" anchor="t">
+            <a:spAutoFit/>
+          </a:bodyPr>
+          <a:lstStyle/>
+          <a:p>
+            <a:pPr algn="l"/>
+            <a:r>
+              <a:rPr sz="1100" b="0" i="0">
                 <a:solidFill>
                   <a:srgbClr val="5B6572"/>
                 </a:solidFill>
                 <a:latin typeface="Calibri"/>
               </a:rPr>
-              <a:t> — runs the two-instance proof live.</a:t>
-            </a:r>
-          </a:p>
-        </p:txBody>
-      </p:sp>
-      <p:sp>
-        <p:nvSpPr>
-          <p:cNvPr id="7" name="Rounded Rectangle 6"/>
+              <a:t>Runtime packaged for a customer AWS account; local policy cache, offline execution (Mode C).</a:t>
+            </a:r>
+          </a:p>
+        </p:txBody>
+      </p:sp>
+      <p:sp>
+        <p:nvSpPr>
+          <p:cNvPr id="24" name="Rectangle 23"/>
           <p:cNvSpPr/>
           <p:nvPr/>
         </p:nvSpPr>
         <p:spPr>
           <a:xfrm>
-            <a:off x="5486400" y="1554480"/>
-            <a:ext cx="6126480" cy="548640"/>
+            <a:off x="7315200" y="4306824"/>
+            <a:ext cx="4297679" cy="658368"/>
+          </a:xfrm>
+          <a:prstGeom prst="rect">
+            <a:avLst/>
+          </a:prstGeom>
+          <a:solidFill>
+            <a:srgbClr val="F2F4F7"/>
+          </a:solidFill>
+          <a:ln w="6350">
+            <a:solidFill>
+              <a:srgbClr val="C9D1D9"/>
+            </a:solidFill>
+          </a:ln>
+          <a:effectLst/>
+        </p:spPr>
+        <p:style>
+          <a:lnRef idx="1">
+            <a:schemeClr val="accent1"/>
+          </a:lnRef>
+          <a:fillRef idx="3">
+            <a:schemeClr val="accent1"/>
+          </a:fillRef>
+          <a:effectRef idx="2">
+            <a:schemeClr val="accent1"/>
+          </a:effectRef>
+          <a:fontRef idx="minor">
+            <a:schemeClr val="lt1"/>
+          </a:fontRef>
+        </p:style>
+        <p:txBody>
+          <a:bodyPr rtlCol="0" anchor="ctr" wrap="square" lIns="76200" rIns="76200" tIns="38100" bIns="38100"/>
+          <a:lstStyle/>
+          <a:p>
+            <a:pPr algn="ctr"/>
+            <a:r>
+              <a:rPr sz="1300" b="0">
+                <a:solidFill>
+                  <a:srgbClr val="1F2937"/>
+                </a:solidFill>
+                <a:latin typeface="Calibri"/>
+              </a:rPr>
+              <a:t/>
+            </a:r>
+          </a:p>
+        </p:txBody>
+      </p:sp>
+      <p:sp>
+        <p:nvSpPr>
+          <p:cNvPr id="25" name="Rounded Rectangle 24"/>
+          <p:cNvSpPr/>
+          <p:nvPr/>
+        </p:nvSpPr>
+        <p:spPr>
+          <a:xfrm>
+            <a:off x="9939528" y="4370832"/>
+            <a:ext cx="768096" cy="530352"/>
+          </a:xfrm>
+          <a:prstGeom prst="roundRect">
+            <a:avLst/>
+          </a:prstGeom>
+          <a:solidFill>
+            <a:srgbClr val="27834A"/>
+          </a:solidFill>
+          <a:ln>
+            <a:noFill/>
+          </a:ln>
+          <a:effectLst/>
+        </p:spPr>
+        <p:style>
+          <a:lnRef idx="1">
+            <a:schemeClr val="accent1"/>
+          </a:lnRef>
+          <a:fillRef idx="3">
+            <a:schemeClr val="accent1"/>
+          </a:fillRef>
+          <a:effectRef idx="2">
+            <a:schemeClr val="accent1"/>
+          </a:effectRef>
+          <a:fontRef idx="minor">
+            <a:schemeClr val="lt1"/>
+          </a:fontRef>
+        </p:style>
+        <p:txBody>
+          <a:bodyPr rtlCol="0" anchor="ctr" wrap="square" lIns="76200" rIns="76200" tIns="38100" bIns="38100"/>
+          <a:lstStyle/>
+          <a:p>
+            <a:pPr algn="ctr"/>
+            <a:r>
+              <a:rPr sz="1000" b="0">
+                <a:solidFill>
+                  <a:srgbClr val="1F2937"/>
+                </a:solidFill>
+                <a:latin typeface="Calibri"/>
+              </a:rPr>
+              <a:t/>
+            </a:r>
+          </a:p>
+        </p:txBody>
+      </p:sp>
+      <p:sp>
+        <p:nvSpPr>
+          <p:cNvPr id="26" name="TextBox 25"/>
+          <p:cNvSpPr txBox="1"/>
+          <p:nvPr/>
+        </p:nvSpPr>
+        <p:spPr>
+          <a:xfrm>
+            <a:off x="548640" y="5138928"/>
+            <a:ext cx="6583680" cy="365760"/>
+          </a:xfrm>
+          <a:prstGeom prst="rect">
+            <a:avLst/>
+          </a:prstGeom>
+          <a:noFill/>
+        </p:spPr>
+        <p:txBody>
+          <a:bodyPr wrap="square" anchor="t">
+            <a:spAutoFit/>
+          </a:bodyPr>
+          <a:lstStyle/>
+          <a:p>
+            <a:pPr algn="l"/>
+            <a:r>
+              <a:rPr sz="1350" b="1" i="0">
+                <a:solidFill>
+                  <a:srgbClr val="1F2937"/>
+                </a:solidFill>
+                <a:latin typeface="Calibri"/>
+              </a:rPr>
+              <a:t>Phase 5 · Agent protection + hardening</a:t>
+            </a:r>
+          </a:p>
+        </p:txBody>
+      </p:sp>
+      <p:sp>
+        <p:nvSpPr>
+          <p:cNvPr id="27" name="TextBox 26"/>
+          <p:cNvSpPr txBox="1"/>
+          <p:nvPr/>
+        </p:nvSpPr>
+        <p:spPr>
+          <a:xfrm>
+            <a:off x="548640" y="5449824"/>
+            <a:ext cx="6583680" cy="502920"/>
+          </a:xfrm>
+          <a:prstGeom prst="rect">
+            <a:avLst/>
+          </a:prstGeom>
+          <a:noFill/>
+        </p:spPr>
+        <p:txBody>
+          <a:bodyPr wrap="square" anchor="t">
+            <a:spAutoFit/>
+          </a:bodyPr>
+          <a:lstStyle/>
+          <a:p>
+            <a:pPr algn="l"/>
+            <a:r>
+              <a:rPr sz="1100" b="0" i="0">
+                <a:solidFill>
+                  <a:srgbClr val="5B6572"/>
+                </a:solidFill>
+                <a:latin typeface="Calibri"/>
+              </a:rPr>
+              <a:t>Tool-call, retrieval and memory-write stages; MCP controls; security review; final live demo.</a:t>
+            </a:r>
+          </a:p>
+        </p:txBody>
+      </p:sp>
+      <p:sp>
+        <p:nvSpPr>
+          <p:cNvPr id="28" name="Rectangle 27"/>
+          <p:cNvSpPr/>
+          <p:nvPr/>
+        </p:nvSpPr>
+        <p:spPr>
+          <a:xfrm>
+            <a:off x="7315200" y="5184648"/>
+            <a:ext cx="4297679" cy="658368"/>
+          </a:xfrm>
+          <a:prstGeom prst="rect">
+            <a:avLst/>
+          </a:prstGeom>
+          <a:solidFill>
+            <a:srgbClr val="F2F4F7"/>
+          </a:solidFill>
+          <a:ln w="6350">
+            <a:solidFill>
+              <a:srgbClr val="C9D1D9"/>
+            </a:solidFill>
+          </a:ln>
+          <a:effectLst/>
+        </p:spPr>
+        <p:style>
+          <a:lnRef idx="1">
+            <a:schemeClr val="accent1"/>
+          </a:lnRef>
+          <a:fillRef idx="3">
+            <a:schemeClr val="accent1"/>
+          </a:fillRef>
+          <a:effectRef idx="2">
+            <a:schemeClr val="accent1"/>
+          </a:effectRef>
+          <a:fontRef idx="minor">
+            <a:schemeClr val="lt1"/>
+          </a:fontRef>
+        </p:style>
+        <p:txBody>
+          <a:bodyPr rtlCol="0" anchor="ctr" wrap="square" lIns="76200" rIns="76200" tIns="38100" bIns="38100"/>
+          <a:lstStyle/>
+          <a:p>
+            <a:pPr algn="ctr"/>
+            <a:r>
+              <a:rPr sz="1300" b="0">
+                <a:solidFill>
+                  <a:srgbClr val="1F2937"/>
+                </a:solidFill>
+                <a:latin typeface="Calibri"/>
+              </a:rPr>
+              <a:t/>
+            </a:r>
+          </a:p>
+        </p:txBody>
+      </p:sp>
+      <p:sp>
+        <p:nvSpPr>
+          <p:cNvPr id="29" name="Rounded Rectangle 28"/>
+          <p:cNvSpPr/>
+          <p:nvPr/>
+        </p:nvSpPr>
+        <p:spPr>
+          <a:xfrm>
+            <a:off x="10799064" y="5248656"/>
+            <a:ext cx="768096" cy="530352"/>
           </a:xfrm>
           <a:prstGeom prst="roundRect">
             <a:avLst/>
@@ -6656,186 +7749,27 @@
           <a:p>
             <a:pPr algn="ctr"/>
             <a:r>
-              <a:rPr sz="1400" b="1">
-                <a:solidFill>
-                  <a:srgbClr val="FFFFFF"/>
-                </a:solidFill>
-                <a:latin typeface="Calibri"/>
-              </a:rPr>
-              <a:t>AI models work in parallel on</a:t>
-            </a:r>
-          </a:p>
-        </p:txBody>
-      </p:sp>
-      <p:sp>
-        <p:nvSpPr>
-          <p:cNvPr id="8" name="TextBox 7"/>
+              <a:rPr sz="1000" b="0">
+                <a:solidFill>
+                  <a:srgbClr val="1F2937"/>
+                </a:solidFill>
+                <a:latin typeface="Calibri"/>
+              </a:rPr>
+              <a:t/>
+            </a:r>
+          </a:p>
+        </p:txBody>
+      </p:sp>
+      <p:sp>
+        <p:nvSpPr>
+          <p:cNvPr id="30" name="TextBox 29"/>
           <p:cNvSpPr txBox="1"/>
           <p:nvPr/>
         </p:nvSpPr>
         <p:spPr>
           <a:xfrm>
-            <a:off x="5623560" y="2240280"/>
-            <a:ext cx="5943600" cy="3108960"/>
-          </a:xfrm>
-          <a:prstGeom prst="rect">
-            <a:avLst/>
-          </a:prstGeom>
-          <a:noFill/>
-        </p:spPr>
-        <p:txBody>
-          <a:bodyPr wrap="square">
-            <a:spAutoFit/>
-          </a:bodyPr>
-          <a:lstStyle/>
-          <a:p>
-            <a:pPr>
-              <a:spcAft>
-                <a:spcPts val="800"/>
-              </a:spcAft>
-            </a:pPr>
-            <a:r>
-              <a:rPr sz="1300">
-                <a:solidFill>
-                  <a:srgbClr val="0F766E"/>
-                </a:solidFill>
-                <a:latin typeface="Calibri"/>
-              </a:rPr>
-              <a:t>▪  </a:t>
-            </a:r>
-            <a:r>
-              <a:rPr sz="1300" b="1">
-                <a:solidFill>
-                  <a:srgbClr val="1F2937"/>
-                </a:solidFill>
-                <a:latin typeface="Calibri"/>
-              </a:rPr>
-              <a:t>Implementation</a:t>
-            </a:r>
-            <a:r>
-              <a:rPr sz="1300">
-                <a:solidFill>
-                  <a:srgbClr val="5B6572"/>
-                </a:solidFill>
-                <a:latin typeface="Calibri"/>
-              </a:rPr>
-              <a:t> — service code, connector, adapters generated and iterated.</a:t>
-            </a:r>
-          </a:p>
-          <a:p>
-            <a:pPr>
-              <a:spcAft>
-                <a:spcPts val="800"/>
-              </a:spcAft>
-            </a:pPr>
-            <a:r>
-              <a:rPr sz="1300">
-                <a:solidFill>
-                  <a:srgbClr val="0F766E"/>
-                </a:solidFill>
-                <a:latin typeface="Calibri"/>
-              </a:rPr>
-              <a:t>▪  </a:t>
-            </a:r>
-            <a:r>
-              <a:rPr sz="1300" b="1">
-                <a:solidFill>
-                  <a:srgbClr val="1F2937"/>
-                </a:solidFill>
-                <a:latin typeface="Calibri"/>
-              </a:rPr>
-              <a:t>Testing</a:t>
-            </a:r>
-            <a:r>
-              <a:rPr sz="1300">
-                <a:solidFill>
-                  <a:srgbClr val="5B6572"/>
-                </a:solidFill>
-                <a:latin typeface="Calibri"/>
-              </a:rPr>
-              <a:t> — unit, contract and conformance tests written alongside the code.</a:t>
-            </a:r>
-          </a:p>
-          <a:p>
-            <a:pPr>
-              <a:spcAft>
-                <a:spcPts val="800"/>
-              </a:spcAft>
-            </a:pPr>
-            <a:r>
-              <a:rPr sz="1300">
-                <a:solidFill>
-                  <a:srgbClr val="0F766E"/>
-                </a:solidFill>
-                <a:latin typeface="Calibri"/>
-              </a:rPr>
-              <a:t>▪  </a:t>
-            </a:r>
-            <a:r>
-              <a:rPr sz="1300" b="1">
-                <a:solidFill>
-                  <a:srgbClr val="1F2937"/>
-                </a:solidFill>
-                <a:latin typeface="Calibri"/>
-              </a:rPr>
-              <a:t>Adversarial review</a:t>
-            </a:r>
-            <a:r>
-              <a:rPr sz="1300">
-                <a:solidFill>
-                  <a:srgbClr val="5B6572"/>
-                </a:solidFill>
-                <a:latin typeface="Calibri"/>
-              </a:rPr>
-              <a:t> — separate models cross-review code for defects and security issues.</a:t>
-            </a:r>
-          </a:p>
-          <a:p>
-            <a:pPr>
-              <a:spcAft>
-                <a:spcPts val="800"/>
-              </a:spcAft>
-            </a:pPr>
-            <a:r>
-              <a:rPr sz="1300">
-                <a:solidFill>
-                  <a:srgbClr val="0F766E"/>
-                </a:solidFill>
-                <a:latin typeface="Calibri"/>
-              </a:rPr>
-              <a:t>▪  </a:t>
-            </a:r>
-            <a:r>
-              <a:rPr sz="1300" b="1">
-                <a:solidFill>
-                  <a:srgbClr val="1F2937"/>
-                </a:solidFill>
-                <a:latin typeface="Calibri"/>
-              </a:rPr>
-              <a:t>Documentation</a:t>
-            </a:r>
-            <a:r>
-              <a:rPr sz="1300">
-                <a:solidFill>
-                  <a:srgbClr val="5B6572"/>
-                </a:solidFill>
-                <a:latin typeface="Calibri"/>
-              </a:rPr>
-              <a:t> — onboarding guides and audit docs kept current from day one.</a:t>
-            </a:r>
-          </a:p>
-        </p:txBody>
-      </p:sp>
-      <p:sp>
-        <p:nvSpPr>
-          <p:cNvPr id="9" name="TextBox 8"/>
-          <p:cNvSpPr txBox="1"/>
-          <p:nvPr/>
-        </p:nvSpPr>
-        <p:spPr>
-          <a:xfrm>
-            <a:off x="548640" y="5120640"/>
-            <a:ext cx="11064240" cy="822960"/>
+            <a:off x="548640" y="6080760"/>
+            <a:ext cx="11064240" cy="411480"/>
           </a:xfrm>
           <a:prstGeom prst="rect">
             <a:avLst/>
@@ -6850,39 +7784,27 @@
           <a:p>
             <a:pPr algn="l"/>
             <a:r>
-              <a:rPr sz="1300" b="0" i="0">
-                <a:solidFill>
-                  <a:srgbClr val="5B6572"/>
-                </a:solidFill>
-                <a:latin typeface="Calibri"/>
-              </a:rPr>
-              <a:t>Why this is credible in 5 weeks: a deliberately narrow MVP, proven building blocks</a:t>
-            </a:r>
-          </a:p>
-          <a:p>
-            <a:pPr algn="l"/>
-            <a:r>
-              <a:rPr sz="1300" b="0" i="0">
-                <a:solidFill>
-                  <a:srgbClr val="5B6572"/>
-                </a:solidFill>
-                <a:latin typeface="Calibri"/>
-              </a:rPr>
-              <a:t>(LiteLLM hooks, Amazon Bedrock Guardrails), and AI models doing the parallel work of a small team.</a:t>
-            </a:r>
-          </a:p>
-        </p:txBody>
-      </p:sp>
-      <p:sp>
-        <p:nvSpPr>
-          <p:cNvPr id="10" name="TextBox 9"/>
+              <a:rPr sz="1400" b="1" i="0">
+                <a:solidFill>
+                  <a:srgbClr val="2B3440"/>
+                </a:solidFill>
+                <a:latin typeface="Calibri"/>
+              </a:rPr>
+              <a:t>Every week ends with a live demo of that phase's slice — five checkpoints, one 5-week envelope, hard stop at week 5.</a:t>
+            </a:r>
+          </a:p>
+        </p:txBody>
+      </p:sp>
+      <p:sp>
+        <p:nvSpPr>
+          <p:cNvPr id="31" name="TextBox 30"/>
           <p:cNvSpPr txBox="1"/>
           <p:nvPr/>
         </p:nvSpPr>
         <p:spPr>
           <a:xfrm>
-            <a:off x="548640" y="5852160"/>
-            <a:ext cx="11064240" cy="457200"/>
+            <a:off x="548640" y="6473952"/>
+            <a:ext cx="8686800" cy="274320"/>
           </a:xfrm>
           <a:prstGeom prst="rect">
             <a:avLst/>
@@ -6897,41 +7819,6 @@
           <a:p>
             <a:pPr algn="l"/>
             <a:r>
-              <a:rPr sz="1500" b="1" i="0">
-                <a:solidFill>
-                  <a:srgbClr val="2B3440"/>
-                </a:solidFill>
-                <a:latin typeface="Calibri"/>
-              </a:rPr>
-              <a:t>Cost of trying this: one person, five weeks, existing AWS accounts.</a:t>
-            </a:r>
-          </a:p>
-        </p:txBody>
-      </p:sp>
-      <p:sp>
-        <p:nvSpPr>
-          <p:cNvPr id="11" name="TextBox 10"/>
-          <p:cNvSpPr txBox="1"/>
-          <p:nvPr/>
-        </p:nvSpPr>
-        <p:spPr>
-          <a:xfrm>
-            <a:off x="548640" y="6473952"/>
-            <a:ext cx="8686800" cy="274320"/>
-          </a:xfrm>
-          <a:prstGeom prst="rect">
-            <a:avLst/>
-          </a:prstGeom>
-          <a:noFill/>
-        </p:spPr>
-        <p:txBody>
-          <a:bodyPr wrap="square" anchor="t">
-            <a:spAutoFit/>
-          </a:bodyPr>
-          <a:lstStyle/>
-          <a:p>
-            <a:pPr algn="l"/>
-            <a:r>
               <a:rPr sz="900" b="0" i="0">
                 <a:solidFill>
                   <a:srgbClr val="5B6572"/>
@@ -6945,7 +7832,7 @@
       </p:sp>
       <p:sp>
         <p:nvSpPr>
-          <p:cNvPr id="12" name="TextBox 11"/>
+          <p:cNvPr id="32" name="TextBox 31"/>
           <p:cNvSpPr txBox="1"/>
           <p:nvPr/>
         </p:nvSpPr>
@@ -7026,7 +7913,7 @@
                 </a:solidFill>
                 <a:latin typeface="Calibri"/>
               </a:rPr>
-              <a:t>PHASE 1 EXIT CRITERIA</a:t>
+              <a:t>DELIVERY MODEL</a:t>
             </a:r>
           </a:p>
         </p:txBody>
@@ -7061,7 +7948,7 @@
                 </a:solidFill>
                 <a:latin typeface="Calibri"/>
               </a:rPr>
-              <a:t>What success looks like — falsifiable, not aspirational</a:t>
+              <a:t>One engineer, multiplied by AI</a:t>
             </a:r>
           </a:p>
         </p:txBody>
@@ -7112,14 +7999,67 @@
       </p:sp>
       <p:sp>
         <p:nvSpPr>
-          <p:cNvPr id="5" name="TextBox 4"/>
+          <p:cNvPr id="5" name="Rounded Rectangle 4"/>
+          <p:cNvSpPr/>
+          <p:nvPr/>
+        </p:nvSpPr>
+        <p:spPr>
+          <a:xfrm>
+            <a:off x="548640" y="1554480"/>
+            <a:ext cx="4572000" cy="548640"/>
+          </a:xfrm>
+          <a:prstGeom prst="roundRect">
+            <a:avLst/>
+          </a:prstGeom>
+          <a:solidFill>
+            <a:srgbClr val="2B3440"/>
+          </a:solidFill>
+          <a:ln>
+            <a:noFill/>
+          </a:ln>
+          <a:effectLst/>
+        </p:spPr>
+        <p:style>
+          <a:lnRef idx="1">
+            <a:schemeClr val="accent1"/>
+          </a:lnRef>
+          <a:fillRef idx="3">
+            <a:schemeClr val="accent1"/>
+          </a:fillRef>
+          <a:effectRef idx="2">
+            <a:schemeClr val="accent1"/>
+          </a:effectRef>
+          <a:fontRef idx="minor">
+            <a:schemeClr val="lt1"/>
+          </a:fontRef>
+        </p:style>
+        <p:txBody>
+          <a:bodyPr rtlCol="0" anchor="ctr" wrap="square" lIns="76200" rIns="76200" tIns="38100" bIns="38100"/>
+          <a:lstStyle/>
+          <a:p>
+            <a:pPr algn="ctr"/>
+            <a:r>
+              <a:rPr sz="1400" b="1">
+                <a:solidFill>
+                  <a:srgbClr val="FFFFFF"/>
+                </a:solidFill>
+                <a:latin typeface="Calibri"/>
+              </a:rPr>
+              <a:t>The engineer owns</a:t>
+            </a:r>
+          </a:p>
+        </p:txBody>
+      </p:sp>
+      <p:sp>
+        <p:nvSpPr>
+          <p:cNvPr id="6" name="TextBox 5"/>
           <p:cNvSpPr txBox="1"/>
           <p:nvPr/>
         </p:nvSpPr>
         <p:spPr>
           <a:xfrm>
-            <a:off x="548640" y="1463040"/>
-            <a:ext cx="11064240" cy="457200"/>
+            <a:off x="685800" y="2240280"/>
+            <a:ext cx="4389120" cy="3108960"/>
           </a:xfrm>
           <a:prstGeom prst="rect">
             <a:avLst/>
@@ -7127,36 +8067,126 @@
           <a:noFill/>
         </p:spPr>
         <p:txBody>
-          <a:bodyPr wrap="square" anchor="t">
+          <a:bodyPr wrap="square">
             <a:spAutoFit/>
           </a:bodyPr>
           <a:lstStyle/>
           <a:p>
-            <a:pPr algn="l"/>
-            <a:r>
-              <a:rPr sz="1600" b="0" i="0">
+            <a:pPr>
+              <a:spcAft>
+                <a:spcPts val="800"/>
+              </a:spcAft>
+            </a:pPr>
+            <a:r>
+              <a:rPr sz="1300">
+                <a:solidFill>
+                  <a:srgbClr val="0F766E"/>
+                </a:solidFill>
+                <a:latin typeface="Calibri"/>
+              </a:rPr>
+              <a:t>▪  </a:t>
+            </a:r>
+            <a:r>
+              <a:rPr sz="1300" b="1">
                 <a:solidFill>
                   <a:srgbClr val="1F2937"/>
                 </a:solidFill>
                 <a:latin typeface="Calibri"/>
               </a:rPr>
-              <a:t>Phase 1 will be considered successful when, in a live demonstration:</a:t>
-            </a:r>
-          </a:p>
-        </p:txBody>
-      </p:sp>
-      <p:sp>
-        <p:nvSpPr>
-          <p:cNvPr id="6" name="Oval 5"/>
+              <a:t>Architecture &amp; decisions</a:t>
+            </a:r>
+            <a:r>
+              <a:rPr sz="1300">
+                <a:solidFill>
+                  <a:srgbClr val="5B6572"/>
+                </a:solidFill>
+                <a:latin typeface="Calibri"/>
+              </a:rPr>
+              <a:t> — scope, contracts, trade-offs.</a:t>
+            </a:r>
+          </a:p>
+          <a:p>
+            <a:pPr>
+              <a:spcAft>
+                <a:spcPts val="800"/>
+              </a:spcAft>
+            </a:pPr>
+            <a:r>
+              <a:rPr sz="1300">
+                <a:solidFill>
+                  <a:srgbClr val="0F766E"/>
+                </a:solidFill>
+                <a:latin typeface="Calibri"/>
+              </a:rPr>
+              <a:t>▪  </a:t>
+            </a:r>
+            <a:r>
+              <a:rPr sz="1300" b="1">
+                <a:solidFill>
+                  <a:srgbClr val="1F2937"/>
+                </a:solidFill>
+                <a:latin typeface="Calibri"/>
+              </a:rPr>
+              <a:t>Review &amp; acceptance</a:t>
+            </a:r>
+            <a:r>
+              <a:rPr sz="1300">
+                <a:solidFill>
+                  <a:srgbClr val="5B6572"/>
+                </a:solidFill>
+                <a:latin typeface="Calibri"/>
+              </a:rPr>
+              <a:t> — every AI-produced change is reviewed before merge.</a:t>
+            </a:r>
+          </a:p>
+          <a:p>
+            <a:pPr>
+              <a:spcAft>
+                <a:spcPts val="800"/>
+              </a:spcAft>
+            </a:pPr>
+            <a:r>
+              <a:rPr sz="1300">
+                <a:solidFill>
+                  <a:srgbClr val="0F766E"/>
+                </a:solidFill>
+                <a:latin typeface="Calibri"/>
+              </a:rPr>
+              <a:t>▪  </a:t>
+            </a:r>
+            <a:r>
+              <a:rPr sz="1300" b="1">
+                <a:solidFill>
+                  <a:srgbClr val="1F2937"/>
+                </a:solidFill>
+                <a:latin typeface="Calibri"/>
+              </a:rPr>
+              <a:t>The demo</a:t>
+            </a:r>
+            <a:r>
+              <a:rPr sz="1300">
+                <a:solidFill>
+                  <a:srgbClr val="5B6572"/>
+                </a:solidFill>
+                <a:latin typeface="Calibri"/>
+              </a:rPr>
+              <a:t> — runs the two-instance proof live.</a:t>
+            </a:r>
+          </a:p>
+        </p:txBody>
+      </p:sp>
+      <p:sp>
+        <p:nvSpPr>
+          <p:cNvPr id="7" name="Rounded Rectangle 6"/>
           <p:cNvSpPr/>
           <p:nvPr/>
         </p:nvSpPr>
         <p:spPr>
           <a:xfrm>
-            <a:off x="640080" y="2203704"/>
-            <a:ext cx="274320" cy="274320"/>
-          </a:xfrm>
-          <a:prstGeom prst="ellipse">
+            <a:off x="5486400" y="1554480"/>
+            <a:ext cx="6126480" cy="548640"/>
+          </a:xfrm>
+          <a:prstGeom prst="roundRect">
             <a:avLst/>
           </a:prstGeom>
           <a:solidFill>
@@ -7187,27 +8217,186 @@
           <a:p>
             <a:pPr algn="ctr"/>
             <a:r>
-              <a:rPr sz="1200" b="1">
+              <a:rPr sz="1400" b="1">
                 <a:solidFill>
                   <a:srgbClr val="FFFFFF"/>
                 </a:solidFill>
                 <a:latin typeface="Calibri"/>
               </a:rPr>
-              <a:t>✓</a:t>
-            </a:r>
-          </a:p>
-        </p:txBody>
-      </p:sp>
-      <p:sp>
-        <p:nvSpPr>
-          <p:cNvPr id="7" name="TextBox 6"/>
+              <a:t>AI models work in parallel on</a:t>
+            </a:r>
+          </a:p>
+        </p:txBody>
+      </p:sp>
+      <p:sp>
+        <p:nvSpPr>
+          <p:cNvPr id="8" name="TextBox 7"/>
           <p:cNvSpPr txBox="1"/>
           <p:nvPr/>
         </p:nvSpPr>
         <p:spPr>
           <a:xfrm>
-            <a:off x="1051560" y="2148840"/>
-            <a:ext cx="5120640" cy="777240"/>
+            <a:off x="5623560" y="2240280"/>
+            <a:ext cx="5943600" cy="3108960"/>
+          </a:xfrm>
+          <a:prstGeom prst="rect">
+            <a:avLst/>
+          </a:prstGeom>
+          <a:noFill/>
+        </p:spPr>
+        <p:txBody>
+          <a:bodyPr wrap="square">
+            <a:spAutoFit/>
+          </a:bodyPr>
+          <a:lstStyle/>
+          <a:p>
+            <a:pPr>
+              <a:spcAft>
+                <a:spcPts val="800"/>
+              </a:spcAft>
+            </a:pPr>
+            <a:r>
+              <a:rPr sz="1300">
+                <a:solidFill>
+                  <a:srgbClr val="0F766E"/>
+                </a:solidFill>
+                <a:latin typeface="Calibri"/>
+              </a:rPr>
+              <a:t>▪  </a:t>
+            </a:r>
+            <a:r>
+              <a:rPr sz="1300" b="1">
+                <a:solidFill>
+                  <a:srgbClr val="1F2937"/>
+                </a:solidFill>
+                <a:latin typeface="Calibri"/>
+              </a:rPr>
+              <a:t>Implementation</a:t>
+            </a:r>
+            <a:r>
+              <a:rPr sz="1300">
+                <a:solidFill>
+                  <a:srgbClr val="5B6572"/>
+                </a:solidFill>
+                <a:latin typeface="Calibri"/>
+              </a:rPr>
+              <a:t> — service code, connector, adapters generated and iterated.</a:t>
+            </a:r>
+          </a:p>
+          <a:p>
+            <a:pPr>
+              <a:spcAft>
+                <a:spcPts val="800"/>
+              </a:spcAft>
+            </a:pPr>
+            <a:r>
+              <a:rPr sz="1300">
+                <a:solidFill>
+                  <a:srgbClr val="0F766E"/>
+                </a:solidFill>
+                <a:latin typeface="Calibri"/>
+              </a:rPr>
+              <a:t>▪  </a:t>
+            </a:r>
+            <a:r>
+              <a:rPr sz="1300" b="1">
+                <a:solidFill>
+                  <a:srgbClr val="1F2937"/>
+                </a:solidFill>
+                <a:latin typeface="Calibri"/>
+              </a:rPr>
+              <a:t>Testing</a:t>
+            </a:r>
+            <a:r>
+              <a:rPr sz="1300">
+                <a:solidFill>
+                  <a:srgbClr val="5B6572"/>
+                </a:solidFill>
+                <a:latin typeface="Calibri"/>
+              </a:rPr>
+              <a:t> — unit, contract and conformance tests written alongside the code.</a:t>
+            </a:r>
+          </a:p>
+          <a:p>
+            <a:pPr>
+              <a:spcAft>
+                <a:spcPts val="800"/>
+              </a:spcAft>
+            </a:pPr>
+            <a:r>
+              <a:rPr sz="1300">
+                <a:solidFill>
+                  <a:srgbClr val="0F766E"/>
+                </a:solidFill>
+                <a:latin typeface="Calibri"/>
+              </a:rPr>
+              <a:t>▪  </a:t>
+            </a:r>
+            <a:r>
+              <a:rPr sz="1300" b="1">
+                <a:solidFill>
+                  <a:srgbClr val="1F2937"/>
+                </a:solidFill>
+                <a:latin typeface="Calibri"/>
+              </a:rPr>
+              <a:t>Adversarial review</a:t>
+            </a:r>
+            <a:r>
+              <a:rPr sz="1300">
+                <a:solidFill>
+                  <a:srgbClr val="5B6572"/>
+                </a:solidFill>
+                <a:latin typeface="Calibri"/>
+              </a:rPr>
+              <a:t> — separate models cross-review code for defects and security issues.</a:t>
+            </a:r>
+          </a:p>
+          <a:p>
+            <a:pPr>
+              <a:spcAft>
+                <a:spcPts val="800"/>
+              </a:spcAft>
+            </a:pPr>
+            <a:r>
+              <a:rPr sz="1300">
+                <a:solidFill>
+                  <a:srgbClr val="0F766E"/>
+                </a:solidFill>
+                <a:latin typeface="Calibri"/>
+              </a:rPr>
+              <a:t>▪  </a:t>
+            </a:r>
+            <a:r>
+              <a:rPr sz="1300" b="1">
+                <a:solidFill>
+                  <a:srgbClr val="1F2937"/>
+                </a:solidFill>
+                <a:latin typeface="Calibri"/>
+              </a:rPr>
+              <a:t>Documentation</a:t>
+            </a:r>
+            <a:r>
+              <a:rPr sz="1300">
+                <a:solidFill>
+                  <a:srgbClr val="5B6572"/>
+                </a:solidFill>
+                <a:latin typeface="Calibri"/>
+              </a:rPr>
+              <a:t> — onboarding guides and audit docs kept current from day one.</a:t>
+            </a:r>
+          </a:p>
+        </p:txBody>
+      </p:sp>
+      <p:sp>
+        <p:nvSpPr>
+          <p:cNvPr id="9" name="TextBox 8"/>
+          <p:cNvSpPr txBox="1"/>
+          <p:nvPr/>
+        </p:nvSpPr>
+        <p:spPr>
+          <a:xfrm>
+            <a:off x="548640" y="5120640"/>
+            <a:ext cx="11064240" cy="822960"/>
           </a:xfrm>
           <a:prstGeom prst="rect">
             <a:avLst/>
@@ -7222,80 +8411,39 @@
           <a:p>
             <a:pPr algn="l"/>
             <a:r>
-              <a:rPr sz="1400" b="0" i="0">
-                <a:solidFill>
-                  <a:srgbClr val="1F2937"/>
-                </a:solidFill>
-                <a:latin typeface="Calibri"/>
-              </a:rPr>
-              <a:t>Two independent LiteLLM instances consume the same policy</a:t>
-            </a:r>
-          </a:p>
-        </p:txBody>
-      </p:sp>
-      <p:sp>
-        <p:nvSpPr>
-          <p:cNvPr id="8" name="Oval 7"/>
-          <p:cNvSpPr/>
-          <p:nvPr/>
-        </p:nvSpPr>
-        <p:spPr>
-          <a:xfrm>
-            <a:off x="6309360" y="2203704"/>
-            <a:ext cx="274320" cy="274320"/>
-          </a:xfrm>
-          <a:prstGeom prst="ellipse">
-            <a:avLst/>
-          </a:prstGeom>
-          <a:solidFill>
-            <a:srgbClr val="0F766E"/>
-          </a:solidFill>
-          <a:ln>
-            <a:noFill/>
-          </a:ln>
-          <a:effectLst/>
-        </p:spPr>
-        <p:style>
-          <a:lnRef idx="1">
-            <a:schemeClr val="accent1"/>
-          </a:lnRef>
-          <a:fillRef idx="3">
-            <a:schemeClr val="accent1"/>
-          </a:fillRef>
-          <a:effectRef idx="2">
-            <a:schemeClr val="accent1"/>
-          </a:effectRef>
-          <a:fontRef idx="minor">
-            <a:schemeClr val="lt1"/>
-          </a:fontRef>
-        </p:style>
-        <p:txBody>
-          <a:bodyPr rtlCol="0" anchor="ctr" wrap="square" lIns="76200" rIns="76200" tIns="38100" bIns="38100"/>
-          <a:lstStyle/>
-          <a:p>
-            <a:pPr algn="ctr"/>
-            <a:r>
-              <a:rPr sz="1200" b="1">
-                <a:solidFill>
-                  <a:srgbClr val="FFFFFF"/>
-                </a:solidFill>
-                <a:latin typeface="Calibri"/>
-              </a:rPr>
-              <a:t>✓</a:t>
-            </a:r>
-          </a:p>
-        </p:txBody>
-      </p:sp>
-      <p:sp>
-        <p:nvSpPr>
-          <p:cNvPr id="9" name="TextBox 8"/>
+              <a:rPr sz="1300" b="0" i="0">
+                <a:solidFill>
+                  <a:srgbClr val="5B6572"/>
+                </a:solidFill>
+                <a:latin typeface="Calibri"/>
+              </a:rPr>
+              <a:t>Why this is credible in 5 weeks: a deliberately narrow MVP, proven building blocks</a:t>
+            </a:r>
+          </a:p>
+          <a:p>
+            <a:pPr algn="l"/>
+            <a:r>
+              <a:rPr sz="1300" b="0" i="0">
+                <a:solidFill>
+                  <a:srgbClr val="5B6572"/>
+                </a:solidFill>
+                <a:latin typeface="Calibri"/>
+              </a:rPr>
+              <a:t>(LiteLLM hooks, Amazon Bedrock Guardrails), and AI models doing the parallel work of a small team.</a:t>
+            </a:r>
+          </a:p>
+        </p:txBody>
+      </p:sp>
+      <p:sp>
+        <p:nvSpPr>
+          <p:cNvPr id="10" name="TextBox 9"/>
           <p:cNvSpPr txBox="1"/>
           <p:nvPr/>
         </p:nvSpPr>
         <p:spPr>
           <a:xfrm>
-            <a:off x="6720840" y="2148840"/>
-            <a:ext cx="5120640" cy="777240"/>
+            <a:off x="548640" y="5852160"/>
+            <a:ext cx="11064240" cy="457200"/>
           </a:xfrm>
           <a:prstGeom prst="rect">
             <a:avLst/>
@@ -7310,66 +8458,13 @@
           <a:p>
             <a:pPr algn="l"/>
             <a:r>
-              <a:rPr sz="1400" b="0" i="0">
-                <a:solidFill>
-                  <a:srgbClr val="1F2937"/>
-                </a:solidFill>
-                <a:latin typeface="Calibri"/>
-              </a:rPr>
-              <a:t>Neither shares model-provider credentials with the platform</a:t>
-            </a:r>
-          </a:p>
-        </p:txBody>
-      </p:sp>
-      <p:sp>
-        <p:nvSpPr>
-          <p:cNvPr id="10" name="Oval 9"/>
-          <p:cNvSpPr/>
-          <p:nvPr/>
-        </p:nvSpPr>
-        <p:spPr>
-          <a:xfrm>
-            <a:off x="640080" y="3072384"/>
-            <a:ext cx="274320" cy="274320"/>
-          </a:xfrm>
-          <a:prstGeom prst="ellipse">
-            <a:avLst/>
-          </a:prstGeom>
-          <a:solidFill>
-            <a:srgbClr val="0F766E"/>
-          </a:solidFill>
-          <a:ln>
-            <a:noFill/>
-          </a:ln>
-          <a:effectLst/>
-        </p:spPr>
-        <p:style>
-          <a:lnRef idx="1">
-            <a:schemeClr val="accent1"/>
-          </a:lnRef>
-          <a:fillRef idx="3">
-            <a:schemeClr val="accent1"/>
-          </a:fillRef>
-          <a:effectRef idx="2">
-            <a:schemeClr val="accent1"/>
-          </a:effectRef>
-          <a:fontRef idx="minor">
-            <a:schemeClr val="lt1"/>
-          </a:fontRef>
-        </p:style>
-        <p:txBody>
-          <a:bodyPr rtlCol="0" anchor="ctr" wrap="square" lIns="76200" rIns="76200" tIns="38100" bIns="38100"/>
-          <a:lstStyle/>
-          <a:p>
-            <a:pPr algn="ctr"/>
-            <a:r>
-              <a:rPr sz="1200" b="1">
-                <a:solidFill>
-                  <a:srgbClr val="FFFFFF"/>
-                </a:solidFill>
-                <a:latin typeface="Calibri"/>
-              </a:rPr>
-              <a:t>✓</a:t>
+              <a:rPr sz="1500" b="1" i="0">
+                <a:solidFill>
+                  <a:srgbClr val="2B3440"/>
+                </a:solidFill>
+                <a:latin typeface="Calibri"/>
+              </a:rPr>
+              <a:t>Cost of the whole MVP: one person, five weeks, existing AWS accounts.</a:t>
             </a:r>
           </a:p>
         </p:txBody>
@@ -7382,8 +8477,8 @@
         </p:nvSpPr>
         <p:spPr>
           <a:xfrm>
-            <a:off x="1051560" y="3017520"/>
-            <a:ext cx="5120640" cy="777240"/>
+            <a:off x="548640" y="6473952"/>
+            <a:ext cx="8686800" cy="274320"/>
           </a:xfrm>
           <a:prstGeom prst="rect">
             <a:avLst/>
@@ -7398,428 +8493,6 @@
           <a:p>
             <a:pPr algn="l"/>
             <a:r>
-              <a:rPr sz="1400" b="0" i="0">
-                <a:solidFill>
-                  <a:srgbClr val="1F2937"/>
-                </a:solidFill>
-                <a:latin typeface="Calibri"/>
-              </a:rPr>
-              <a:t>Both receive consistent, normalized decisions</a:t>
-            </a:r>
-          </a:p>
-        </p:txBody>
-      </p:sp>
-      <p:sp>
-        <p:nvSpPr>
-          <p:cNvPr id="12" name="Oval 11"/>
-          <p:cNvSpPr/>
-          <p:nvPr/>
-        </p:nvSpPr>
-        <p:spPr>
-          <a:xfrm>
-            <a:off x="6309360" y="3072384"/>
-            <a:ext cx="274320" cy="274320"/>
-          </a:xfrm>
-          <a:prstGeom prst="ellipse">
-            <a:avLst/>
-          </a:prstGeom>
-          <a:solidFill>
-            <a:srgbClr val="0F766E"/>
-          </a:solidFill>
-          <a:ln>
-            <a:noFill/>
-          </a:ln>
-          <a:effectLst/>
-        </p:spPr>
-        <p:style>
-          <a:lnRef idx="1">
-            <a:schemeClr val="accent1"/>
-          </a:lnRef>
-          <a:fillRef idx="3">
-            <a:schemeClr val="accent1"/>
-          </a:fillRef>
-          <a:effectRef idx="2">
-            <a:schemeClr val="accent1"/>
-          </a:effectRef>
-          <a:fontRef idx="minor">
-            <a:schemeClr val="lt1"/>
-          </a:fontRef>
-        </p:style>
-        <p:txBody>
-          <a:bodyPr rtlCol="0" anchor="ctr" wrap="square" lIns="76200" rIns="76200" tIns="38100" bIns="38100"/>
-          <a:lstStyle/>
-          <a:p>
-            <a:pPr algn="ctr"/>
-            <a:r>
-              <a:rPr sz="1200" b="1">
-                <a:solidFill>
-                  <a:srgbClr val="FFFFFF"/>
-                </a:solidFill>
-                <a:latin typeface="Calibri"/>
-              </a:rPr>
-              <a:t>✓</a:t>
-            </a:r>
-          </a:p>
-        </p:txBody>
-      </p:sp>
-      <p:sp>
-        <p:nvSpPr>
-          <p:cNvPr id="13" name="TextBox 12"/>
-          <p:cNvSpPr txBox="1"/>
-          <p:nvPr/>
-        </p:nvSpPr>
-        <p:spPr>
-          <a:xfrm>
-            <a:off x="6720840" y="3017520"/>
-            <a:ext cx="5120640" cy="777240"/>
-          </a:xfrm>
-          <a:prstGeom prst="rect">
-            <a:avLst/>
-          </a:prstGeom>
-          <a:noFill/>
-        </p:spPr>
-        <p:txBody>
-          <a:bodyPr wrap="square" anchor="t">
-            <a:spAutoFit/>
-          </a:bodyPr>
-          <a:lstStyle/>
-          <a:p>
-            <a:pPr algn="l"/>
-            <a:r>
-              <a:rPr sz="1400" b="0" i="0">
-                <a:solidFill>
-                  <a:srgbClr val="1F2937"/>
-                </a:solidFill>
-                <a:latin typeface="Calibri"/>
-              </a:rPr>
-              <a:t>One workload runs in Observe, another in Enforce</a:t>
-            </a:r>
-          </a:p>
-        </p:txBody>
-      </p:sp>
-      <p:sp>
-        <p:nvSpPr>
-          <p:cNvPr id="14" name="Oval 13"/>
-          <p:cNvSpPr/>
-          <p:nvPr/>
-        </p:nvSpPr>
-        <p:spPr>
-          <a:xfrm>
-            <a:off x="640080" y="3941064"/>
-            <a:ext cx="274320" cy="274320"/>
-          </a:xfrm>
-          <a:prstGeom prst="ellipse">
-            <a:avLst/>
-          </a:prstGeom>
-          <a:solidFill>
-            <a:srgbClr val="0F766E"/>
-          </a:solidFill>
-          <a:ln>
-            <a:noFill/>
-          </a:ln>
-          <a:effectLst/>
-        </p:spPr>
-        <p:style>
-          <a:lnRef idx="1">
-            <a:schemeClr val="accent1"/>
-          </a:lnRef>
-          <a:fillRef idx="3">
-            <a:schemeClr val="accent1"/>
-          </a:fillRef>
-          <a:effectRef idx="2">
-            <a:schemeClr val="accent1"/>
-          </a:effectRef>
-          <a:fontRef idx="minor">
-            <a:schemeClr val="lt1"/>
-          </a:fontRef>
-        </p:style>
-        <p:txBody>
-          <a:bodyPr rtlCol="0" anchor="ctr" wrap="square" lIns="76200" rIns="76200" tIns="38100" bIns="38100"/>
-          <a:lstStyle/>
-          <a:p>
-            <a:pPr algn="ctr"/>
-            <a:r>
-              <a:rPr sz="1200" b="1">
-                <a:solidFill>
-                  <a:srgbClr val="FFFFFF"/>
-                </a:solidFill>
-                <a:latin typeface="Calibri"/>
-              </a:rPr>
-              <a:t>✓</a:t>
-            </a:r>
-          </a:p>
-        </p:txBody>
-      </p:sp>
-      <p:sp>
-        <p:nvSpPr>
-          <p:cNvPr id="15" name="TextBox 14"/>
-          <p:cNvSpPr txBox="1"/>
-          <p:nvPr/>
-        </p:nvSpPr>
-        <p:spPr>
-          <a:xfrm>
-            <a:off x="1051560" y="3886200"/>
-            <a:ext cx="5120640" cy="777240"/>
-          </a:xfrm>
-          <a:prstGeom prst="rect">
-            <a:avLst/>
-          </a:prstGeom>
-          <a:noFill/>
-        </p:spPr>
-        <p:txBody>
-          <a:bodyPr wrap="square" anchor="t">
-            <a:spAutoFit/>
-          </a:bodyPr>
-          <a:lstStyle/>
-          <a:p>
-            <a:pPr algn="l"/>
-            <a:r>
-              <a:rPr sz="1400" b="0" i="0">
-                <a:solidFill>
-                  <a:srgbClr val="1F2937"/>
-                </a:solidFill>
-                <a:latin typeface="Calibri"/>
-              </a:rPr>
-              <a:t>A policy is upgraded — and rolled back</a:t>
-            </a:r>
-          </a:p>
-        </p:txBody>
-      </p:sp>
-      <p:sp>
-        <p:nvSpPr>
-          <p:cNvPr id="16" name="Oval 15"/>
-          <p:cNvSpPr/>
-          <p:nvPr/>
-        </p:nvSpPr>
-        <p:spPr>
-          <a:xfrm>
-            <a:off x="6309360" y="3941064"/>
-            <a:ext cx="274320" cy="274320"/>
-          </a:xfrm>
-          <a:prstGeom prst="ellipse">
-            <a:avLst/>
-          </a:prstGeom>
-          <a:solidFill>
-            <a:srgbClr val="0F766E"/>
-          </a:solidFill>
-          <a:ln>
-            <a:noFill/>
-          </a:ln>
-          <a:effectLst/>
-        </p:spPr>
-        <p:style>
-          <a:lnRef idx="1">
-            <a:schemeClr val="accent1"/>
-          </a:lnRef>
-          <a:fillRef idx="3">
-            <a:schemeClr val="accent1"/>
-          </a:fillRef>
-          <a:effectRef idx="2">
-            <a:schemeClr val="accent1"/>
-          </a:effectRef>
-          <a:fontRef idx="minor">
-            <a:schemeClr val="lt1"/>
-          </a:fontRef>
-        </p:style>
-        <p:txBody>
-          <a:bodyPr rtlCol="0" anchor="ctr" wrap="square" lIns="76200" rIns="76200" tIns="38100" bIns="38100"/>
-          <a:lstStyle/>
-          <a:p>
-            <a:pPr algn="ctr"/>
-            <a:r>
-              <a:rPr sz="1200" b="1">
-                <a:solidFill>
-                  <a:srgbClr val="FFFFFF"/>
-                </a:solidFill>
-                <a:latin typeface="Calibri"/>
-              </a:rPr>
-              <a:t>✓</a:t>
-            </a:r>
-          </a:p>
-        </p:txBody>
-      </p:sp>
-      <p:sp>
-        <p:nvSpPr>
-          <p:cNvPr id="17" name="TextBox 16"/>
-          <p:cNvSpPr txBox="1"/>
-          <p:nvPr/>
-        </p:nvSpPr>
-        <p:spPr>
-          <a:xfrm>
-            <a:off x="6720840" y="3886200"/>
-            <a:ext cx="5120640" cy="777240"/>
-          </a:xfrm>
-          <a:prstGeom prst="rect">
-            <a:avLst/>
-          </a:prstGeom>
-          <a:noFill/>
-        </p:spPr>
-        <p:txBody>
-          <a:bodyPr wrap="square" anchor="t">
-            <a:spAutoFit/>
-          </a:bodyPr>
-          <a:lstStyle/>
-          <a:p>
-            <a:pPr algn="l"/>
-            <a:r>
-              <a:rPr sz="1400" b="0" i="0">
-                <a:solidFill>
-                  <a:srgbClr val="1F2937"/>
-                </a:solidFill>
-                <a:latin typeface="Calibri"/>
-              </a:rPr>
-              <a:t>Raw prompt/response persistence can be switched off</a:t>
-            </a:r>
-          </a:p>
-        </p:txBody>
-      </p:sp>
-      <p:sp>
-        <p:nvSpPr>
-          <p:cNvPr id="18" name="Oval 17"/>
-          <p:cNvSpPr/>
-          <p:nvPr/>
-        </p:nvSpPr>
-        <p:spPr>
-          <a:xfrm>
-            <a:off x="640080" y="4809743"/>
-            <a:ext cx="274320" cy="274320"/>
-          </a:xfrm>
-          <a:prstGeom prst="ellipse">
-            <a:avLst/>
-          </a:prstGeom>
-          <a:solidFill>
-            <a:srgbClr val="0F766E"/>
-          </a:solidFill>
-          <a:ln>
-            <a:noFill/>
-          </a:ln>
-          <a:effectLst/>
-        </p:spPr>
-        <p:style>
-          <a:lnRef idx="1">
-            <a:schemeClr val="accent1"/>
-          </a:lnRef>
-          <a:fillRef idx="3">
-            <a:schemeClr val="accent1"/>
-          </a:fillRef>
-          <a:effectRef idx="2">
-            <a:schemeClr val="accent1"/>
-          </a:effectRef>
-          <a:fontRef idx="minor">
-            <a:schemeClr val="lt1"/>
-          </a:fontRef>
-        </p:style>
-        <p:txBody>
-          <a:bodyPr rtlCol="0" anchor="ctr" wrap="square" lIns="76200" rIns="76200" tIns="38100" bIns="38100"/>
-          <a:lstStyle/>
-          <a:p>
-            <a:pPr algn="ctr"/>
-            <a:r>
-              <a:rPr sz="1200" b="1">
-                <a:solidFill>
-                  <a:srgbClr val="FFFFFF"/>
-                </a:solidFill>
-                <a:latin typeface="Calibri"/>
-              </a:rPr>
-              <a:t>✓</a:t>
-            </a:r>
-          </a:p>
-        </p:txBody>
-      </p:sp>
-      <p:sp>
-        <p:nvSpPr>
-          <p:cNvPr id="19" name="TextBox 18"/>
-          <p:cNvSpPr txBox="1"/>
-          <p:nvPr/>
-        </p:nvSpPr>
-        <p:spPr>
-          <a:xfrm>
-            <a:off x="1051560" y="4754879"/>
-            <a:ext cx="5120640" cy="777240"/>
-          </a:xfrm>
-          <a:prstGeom prst="rect">
-            <a:avLst/>
-          </a:prstGeom>
-          <a:noFill/>
-        </p:spPr>
-        <p:txBody>
-          <a:bodyPr wrap="square" anchor="t">
-            <a:spAutoFit/>
-          </a:bodyPr>
-          <a:lstStyle/>
-          <a:p>
-            <a:pPr algn="l"/>
-            <a:r>
-              <a:rPr sz="1400" b="0" i="0">
-                <a:solidFill>
-                  <a:srgbClr val="1F2937"/>
-                </a:solidFill>
-                <a:latin typeface="Calibri"/>
-              </a:rPr>
-              <a:t>Evaluation failures follow the configured failure policy</a:t>
-            </a:r>
-          </a:p>
-        </p:txBody>
-      </p:sp>
-      <p:sp>
-        <p:nvSpPr>
-          <p:cNvPr id="20" name="TextBox 19"/>
-          <p:cNvSpPr txBox="1"/>
-          <p:nvPr/>
-        </p:nvSpPr>
-        <p:spPr>
-          <a:xfrm>
-            <a:off x="548640" y="5760720"/>
-            <a:ext cx="11064240" cy="548640"/>
-          </a:xfrm>
-          <a:prstGeom prst="rect">
-            <a:avLst/>
-          </a:prstGeom>
-          <a:noFill/>
-        </p:spPr>
-        <p:txBody>
-          <a:bodyPr wrap="square" anchor="t">
-            <a:spAutoFit/>
-          </a:bodyPr>
-          <a:lstStyle/>
-          <a:p>
-            <a:pPr algn="l"/>
-            <a:r>
-              <a:rPr sz="1500" b="1" i="0">
-                <a:solidFill>
-                  <a:srgbClr val="2B3440"/>
-                </a:solidFill>
-                <a:latin typeface="Calibri"/>
-              </a:rPr>
-              <a:t>If we cannot demonstrate this, Phase 2 does not get funded. That is the point.</a:t>
-            </a:r>
-          </a:p>
-        </p:txBody>
-      </p:sp>
-      <p:sp>
-        <p:nvSpPr>
-          <p:cNvPr id="21" name="TextBox 20"/>
-          <p:cNvSpPr txBox="1"/>
-          <p:nvPr/>
-        </p:nvSpPr>
-        <p:spPr>
-          <a:xfrm>
-            <a:off x="548640" y="6473952"/>
-            <a:ext cx="8686800" cy="274320"/>
-          </a:xfrm>
-          <a:prstGeom prst="rect">
-            <a:avLst/>
-          </a:prstGeom>
-          <a:noFill/>
-        </p:spPr>
-        <p:txBody>
-          <a:bodyPr wrap="square" anchor="t">
-            <a:spAutoFit/>
-          </a:bodyPr>
-          <a:lstStyle/>
-          <a:p>
-            <a:pPr algn="l"/>
-            <a:r>
               <a:rPr sz="900" b="0" i="0">
                 <a:solidFill>
                   <a:srgbClr val="5B6572"/>
@@ -7833,7 +8506,7 @@
       </p:sp>
       <p:sp>
         <p:nvSpPr>
-          <p:cNvPr id="22" name="TextBox 21"/>
+          <p:cNvPr id="12" name="TextBox 11"/>
           <p:cNvSpPr txBox="1"/>
           <p:nvPr/>
         </p:nvSpPr>
@@ -7886,6 +8559,982 @@
       <p:grpSpPr/>
       <p:sp>
         <p:nvSpPr>
+          <p:cNvPr id="2" name="TextBox 1"/>
+          <p:cNvSpPr txBox="1"/>
+          <p:nvPr/>
+        </p:nvSpPr>
+        <p:spPr>
+          <a:xfrm>
+            <a:off x="548640" y="256032"/>
+            <a:ext cx="10058400" cy="292608"/>
+          </a:xfrm>
+          <a:prstGeom prst="rect">
+            <a:avLst/>
+          </a:prstGeom>
+          <a:noFill/>
+        </p:spPr>
+        <p:txBody>
+          <a:bodyPr wrap="square" anchor="t">
+            <a:spAutoFit/>
+          </a:bodyPr>
+          <a:lstStyle/>
+          <a:p>
+            <a:pPr algn="l"/>
+            <a:r>
+              <a:rPr sz="1100" b="1" i="0">
+                <a:solidFill>
+                  <a:srgbClr val="0F766E"/>
+                </a:solidFill>
+                <a:latin typeface="Calibri"/>
+              </a:rPr>
+              <a:t>MVP EXIT CRITERIA</a:t>
+            </a:r>
+          </a:p>
+        </p:txBody>
+      </p:sp>
+      <p:sp>
+        <p:nvSpPr>
+          <p:cNvPr id="3" name="TextBox 2"/>
+          <p:cNvSpPr txBox="1"/>
+          <p:nvPr/>
+        </p:nvSpPr>
+        <p:spPr>
+          <a:xfrm>
+            <a:off x="548640" y="502920"/>
+            <a:ext cx="11064240" cy="731520"/>
+          </a:xfrm>
+          <a:prstGeom prst="rect">
+            <a:avLst/>
+          </a:prstGeom>
+          <a:noFill/>
+        </p:spPr>
+        <p:txBody>
+          <a:bodyPr wrap="square" anchor="t">
+            <a:spAutoFit/>
+          </a:bodyPr>
+          <a:lstStyle/>
+          <a:p>
+            <a:pPr algn="l"/>
+            <a:r>
+              <a:rPr sz="3000" b="1" i="0">
+                <a:solidFill>
+                  <a:srgbClr val="2B3440"/>
+                </a:solidFill>
+                <a:latin typeface="Calibri"/>
+              </a:rPr>
+              <a:t>What success looks like — falsifiable, not aspirational</a:t>
+            </a:r>
+          </a:p>
+        </p:txBody>
+      </p:sp>
+      <p:sp>
+        <p:nvSpPr>
+          <p:cNvPr id="4" name="Rectangle 3"/>
+          <p:cNvSpPr/>
+          <p:nvPr/>
+        </p:nvSpPr>
+        <p:spPr>
+          <a:xfrm>
+            <a:off x="566928" y="1170432"/>
+            <a:ext cx="1371600" cy="38100"/>
+          </a:xfrm>
+          <a:prstGeom prst="rect">
+            <a:avLst/>
+          </a:prstGeom>
+          <a:solidFill>
+            <a:srgbClr val="0F766E"/>
+          </a:solidFill>
+          <a:ln>
+            <a:noFill/>
+          </a:ln>
+          <a:effectLst/>
+        </p:spPr>
+        <p:style>
+          <a:lnRef idx="1">
+            <a:schemeClr val="accent1"/>
+          </a:lnRef>
+          <a:fillRef idx="3">
+            <a:schemeClr val="accent1"/>
+          </a:fillRef>
+          <a:effectRef idx="2">
+            <a:schemeClr val="accent1"/>
+          </a:effectRef>
+          <a:fontRef idx="minor">
+            <a:schemeClr val="lt1"/>
+          </a:fontRef>
+        </p:style>
+        <p:txBody>
+          <a:bodyPr rtlCol="0" anchor="ctr"/>
+          <a:lstStyle/>
+          <a:p>
+            <a:pPr algn="ctr"/>
+          </a:p>
+        </p:txBody>
+      </p:sp>
+      <p:sp>
+        <p:nvSpPr>
+          <p:cNvPr id="5" name="TextBox 4"/>
+          <p:cNvSpPr txBox="1"/>
+          <p:nvPr/>
+        </p:nvSpPr>
+        <p:spPr>
+          <a:xfrm>
+            <a:off x="548640" y="1463040"/>
+            <a:ext cx="11064240" cy="457200"/>
+          </a:xfrm>
+          <a:prstGeom prst="rect">
+            <a:avLst/>
+          </a:prstGeom>
+          <a:noFill/>
+        </p:spPr>
+        <p:txBody>
+          <a:bodyPr wrap="square" anchor="t">
+            <a:spAutoFit/>
+          </a:bodyPr>
+          <a:lstStyle/>
+          <a:p>
+            <a:pPr algn="l"/>
+            <a:r>
+              <a:rPr sz="1600" b="0" i="0">
+                <a:solidFill>
+                  <a:srgbClr val="1F2937"/>
+                </a:solidFill>
+                <a:latin typeface="Calibri"/>
+              </a:rPr>
+              <a:t>The MVP will be considered successful when, in a live demonstration at week 5:</a:t>
+            </a:r>
+          </a:p>
+        </p:txBody>
+      </p:sp>
+      <p:sp>
+        <p:nvSpPr>
+          <p:cNvPr id="6" name="Oval 5"/>
+          <p:cNvSpPr/>
+          <p:nvPr/>
+        </p:nvSpPr>
+        <p:spPr>
+          <a:xfrm>
+            <a:off x="640080" y="2203704"/>
+            <a:ext cx="274320" cy="274320"/>
+          </a:xfrm>
+          <a:prstGeom prst="ellipse">
+            <a:avLst/>
+          </a:prstGeom>
+          <a:solidFill>
+            <a:srgbClr val="0F766E"/>
+          </a:solidFill>
+          <a:ln>
+            <a:noFill/>
+          </a:ln>
+          <a:effectLst/>
+        </p:spPr>
+        <p:style>
+          <a:lnRef idx="1">
+            <a:schemeClr val="accent1"/>
+          </a:lnRef>
+          <a:fillRef idx="3">
+            <a:schemeClr val="accent1"/>
+          </a:fillRef>
+          <a:effectRef idx="2">
+            <a:schemeClr val="accent1"/>
+          </a:effectRef>
+          <a:fontRef idx="minor">
+            <a:schemeClr val="lt1"/>
+          </a:fontRef>
+        </p:style>
+        <p:txBody>
+          <a:bodyPr rtlCol="0" anchor="ctr" wrap="square" lIns="76200" rIns="76200" tIns="38100" bIns="38100"/>
+          <a:lstStyle/>
+          <a:p>
+            <a:pPr algn="ctr"/>
+            <a:r>
+              <a:rPr sz="1200" b="1">
+                <a:solidFill>
+                  <a:srgbClr val="FFFFFF"/>
+                </a:solidFill>
+                <a:latin typeface="Calibri"/>
+              </a:rPr>
+              <a:t>✓</a:t>
+            </a:r>
+          </a:p>
+        </p:txBody>
+      </p:sp>
+      <p:sp>
+        <p:nvSpPr>
+          <p:cNvPr id="7" name="TextBox 6"/>
+          <p:cNvSpPr txBox="1"/>
+          <p:nvPr/>
+        </p:nvSpPr>
+        <p:spPr>
+          <a:xfrm>
+            <a:off x="1051560" y="2148840"/>
+            <a:ext cx="5120640" cy="777240"/>
+          </a:xfrm>
+          <a:prstGeom prst="rect">
+            <a:avLst/>
+          </a:prstGeom>
+          <a:noFill/>
+        </p:spPr>
+        <p:txBody>
+          <a:bodyPr wrap="square" anchor="t">
+            <a:spAutoFit/>
+          </a:bodyPr>
+          <a:lstStyle/>
+          <a:p>
+            <a:pPr algn="l"/>
+            <a:r>
+              <a:rPr sz="1400" b="0" i="0">
+                <a:solidFill>
+                  <a:srgbClr val="1F2937"/>
+                </a:solidFill>
+                <a:latin typeface="Calibri"/>
+              </a:rPr>
+              <a:t>Two independent LiteLLM instances consume the same policy</a:t>
+            </a:r>
+          </a:p>
+        </p:txBody>
+      </p:sp>
+      <p:sp>
+        <p:nvSpPr>
+          <p:cNvPr id="8" name="Oval 7"/>
+          <p:cNvSpPr/>
+          <p:nvPr/>
+        </p:nvSpPr>
+        <p:spPr>
+          <a:xfrm>
+            <a:off x="6309360" y="2203704"/>
+            <a:ext cx="274320" cy="274320"/>
+          </a:xfrm>
+          <a:prstGeom prst="ellipse">
+            <a:avLst/>
+          </a:prstGeom>
+          <a:solidFill>
+            <a:srgbClr val="0F766E"/>
+          </a:solidFill>
+          <a:ln>
+            <a:noFill/>
+          </a:ln>
+          <a:effectLst/>
+        </p:spPr>
+        <p:style>
+          <a:lnRef idx="1">
+            <a:schemeClr val="accent1"/>
+          </a:lnRef>
+          <a:fillRef idx="3">
+            <a:schemeClr val="accent1"/>
+          </a:fillRef>
+          <a:effectRef idx="2">
+            <a:schemeClr val="accent1"/>
+          </a:effectRef>
+          <a:fontRef idx="minor">
+            <a:schemeClr val="lt1"/>
+          </a:fontRef>
+        </p:style>
+        <p:txBody>
+          <a:bodyPr rtlCol="0" anchor="ctr" wrap="square" lIns="76200" rIns="76200" tIns="38100" bIns="38100"/>
+          <a:lstStyle/>
+          <a:p>
+            <a:pPr algn="ctr"/>
+            <a:r>
+              <a:rPr sz="1200" b="1">
+                <a:solidFill>
+                  <a:srgbClr val="FFFFFF"/>
+                </a:solidFill>
+                <a:latin typeface="Calibri"/>
+              </a:rPr>
+              <a:t>✓</a:t>
+            </a:r>
+          </a:p>
+        </p:txBody>
+      </p:sp>
+      <p:sp>
+        <p:nvSpPr>
+          <p:cNvPr id="9" name="TextBox 8"/>
+          <p:cNvSpPr txBox="1"/>
+          <p:nvPr/>
+        </p:nvSpPr>
+        <p:spPr>
+          <a:xfrm>
+            <a:off x="6720840" y="2148840"/>
+            <a:ext cx="5120640" cy="777240"/>
+          </a:xfrm>
+          <a:prstGeom prst="rect">
+            <a:avLst/>
+          </a:prstGeom>
+          <a:noFill/>
+        </p:spPr>
+        <p:txBody>
+          <a:bodyPr wrap="square" anchor="t">
+            <a:spAutoFit/>
+          </a:bodyPr>
+          <a:lstStyle/>
+          <a:p>
+            <a:pPr algn="l"/>
+            <a:r>
+              <a:rPr sz="1400" b="0" i="0">
+                <a:solidFill>
+                  <a:srgbClr val="1F2937"/>
+                </a:solidFill>
+                <a:latin typeface="Calibri"/>
+              </a:rPr>
+              <a:t>Neither shares model-provider credentials with the platform</a:t>
+            </a:r>
+          </a:p>
+        </p:txBody>
+      </p:sp>
+      <p:sp>
+        <p:nvSpPr>
+          <p:cNvPr id="10" name="Oval 9"/>
+          <p:cNvSpPr/>
+          <p:nvPr/>
+        </p:nvSpPr>
+        <p:spPr>
+          <a:xfrm>
+            <a:off x="640080" y="3072384"/>
+            <a:ext cx="274320" cy="274320"/>
+          </a:xfrm>
+          <a:prstGeom prst="ellipse">
+            <a:avLst/>
+          </a:prstGeom>
+          <a:solidFill>
+            <a:srgbClr val="0F766E"/>
+          </a:solidFill>
+          <a:ln>
+            <a:noFill/>
+          </a:ln>
+          <a:effectLst/>
+        </p:spPr>
+        <p:style>
+          <a:lnRef idx="1">
+            <a:schemeClr val="accent1"/>
+          </a:lnRef>
+          <a:fillRef idx="3">
+            <a:schemeClr val="accent1"/>
+          </a:fillRef>
+          <a:effectRef idx="2">
+            <a:schemeClr val="accent1"/>
+          </a:effectRef>
+          <a:fontRef idx="minor">
+            <a:schemeClr val="lt1"/>
+          </a:fontRef>
+        </p:style>
+        <p:txBody>
+          <a:bodyPr rtlCol="0" anchor="ctr" wrap="square" lIns="76200" rIns="76200" tIns="38100" bIns="38100"/>
+          <a:lstStyle/>
+          <a:p>
+            <a:pPr algn="ctr"/>
+            <a:r>
+              <a:rPr sz="1200" b="1">
+                <a:solidFill>
+                  <a:srgbClr val="FFFFFF"/>
+                </a:solidFill>
+                <a:latin typeface="Calibri"/>
+              </a:rPr>
+              <a:t>✓</a:t>
+            </a:r>
+          </a:p>
+        </p:txBody>
+      </p:sp>
+      <p:sp>
+        <p:nvSpPr>
+          <p:cNvPr id="11" name="TextBox 10"/>
+          <p:cNvSpPr txBox="1"/>
+          <p:nvPr/>
+        </p:nvSpPr>
+        <p:spPr>
+          <a:xfrm>
+            <a:off x="1051560" y="3017520"/>
+            <a:ext cx="5120640" cy="777240"/>
+          </a:xfrm>
+          <a:prstGeom prst="rect">
+            <a:avLst/>
+          </a:prstGeom>
+          <a:noFill/>
+        </p:spPr>
+        <p:txBody>
+          <a:bodyPr wrap="square" anchor="t">
+            <a:spAutoFit/>
+          </a:bodyPr>
+          <a:lstStyle/>
+          <a:p>
+            <a:pPr algn="l"/>
+            <a:r>
+              <a:rPr sz="1400" b="0" i="0">
+                <a:solidFill>
+                  <a:srgbClr val="1F2937"/>
+                </a:solidFill>
+                <a:latin typeface="Calibri"/>
+              </a:rPr>
+              <a:t>Both receive consistent, normalized decisions</a:t>
+            </a:r>
+          </a:p>
+        </p:txBody>
+      </p:sp>
+      <p:sp>
+        <p:nvSpPr>
+          <p:cNvPr id="12" name="Oval 11"/>
+          <p:cNvSpPr/>
+          <p:nvPr/>
+        </p:nvSpPr>
+        <p:spPr>
+          <a:xfrm>
+            <a:off x="6309360" y="3072384"/>
+            <a:ext cx="274320" cy="274320"/>
+          </a:xfrm>
+          <a:prstGeom prst="ellipse">
+            <a:avLst/>
+          </a:prstGeom>
+          <a:solidFill>
+            <a:srgbClr val="0F766E"/>
+          </a:solidFill>
+          <a:ln>
+            <a:noFill/>
+          </a:ln>
+          <a:effectLst/>
+        </p:spPr>
+        <p:style>
+          <a:lnRef idx="1">
+            <a:schemeClr val="accent1"/>
+          </a:lnRef>
+          <a:fillRef idx="3">
+            <a:schemeClr val="accent1"/>
+          </a:fillRef>
+          <a:effectRef idx="2">
+            <a:schemeClr val="accent1"/>
+          </a:effectRef>
+          <a:fontRef idx="minor">
+            <a:schemeClr val="lt1"/>
+          </a:fontRef>
+        </p:style>
+        <p:txBody>
+          <a:bodyPr rtlCol="0" anchor="ctr" wrap="square" lIns="76200" rIns="76200" tIns="38100" bIns="38100"/>
+          <a:lstStyle/>
+          <a:p>
+            <a:pPr algn="ctr"/>
+            <a:r>
+              <a:rPr sz="1200" b="1">
+                <a:solidFill>
+                  <a:srgbClr val="FFFFFF"/>
+                </a:solidFill>
+                <a:latin typeface="Calibri"/>
+              </a:rPr>
+              <a:t>✓</a:t>
+            </a:r>
+          </a:p>
+        </p:txBody>
+      </p:sp>
+      <p:sp>
+        <p:nvSpPr>
+          <p:cNvPr id="13" name="TextBox 12"/>
+          <p:cNvSpPr txBox="1"/>
+          <p:nvPr/>
+        </p:nvSpPr>
+        <p:spPr>
+          <a:xfrm>
+            <a:off x="6720840" y="3017520"/>
+            <a:ext cx="5120640" cy="777240"/>
+          </a:xfrm>
+          <a:prstGeom prst="rect">
+            <a:avLst/>
+          </a:prstGeom>
+          <a:noFill/>
+        </p:spPr>
+        <p:txBody>
+          <a:bodyPr wrap="square" anchor="t">
+            <a:spAutoFit/>
+          </a:bodyPr>
+          <a:lstStyle/>
+          <a:p>
+            <a:pPr algn="l"/>
+            <a:r>
+              <a:rPr sz="1400" b="0" i="0">
+                <a:solidFill>
+                  <a:srgbClr val="1F2937"/>
+                </a:solidFill>
+                <a:latin typeface="Calibri"/>
+              </a:rPr>
+              <a:t>One workload runs in Observe, another in Enforce</a:t>
+            </a:r>
+          </a:p>
+        </p:txBody>
+      </p:sp>
+      <p:sp>
+        <p:nvSpPr>
+          <p:cNvPr id="14" name="Oval 13"/>
+          <p:cNvSpPr/>
+          <p:nvPr/>
+        </p:nvSpPr>
+        <p:spPr>
+          <a:xfrm>
+            <a:off x="640080" y="3941064"/>
+            <a:ext cx="274320" cy="274320"/>
+          </a:xfrm>
+          <a:prstGeom prst="ellipse">
+            <a:avLst/>
+          </a:prstGeom>
+          <a:solidFill>
+            <a:srgbClr val="0F766E"/>
+          </a:solidFill>
+          <a:ln>
+            <a:noFill/>
+          </a:ln>
+          <a:effectLst/>
+        </p:spPr>
+        <p:style>
+          <a:lnRef idx="1">
+            <a:schemeClr val="accent1"/>
+          </a:lnRef>
+          <a:fillRef idx="3">
+            <a:schemeClr val="accent1"/>
+          </a:fillRef>
+          <a:effectRef idx="2">
+            <a:schemeClr val="accent1"/>
+          </a:effectRef>
+          <a:fontRef idx="minor">
+            <a:schemeClr val="lt1"/>
+          </a:fontRef>
+        </p:style>
+        <p:txBody>
+          <a:bodyPr rtlCol="0" anchor="ctr" wrap="square" lIns="76200" rIns="76200" tIns="38100" bIns="38100"/>
+          <a:lstStyle/>
+          <a:p>
+            <a:pPr algn="ctr"/>
+            <a:r>
+              <a:rPr sz="1200" b="1">
+                <a:solidFill>
+                  <a:srgbClr val="FFFFFF"/>
+                </a:solidFill>
+                <a:latin typeface="Calibri"/>
+              </a:rPr>
+              <a:t>✓</a:t>
+            </a:r>
+          </a:p>
+        </p:txBody>
+      </p:sp>
+      <p:sp>
+        <p:nvSpPr>
+          <p:cNvPr id="15" name="TextBox 14"/>
+          <p:cNvSpPr txBox="1"/>
+          <p:nvPr/>
+        </p:nvSpPr>
+        <p:spPr>
+          <a:xfrm>
+            <a:off x="1051560" y="3886200"/>
+            <a:ext cx="5120640" cy="777240"/>
+          </a:xfrm>
+          <a:prstGeom prst="rect">
+            <a:avLst/>
+          </a:prstGeom>
+          <a:noFill/>
+        </p:spPr>
+        <p:txBody>
+          <a:bodyPr wrap="square" anchor="t">
+            <a:spAutoFit/>
+          </a:bodyPr>
+          <a:lstStyle/>
+          <a:p>
+            <a:pPr algn="l"/>
+            <a:r>
+              <a:rPr sz="1400" b="0" i="0">
+                <a:solidFill>
+                  <a:srgbClr val="1F2937"/>
+                </a:solidFill>
+                <a:latin typeface="Calibri"/>
+              </a:rPr>
+              <a:t>A policy is upgraded — and rolled back</a:t>
+            </a:r>
+          </a:p>
+        </p:txBody>
+      </p:sp>
+      <p:sp>
+        <p:nvSpPr>
+          <p:cNvPr id="16" name="Oval 15"/>
+          <p:cNvSpPr/>
+          <p:nvPr/>
+        </p:nvSpPr>
+        <p:spPr>
+          <a:xfrm>
+            <a:off x="6309360" y="3941064"/>
+            <a:ext cx="274320" cy="274320"/>
+          </a:xfrm>
+          <a:prstGeom prst="ellipse">
+            <a:avLst/>
+          </a:prstGeom>
+          <a:solidFill>
+            <a:srgbClr val="0F766E"/>
+          </a:solidFill>
+          <a:ln>
+            <a:noFill/>
+          </a:ln>
+          <a:effectLst/>
+        </p:spPr>
+        <p:style>
+          <a:lnRef idx="1">
+            <a:schemeClr val="accent1"/>
+          </a:lnRef>
+          <a:fillRef idx="3">
+            <a:schemeClr val="accent1"/>
+          </a:fillRef>
+          <a:effectRef idx="2">
+            <a:schemeClr val="accent1"/>
+          </a:effectRef>
+          <a:fontRef idx="minor">
+            <a:schemeClr val="lt1"/>
+          </a:fontRef>
+        </p:style>
+        <p:txBody>
+          <a:bodyPr rtlCol="0" anchor="ctr" wrap="square" lIns="76200" rIns="76200" tIns="38100" bIns="38100"/>
+          <a:lstStyle/>
+          <a:p>
+            <a:pPr algn="ctr"/>
+            <a:r>
+              <a:rPr sz="1200" b="1">
+                <a:solidFill>
+                  <a:srgbClr val="FFFFFF"/>
+                </a:solidFill>
+                <a:latin typeface="Calibri"/>
+              </a:rPr>
+              <a:t>✓</a:t>
+            </a:r>
+          </a:p>
+        </p:txBody>
+      </p:sp>
+      <p:sp>
+        <p:nvSpPr>
+          <p:cNvPr id="17" name="TextBox 16"/>
+          <p:cNvSpPr txBox="1"/>
+          <p:nvPr/>
+        </p:nvSpPr>
+        <p:spPr>
+          <a:xfrm>
+            <a:off x="6720840" y="3886200"/>
+            <a:ext cx="5120640" cy="777240"/>
+          </a:xfrm>
+          <a:prstGeom prst="rect">
+            <a:avLst/>
+          </a:prstGeom>
+          <a:noFill/>
+        </p:spPr>
+        <p:txBody>
+          <a:bodyPr wrap="square" anchor="t">
+            <a:spAutoFit/>
+          </a:bodyPr>
+          <a:lstStyle/>
+          <a:p>
+            <a:pPr algn="l"/>
+            <a:r>
+              <a:rPr sz="1400" b="0" i="0">
+                <a:solidFill>
+                  <a:srgbClr val="1F2937"/>
+                </a:solidFill>
+                <a:latin typeface="Calibri"/>
+              </a:rPr>
+              <a:t>Raw prompt/response persistence can be switched off</a:t>
+            </a:r>
+          </a:p>
+        </p:txBody>
+      </p:sp>
+      <p:sp>
+        <p:nvSpPr>
+          <p:cNvPr id="18" name="Oval 17"/>
+          <p:cNvSpPr/>
+          <p:nvPr/>
+        </p:nvSpPr>
+        <p:spPr>
+          <a:xfrm>
+            <a:off x="640080" y="4809743"/>
+            <a:ext cx="274320" cy="274320"/>
+          </a:xfrm>
+          <a:prstGeom prst="ellipse">
+            <a:avLst/>
+          </a:prstGeom>
+          <a:solidFill>
+            <a:srgbClr val="0F766E"/>
+          </a:solidFill>
+          <a:ln>
+            <a:noFill/>
+          </a:ln>
+          <a:effectLst/>
+        </p:spPr>
+        <p:style>
+          <a:lnRef idx="1">
+            <a:schemeClr val="accent1"/>
+          </a:lnRef>
+          <a:fillRef idx="3">
+            <a:schemeClr val="accent1"/>
+          </a:fillRef>
+          <a:effectRef idx="2">
+            <a:schemeClr val="accent1"/>
+          </a:effectRef>
+          <a:fontRef idx="minor">
+            <a:schemeClr val="lt1"/>
+          </a:fontRef>
+        </p:style>
+        <p:txBody>
+          <a:bodyPr rtlCol="0" anchor="ctr" wrap="square" lIns="76200" rIns="76200" tIns="38100" bIns="38100"/>
+          <a:lstStyle/>
+          <a:p>
+            <a:pPr algn="ctr"/>
+            <a:r>
+              <a:rPr sz="1200" b="1">
+                <a:solidFill>
+                  <a:srgbClr val="FFFFFF"/>
+                </a:solidFill>
+                <a:latin typeface="Calibri"/>
+              </a:rPr>
+              <a:t>✓</a:t>
+            </a:r>
+          </a:p>
+        </p:txBody>
+      </p:sp>
+      <p:sp>
+        <p:nvSpPr>
+          <p:cNvPr id="19" name="TextBox 18"/>
+          <p:cNvSpPr txBox="1"/>
+          <p:nvPr/>
+        </p:nvSpPr>
+        <p:spPr>
+          <a:xfrm>
+            <a:off x="1051560" y="4754879"/>
+            <a:ext cx="5120640" cy="777240"/>
+          </a:xfrm>
+          <a:prstGeom prst="rect">
+            <a:avLst/>
+          </a:prstGeom>
+          <a:noFill/>
+        </p:spPr>
+        <p:txBody>
+          <a:bodyPr wrap="square" anchor="t">
+            <a:spAutoFit/>
+          </a:bodyPr>
+          <a:lstStyle/>
+          <a:p>
+            <a:pPr algn="l"/>
+            <a:r>
+              <a:rPr sz="1400" b="0" i="0">
+                <a:solidFill>
+                  <a:srgbClr val="1F2937"/>
+                </a:solidFill>
+                <a:latin typeface="Calibri"/>
+              </a:rPr>
+              <a:t>Evaluation failures follow the configured failure policy</a:t>
+            </a:r>
+          </a:p>
+        </p:txBody>
+      </p:sp>
+      <p:sp>
+        <p:nvSpPr>
+          <p:cNvPr id="20" name="Oval 19"/>
+          <p:cNvSpPr/>
+          <p:nvPr/>
+        </p:nvSpPr>
+        <p:spPr>
+          <a:xfrm>
+            <a:off x="6309360" y="4809743"/>
+            <a:ext cx="274320" cy="274320"/>
+          </a:xfrm>
+          <a:prstGeom prst="ellipse">
+            <a:avLst/>
+          </a:prstGeom>
+          <a:solidFill>
+            <a:srgbClr val="0F766E"/>
+          </a:solidFill>
+          <a:ln>
+            <a:noFill/>
+          </a:ln>
+          <a:effectLst/>
+        </p:spPr>
+        <p:style>
+          <a:lnRef idx="1">
+            <a:schemeClr val="accent1"/>
+          </a:lnRef>
+          <a:fillRef idx="3">
+            <a:schemeClr val="accent1"/>
+          </a:fillRef>
+          <a:effectRef idx="2">
+            <a:schemeClr val="accent1"/>
+          </a:effectRef>
+          <a:fontRef idx="minor">
+            <a:schemeClr val="lt1"/>
+          </a:fontRef>
+        </p:style>
+        <p:txBody>
+          <a:bodyPr rtlCol="0" anchor="ctr" wrap="square" lIns="76200" rIns="76200" tIns="38100" bIns="38100"/>
+          <a:lstStyle/>
+          <a:p>
+            <a:pPr algn="ctr"/>
+            <a:r>
+              <a:rPr sz="1200" b="1">
+                <a:solidFill>
+                  <a:srgbClr val="FFFFFF"/>
+                </a:solidFill>
+                <a:latin typeface="Calibri"/>
+              </a:rPr>
+              <a:t>✓</a:t>
+            </a:r>
+          </a:p>
+        </p:txBody>
+      </p:sp>
+      <p:sp>
+        <p:nvSpPr>
+          <p:cNvPr id="21" name="TextBox 20"/>
+          <p:cNvSpPr txBox="1"/>
+          <p:nvPr/>
+        </p:nvSpPr>
+        <p:spPr>
+          <a:xfrm>
+            <a:off x="6720840" y="4754879"/>
+            <a:ext cx="5120640" cy="777240"/>
+          </a:xfrm>
+          <a:prstGeom prst="rect">
+            <a:avLst/>
+          </a:prstGeom>
+          <a:noFill/>
+        </p:spPr>
+        <p:txBody>
+          <a:bodyPr wrap="square" anchor="t">
+            <a:spAutoFit/>
+          </a:bodyPr>
+          <a:lstStyle/>
+          <a:p>
+            <a:pPr algn="l"/>
+            <a:r>
+              <a:rPr sz="1400" b="0" i="0">
+                <a:solidFill>
+                  <a:srgbClr val="1F2937"/>
+                </a:solidFill>
+                <a:latin typeface="Calibri"/>
+              </a:rPr>
+              <a:t>An agent's tool call is validated before it executes</a:t>
+            </a:r>
+          </a:p>
+        </p:txBody>
+      </p:sp>
+      <p:sp>
+        <p:nvSpPr>
+          <p:cNvPr id="22" name="TextBox 21"/>
+          <p:cNvSpPr txBox="1"/>
+          <p:nvPr/>
+        </p:nvSpPr>
+        <p:spPr>
+          <a:xfrm>
+            <a:off x="548640" y="5760720"/>
+            <a:ext cx="11064240" cy="548640"/>
+          </a:xfrm>
+          <a:prstGeom prst="rect">
+            <a:avLst/>
+          </a:prstGeom>
+          <a:noFill/>
+        </p:spPr>
+        <p:txBody>
+          <a:bodyPr wrap="square" anchor="t">
+            <a:spAutoFit/>
+          </a:bodyPr>
+          <a:lstStyle/>
+          <a:p>
+            <a:pPr algn="l"/>
+            <a:r>
+              <a:rPr sz="1500" b="1" i="0">
+                <a:solidFill>
+                  <a:srgbClr val="2B3440"/>
+                </a:solidFill>
+                <a:latin typeface="Calibri"/>
+              </a:rPr>
+              <a:t>If we cannot demonstrate this at week 5, nothing further gets funded. That is the point.</a:t>
+            </a:r>
+          </a:p>
+        </p:txBody>
+      </p:sp>
+      <p:sp>
+        <p:nvSpPr>
+          <p:cNvPr id="23" name="TextBox 22"/>
+          <p:cNvSpPr txBox="1"/>
+          <p:nvPr/>
+        </p:nvSpPr>
+        <p:spPr>
+          <a:xfrm>
+            <a:off x="548640" y="6473952"/>
+            <a:ext cx="8686800" cy="274320"/>
+          </a:xfrm>
+          <a:prstGeom prst="rect">
+            <a:avLst/>
+          </a:prstGeom>
+          <a:noFill/>
+        </p:spPr>
+        <p:txBody>
+          <a:bodyPr wrap="square" anchor="t">
+            <a:spAutoFit/>
+          </a:bodyPr>
+          <a:lstStyle/>
+          <a:p>
+            <a:pPr algn="l"/>
+            <a:r>
+              <a:rPr sz="900" b="0" i="0">
+                <a:solidFill>
+                  <a:srgbClr val="5B6572"/>
+                </a:solidFill>
+                <a:latin typeface="Calibri"/>
+              </a:rPr>
+              <a:t>AI Guardrails — project creation proposal · internal draft · placeholder styling pending brand</a:t>
+            </a:r>
+          </a:p>
+        </p:txBody>
+      </p:sp>
+      <p:sp>
+        <p:nvSpPr>
+          <p:cNvPr id="24" name="TextBox 23"/>
+          <p:cNvSpPr txBox="1"/>
+          <p:nvPr/>
+        </p:nvSpPr>
+        <p:spPr>
+          <a:xfrm>
+            <a:off x="11338560" y="6473952"/>
+            <a:ext cx="548640" cy="274320"/>
+          </a:xfrm>
+          <a:prstGeom prst="rect">
+            <a:avLst/>
+          </a:prstGeom>
+          <a:noFill/>
+        </p:spPr>
+        <p:txBody>
+          <a:bodyPr wrap="square" anchor="t">
+            <a:spAutoFit/>
+          </a:bodyPr>
+          <a:lstStyle/>
+          <a:p>
+            <a:pPr algn="r"/>
+            <a:r>
+              <a:rPr sz="900" b="0" i="0">
+                <a:solidFill>
+                  <a:srgbClr val="5B6572"/>
+                </a:solidFill>
+                <a:latin typeface="Calibri"/>
+              </a:rPr>
+              <a:t>14</a:t>
+            </a:r>
+          </a:p>
+        </p:txBody>
+      </p:sp>
+    </p:spTree>
+  </p:cSld>
+  <p:clrMapOvr>
+    <a:masterClrMapping/>
+  </p:clrMapOvr>
+</p:sld>
+</file>
+
+<file path=ppt/slides/slide15.xml><?xml version="1.0" encoding="utf-8"?>
+<p:sld xmlns:a="http://schemas.openxmlformats.org/drawingml/2006/main" xmlns:p="http://schemas.openxmlformats.org/presentationml/2006/main" xmlns:r="http://schemas.openxmlformats.org/officeDocument/2006/relationships">
+  <p:cSld>
+    <p:spTree>
+      <p:nvGrpSpPr>
+        <p:cNvPr id="1" name=""/>
+        <p:cNvGrpSpPr/>
+        <p:nvPr/>
+      </p:nvGrpSpPr>
+      <p:grpSpPr/>
+      <p:sp>
+        <p:nvSpPr>
           <p:cNvPr id="2" name="Rectangle 1"/>
           <p:cNvSpPr/>
           <p:nvPr/>
@@ -8046,7 +9695,7 @@
                 </a:solidFill>
                 <a:latin typeface="Calibri"/>
               </a:rPr>
-              <a:t>Approve Phase 1 — Integration Proof</a:t>
+              <a:t>Approve the AI Guardrails MVP — full five-phase roadmap</a:t>
             </a:r>
           </a:p>
         </p:txBody>
@@ -8204,7 +9853,7 @@
                 </a:solidFill>
                 <a:latin typeface="Calibri"/>
               </a:rPr>
-              <a:t>willing to run the second, independent LiteLLM instance for the proof.</a:t>
+              <a:t>second independent LiteLLM instance for the proof — plus one agentic workload (e.g. LangGraph) for week-5 validation.</a:t>
             </a:r>
           </a:p>
         </p:txBody>
@@ -8292,7 +9941,7 @@
                 </a:solidFill>
                 <a:latin typeface="Calibri"/>
               </a:rPr>
-              <a:t>Agree the pilot starts in Observe mode</a:t>
+              <a:t>Agree every pilot starts in Observe mode</a:t>
             </a:r>
           </a:p>
         </p:txBody>
@@ -8410,7 +10059,7 @@
                 </a:solidFill>
                 <a:latin typeface="Calibri"/>
               </a:rPr>
-              <a:t>What we are NOT asking for: funding for Phases 2–5, additional headcount,</a:t>
+              <a:t>What we are NOT asking for: additional headcount, external spend beyond existing AWS accounts,</a:t>
             </a:r>
           </a:p>
           <a:p>
@@ -8426,7 +10075,7 @@
                 </a:solidFill>
                 <a:latin typeface="Calibri"/>
               </a:rPr>
-              <a:t>or any deployment mode beyond Remote Evaluation. Each of those remains a separate, later decision.</a:t>
+              <a:t>or production enforcement on day one. Anything beyond week 5 is a separate, later decision.</a:t>
             </a:r>
           </a:p>
         </p:txBody>
@@ -11551,7 +13200,7 @@
                 </a:solidFill>
                 <a:latin typeface="Calibri"/>
               </a:rPr>
-              <a:t>ADOPTION PATH</a:t>
+              <a:t>CONSUMPTION MODEL</a:t>
             </a:r>
           </a:p>
         </p:txBody>
@@ -11586,7 +13235,7 @@
                 </a:solidFill>
                 <a:latin typeface="Calibri"/>
               </a:rPr>
-              <a:t>How a team consumes it</a:t>
+              <a:t>How other teams consume it</a:t>
             </a:r>
           </a:p>
         </p:txBody>
@@ -11637,14 +13286,478 @@
       </p:sp>
       <p:sp>
         <p:nvSpPr>
-          <p:cNvPr id="5" name="Pentagon 4"/>
+          <p:cNvPr id="5" name="Rounded Rectangle 4"/>
           <p:cNvSpPr/>
           <p:nvPr/>
         </p:nvSpPr>
         <p:spPr>
           <a:xfrm>
-            <a:off x="548640" y="1737360"/>
-            <a:ext cx="1783080" cy="868680"/>
+            <a:off x="548640" y="1463040"/>
+            <a:ext cx="3611880" cy="502920"/>
+          </a:xfrm>
+          <a:prstGeom prst="roundRect">
+            <a:avLst/>
+          </a:prstGeom>
+          <a:solidFill>
+            <a:srgbClr val="3D7DC8"/>
+          </a:solidFill>
+          <a:ln>
+            <a:noFill/>
+          </a:ln>
+          <a:effectLst/>
+        </p:spPr>
+        <p:style>
+          <a:lnRef idx="1">
+            <a:schemeClr val="accent1"/>
+          </a:lnRef>
+          <a:fillRef idx="3">
+            <a:schemeClr val="accent1"/>
+          </a:fillRef>
+          <a:effectRef idx="2">
+            <a:schemeClr val="accent1"/>
+          </a:effectRef>
+          <a:fontRef idx="minor">
+            <a:schemeClr val="lt1"/>
+          </a:fontRef>
+        </p:style>
+        <p:txBody>
+          <a:bodyPr rtlCol="0" anchor="ctr" wrap="square" lIns="76200" rIns="76200" tIns="38100" bIns="38100"/>
+          <a:lstStyle/>
+          <a:p>
+            <a:pPr algn="ctr"/>
+            <a:r>
+              <a:rPr sz="1300" b="1">
+                <a:solidFill>
+                  <a:srgbClr val="FFFFFF"/>
+                </a:solidFill>
+                <a:latin typeface="Calibri"/>
+              </a:rPr>
+              <a:t>Through your gateway</a:t>
+            </a:r>
+          </a:p>
+        </p:txBody>
+      </p:sp>
+      <p:sp>
+        <p:nvSpPr>
+          <p:cNvPr id="6" name="Rounded Rectangle 5"/>
+          <p:cNvSpPr/>
+          <p:nvPr/>
+        </p:nvSpPr>
+        <p:spPr>
+          <a:xfrm>
+            <a:off x="548640" y="2084831"/>
+            <a:ext cx="3611880" cy="1325880"/>
+          </a:xfrm>
+          <a:prstGeom prst="roundRect">
+            <a:avLst/>
+          </a:prstGeom>
+          <a:solidFill>
+            <a:srgbClr val="FFFFFF"/>
+          </a:solidFill>
+          <a:ln w="12700">
+            <a:solidFill>
+              <a:srgbClr val="C9D1D9"/>
+            </a:solidFill>
+          </a:ln>
+          <a:effectLst/>
+        </p:spPr>
+        <p:style>
+          <a:lnRef idx="1">
+            <a:schemeClr val="accent1"/>
+          </a:lnRef>
+          <a:fillRef idx="3">
+            <a:schemeClr val="accent1"/>
+          </a:fillRef>
+          <a:effectRef idx="2">
+            <a:schemeClr val="accent1"/>
+          </a:effectRef>
+          <a:fontRef idx="minor">
+            <a:schemeClr val="lt1"/>
+          </a:fontRef>
+        </p:style>
+        <p:txBody>
+          <a:bodyPr rtlCol="0" anchor="t" wrap="square" lIns="76200" rIns="76200" tIns="38100" bIns="38100"/>
+          <a:lstStyle/>
+          <a:p>
+            <a:pPr algn="l"/>
+            <a:r>
+              <a:rPr sz="1200" b="0">
+                <a:solidFill>
+                  <a:srgbClr val="5B6572"/>
+                </a:solidFill>
+                <a:latin typeface="Calibri"/>
+              </a:rPr>
+              <a:t>Install a thin connector in the gateway you already run — LiteLLM first, others next.</a:t>
+            </a:r>
+          </a:p>
+        </p:txBody>
+      </p:sp>
+      <p:sp>
+        <p:nvSpPr>
+          <p:cNvPr id="7" name="TextBox 6"/>
+          <p:cNvSpPr txBox="1"/>
+          <p:nvPr/>
+        </p:nvSpPr>
+        <p:spPr>
+          <a:xfrm>
+            <a:off x="621792" y="3456432"/>
+            <a:ext cx="3611880" cy="320040"/>
+          </a:xfrm>
+          <a:prstGeom prst="rect">
+            <a:avLst/>
+          </a:prstGeom>
+          <a:noFill/>
+        </p:spPr>
+        <p:txBody>
+          <a:bodyPr wrap="square" anchor="t">
+            <a:spAutoFit/>
+          </a:bodyPr>
+          <a:lstStyle/>
+          <a:p>
+            <a:pPr algn="l"/>
+            <a:r>
+              <a:rPr sz="1100" b="1" i="0">
+                <a:solidFill>
+                  <a:srgbClr val="3D7DC8"/>
+                </a:solidFill>
+                <a:latin typeface="Calibri"/>
+              </a:rPr>
+              <a:t>Zero application-code change.</a:t>
+            </a:r>
+          </a:p>
+        </p:txBody>
+      </p:sp>
+      <p:sp>
+        <p:nvSpPr>
+          <p:cNvPr id="8" name="Rounded Rectangle 7"/>
+          <p:cNvSpPr/>
+          <p:nvPr/>
+        </p:nvSpPr>
+        <p:spPr>
+          <a:xfrm>
+            <a:off x="4462272" y="1463040"/>
+            <a:ext cx="3611880" cy="502920"/>
+          </a:xfrm>
+          <a:prstGeom prst="roundRect">
+            <a:avLst/>
+          </a:prstGeom>
+          <a:solidFill>
+            <a:srgbClr val="0F766E"/>
+          </a:solidFill>
+          <a:ln>
+            <a:noFill/>
+          </a:ln>
+          <a:effectLst/>
+        </p:spPr>
+        <p:style>
+          <a:lnRef idx="1">
+            <a:schemeClr val="accent1"/>
+          </a:lnRef>
+          <a:fillRef idx="3">
+            <a:schemeClr val="accent1"/>
+          </a:fillRef>
+          <a:effectRef idx="2">
+            <a:schemeClr val="accent1"/>
+          </a:effectRef>
+          <a:fontRef idx="minor">
+            <a:schemeClr val="lt1"/>
+          </a:fontRef>
+        </p:style>
+        <p:txBody>
+          <a:bodyPr rtlCol="0" anchor="ctr" wrap="square" lIns="76200" rIns="76200" tIns="38100" bIns="38100"/>
+          <a:lstStyle/>
+          <a:p>
+            <a:pPr algn="ctr"/>
+            <a:r>
+              <a:rPr sz="1300" b="1">
+                <a:solidFill>
+                  <a:srgbClr val="FFFFFF"/>
+                </a:solidFill>
+                <a:latin typeface="Calibri"/>
+              </a:rPr>
+              <a:t>Directly from your app</a:t>
+            </a:r>
+          </a:p>
+        </p:txBody>
+      </p:sp>
+      <p:sp>
+        <p:nvSpPr>
+          <p:cNvPr id="9" name="Rounded Rectangle 8"/>
+          <p:cNvSpPr/>
+          <p:nvPr/>
+        </p:nvSpPr>
+        <p:spPr>
+          <a:xfrm>
+            <a:off x="4462272" y="2084831"/>
+            <a:ext cx="3611880" cy="1325880"/>
+          </a:xfrm>
+          <a:prstGeom prst="roundRect">
+            <a:avLst/>
+          </a:prstGeom>
+          <a:solidFill>
+            <a:srgbClr val="FFFFFF"/>
+          </a:solidFill>
+          <a:ln w="12700">
+            <a:solidFill>
+              <a:srgbClr val="C9D1D9"/>
+            </a:solidFill>
+          </a:ln>
+          <a:effectLst/>
+        </p:spPr>
+        <p:style>
+          <a:lnRef idx="1">
+            <a:schemeClr val="accent1"/>
+          </a:lnRef>
+          <a:fillRef idx="3">
+            <a:schemeClr val="accent1"/>
+          </a:fillRef>
+          <a:effectRef idx="2">
+            <a:schemeClr val="accent1"/>
+          </a:effectRef>
+          <a:fontRef idx="minor">
+            <a:schemeClr val="lt1"/>
+          </a:fontRef>
+        </p:style>
+        <p:txBody>
+          <a:bodyPr rtlCol="0" anchor="t" wrap="square" lIns="76200" rIns="76200" tIns="38100" bIns="38100"/>
+          <a:lstStyle/>
+          <a:p>
+            <a:pPr algn="l"/>
+            <a:r>
+              <a:rPr sz="1200" b="0">
+                <a:solidFill>
+                  <a:srgbClr val="5B6572"/>
+                </a:solidFill>
+                <a:latin typeface="Calibri"/>
+              </a:rPr>
+              <a:t>Call the evaluation service over plain HTTP or SDK — works for LangGraph, LangChain, custom agents, any framework.</a:t>
+            </a:r>
+          </a:p>
+        </p:txBody>
+      </p:sp>
+      <p:sp>
+        <p:nvSpPr>
+          <p:cNvPr id="10" name="TextBox 9"/>
+          <p:cNvSpPr txBox="1"/>
+          <p:nvPr/>
+        </p:nvSpPr>
+        <p:spPr>
+          <a:xfrm>
+            <a:off x="4535424" y="3456432"/>
+            <a:ext cx="3611880" cy="320040"/>
+          </a:xfrm>
+          <a:prstGeom prst="rect">
+            <a:avLst/>
+          </a:prstGeom>
+          <a:noFill/>
+        </p:spPr>
+        <p:txBody>
+          <a:bodyPr wrap="square" anchor="t">
+            <a:spAutoFit/>
+          </a:bodyPr>
+          <a:lstStyle/>
+          <a:p>
+            <a:pPr algn="l"/>
+            <a:r>
+              <a:rPr sz="1100" b="1" i="0">
+                <a:solidFill>
+                  <a:srgbClr val="0F766E"/>
+                </a:solidFill>
+                <a:latin typeface="Calibri"/>
+              </a:rPr>
+              <a:t>No gateway required.</a:t>
+            </a:r>
+          </a:p>
+        </p:txBody>
+      </p:sp>
+      <p:sp>
+        <p:nvSpPr>
+          <p:cNvPr id="11" name="Rounded Rectangle 10"/>
+          <p:cNvSpPr/>
+          <p:nvPr/>
+        </p:nvSpPr>
+        <p:spPr>
+          <a:xfrm>
+            <a:off x="8375904" y="1463040"/>
+            <a:ext cx="3611880" cy="502920"/>
+          </a:xfrm>
+          <a:prstGeom prst="roundRect">
+            <a:avLst/>
+          </a:prstGeom>
+          <a:solidFill>
+            <a:srgbClr val="C9971D"/>
+          </a:solidFill>
+          <a:ln>
+            <a:noFill/>
+          </a:ln>
+          <a:effectLst/>
+        </p:spPr>
+        <p:style>
+          <a:lnRef idx="1">
+            <a:schemeClr val="accent1"/>
+          </a:lnRef>
+          <a:fillRef idx="3">
+            <a:schemeClr val="accent1"/>
+          </a:fillRef>
+          <a:effectRef idx="2">
+            <a:schemeClr val="accent1"/>
+          </a:effectRef>
+          <a:fontRef idx="minor">
+            <a:schemeClr val="lt1"/>
+          </a:fontRef>
+        </p:style>
+        <p:txBody>
+          <a:bodyPr rtlCol="0" anchor="ctr" wrap="square" lIns="76200" rIns="76200" tIns="38100" bIns="38100"/>
+          <a:lstStyle/>
+          <a:p>
+            <a:pPr algn="ctr"/>
+            <a:r>
+              <a:rPr sz="1300" b="1">
+                <a:solidFill>
+                  <a:srgbClr val="FFFFFF"/>
+                </a:solidFill>
+                <a:latin typeface="Calibri"/>
+              </a:rPr>
+              <a:t>Fully managed</a:t>
+            </a:r>
+          </a:p>
+        </p:txBody>
+      </p:sp>
+      <p:sp>
+        <p:nvSpPr>
+          <p:cNvPr id="12" name="Rounded Rectangle 11"/>
+          <p:cNvSpPr/>
+          <p:nvPr/>
+        </p:nvSpPr>
+        <p:spPr>
+          <a:xfrm>
+            <a:off x="8375904" y="2084831"/>
+            <a:ext cx="3611880" cy="1325880"/>
+          </a:xfrm>
+          <a:prstGeom prst="roundRect">
+            <a:avLst/>
+          </a:prstGeom>
+          <a:solidFill>
+            <a:srgbClr val="FFFFFF"/>
+          </a:solidFill>
+          <a:ln w="12700">
+            <a:solidFill>
+              <a:srgbClr val="C9D1D9"/>
+            </a:solidFill>
+          </a:ln>
+          <a:effectLst/>
+        </p:spPr>
+        <p:style>
+          <a:lnRef idx="1">
+            <a:schemeClr val="accent1"/>
+          </a:lnRef>
+          <a:fillRef idx="3">
+            <a:schemeClr val="accent1"/>
+          </a:fillRef>
+          <a:effectRef idx="2">
+            <a:schemeClr val="accent1"/>
+          </a:effectRef>
+          <a:fontRef idx="minor">
+            <a:schemeClr val="lt1"/>
+          </a:fontRef>
+        </p:style>
+        <p:txBody>
+          <a:bodyPr rtlCol="0" anchor="t" wrap="square" lIns="76200" rIns="76200" tIns="38100" bIns="38100"/>
+          <a:lstStyle/>
+          <a:p>
+            <a:pPr algn="l"/>
+            <a:r>
+              <a:rPr sz="1200" b="0">
+                <a:solidFill>
+                  <a:srgbClr val="5B6572"/>
+                </a:solidFill>
+                <a:latin typeface="Calibri"/>
+              </a:rPr>
+              <a:t>Point your app at the Guarded Gateway: an OpenAI-compatible endpoint with guardrails and model routing built in.</a:t>
+            </a:r>
+          </a:p>
+        </p:txBody>
+      </p:sp>
+      <p:sp>
+        <p:nvSpPr>
+          <p:cNvPr id="13" name="TextBox 12"/>
+          <p:cNvSpPr txBox="1"/>
+          <p:nvPr/>
+        </p:nvSpPr>
+        <p:spPr>
+          <a:xfrm>
+            <a:off x="8449056" y="3456432"/>
+            <a:ext cx="3611880" cy="320040"/>
+          </a:xfrm>
+          <a:prstGeom prst="rect">
+            <a:avLst/>
+          </a:prstGeom>
+          <a:noFill/>
+        </p:spPr>
+        <p:txBody>
+          <a:bodyPr wrap="square" anchor="t">
+            <a:spAutoFit/>
+          </a:bodyPr>
+          <a:lstStyle/>
+          <a:p>
+            <a:pPr algn="l"/>
+            <a:r>
+              <a:rPr sz="1100" b="1" i="0">
+                <a:solidFill>
+                  <a:srgbClr val="C9971D"/>
+                </a:solidFill>
+                <a:latin typeface="Calibri"/>
+              </a:rPr>
+              <a:t>Nothing to operate.</a:t>
+            </a:r>
+          </a:p>
+        </p:txBody>
+      </p:sp>
+      <p:sp>
+        <p:nvSpPr>
+          <p:cNvPr id="14" name="TextBox 13"/>
+          <p:cNvSpPr txBox="1"/>
+          <p:nvPr/>
+        </p:nvSpPr>
+        <p:spPr>
+          <a:xfrm>
+            <a:off x="548640" y="3931920"/>
+            <a:ext cx="11064240" cy="365760"/>
+          </a:xfrm>
+          <a:prstGeom prst="rect">
+            <a:avLst/>
+          </a:prstGeom>
+          <a:noFill/>
+        </p:spPr>
+        <p:txBody>
+          <a:bodyPr wrap="square" anchor="t">
+            <a:spAutoFit/>
+          </a:bodyPr>
+          <a:lstStyle/>
+          <a:p>
+            <a:pPr algn="l"/>
+            <a:r>
+              <a:rPr sz="1300" b="1" i="0">
+                <a:solidFill>
+                  <a:srgbClr val="1F2937"/>
+                </a:solidFill>
+                <a:latin typeface="Calibri"/>
+              </a:rPr>
+              <a:t>Whichever path — onboarding is the same six steps:</a:t>
+            </a:r>
+          </a:p>
+        </p:txBody>
+      </p:sp>
+      <p:sp>
+        <p:nvSpPr>
+          <p:cNvPr id="15" name="Pentagon 14"/>
+          <p:cNvSpPr/>
+          <p:nvPr/>
+        </p:nvSpPr>
+        <p:spPr>
+          <a:xfrm>
+            <a:off x="548640" y="4343400"/>
+            <a:ext cx="1783080" cy="822960"/>
           </a:xfrm>
           <a:prstGeom prst="homePlate">
             <a:avLst/>
@@ -11677,7 +13790,7 @@
           <a:p>
             <a:pPr algn="ctr"/>
             <a:r>
-              <a:rPr sz="1400" b="1">
+              <a:rPr sz="1300" b="1">
                 <a:solidFill>
                   <a:srgbClr val="FFFFFF"/>
                 </a:solidFill>
@@ -11689,7 +13802,7 @@
           <a:p>
             <a:pPr algn="ctr"/>
             <a:r>
-              <a:rPr sz="1200">
+              <a:rPr sz="1100">
                 <a:solidFill>
                   <a:srgbClr val="D5DDE4"/>
                 </a:solidFill>
@@ -11702,14 +13815,14 @@
       </p:sp>
       <p:sp>
         <p:nvSpPr>
-          <p:cNvPr id="6" name="Chevron 5"/>
+          <p:cNvPr id="16" name="Chevron 15"/>
           <p:cNvSpPr/>
           <p:nvPr/>
         </p:nvSpPr>
         <p:spPr>
           <a:xfrm>
-            <a:off x="2121408" y="1737360"/>
-            <a:ext cx="1783080" cy="868680"/>
+            <a:off x="2121408" y="4343400"/>
+            <a:ext cx="1783080" cy="822960"/>
           </a:xfrm>
           <a:prstGeom prst="chevron">
             <a:avLst/>
@@ -11742,7 +13855,7 @@
           <a:p>
             <a:pPr algn="ctr"/>
             <a:r>
-              <a:rPr sz="1400" b="1">
+              <a:rPr sz="1300" b="1">
                 <a:solidFill>
                   <a:srgbClr val="FFFFFF"/>
                 </a:solidFill>
@@ -11754,7 +13867,7 @@
           <a:p>
             <a:pPr algn="ctr"/>
             <a:r>
-              <a:rPr sz="1200">
+              <a:rPr sz="1100">
                 <a:solidFill>
                   <a:srgbClr val="D5DDE4"/>
                 </a:solidFill>
@@ -11767,14 +13880,14 @@
       </p:sp>
       <p:sp>
         <p:nvSpPr>
-          <p:cNvPr id="7" name="Chevron 6"/>
+          <p:cNvPr id="17" name="Chevron 16"/>
           <p:cNvSpPr/>
           <p:nvPr/>
         </p:nvSpPr>
         <p:spPr>
           <a:xfrm>
-            <a:off x="3694176" y="1737360"/>
-            <a:ext cx="1783080" cy="868680"/>
+            <a:off x="3694176" y="4343400"/>
+            <a:ext cx="1783080" cy="822960"/>
           </a:xfrm>
           <a:prstGeom prst="chevron">
             <a:avLst/>
@@ -11807,7 +13920,7 @@
           <a:p>
             <a:pPr algn="ctr"/>
             <a:r>
-              <a:rPr sz="1400" b="1">
+              <a:rPr sz="1300" b="1">
                 <a:solidFill>
                   <a:srgbClr val="FFFFFF"/>
                 </a:solidFill>
@@ -11819,7 +13932,7 @@
           <a:p>
             <a:pPr algn="ctr"/>
             <a:r>
-              <a:rPr sz="1200">
+              <a:rPr sz="1100">
                 <a:solidFill>
                   <a:srgbClr val="D5DDE4"/>
                 </a:solidFill>
@@ -11832,14 +13945,14 @@
       </p:sp>
       <p:sp>
         <p:nvSpPr>
-          <p:cNvPr id="8" name="Chevron 7"/>
+          <p:cNvPr id="18" name="Chevron 17"/>
           <p:cNvSpPr/>
           <p:nvPr/>
         </p:nvSpPr>
         <p:spPr>
           <a:xfrm>
-            <a:off x="5266944" y="1737360"/>
-            <a:ext cx="1783080" cy="868680"/>
+            <a:off x="5266944" y="4343400"/>
+            <a:ext cx="1783080" cy="822960"/>
           </a:xfrm>
           <a:prstGeom prst="chevron">
             <a:avLst/>
@@ -11872,7 +13985,7 @@
           <a:p>
             <a:pPr algn="ctr"/>
             <a:r>
-              <a:rPr sz="1400" b="1">
+              <a:rPr sz="1300" b="1">
                 <a:solidFill>
                   <a:srgbClr val="FFFFFF"/>
                 </a:solidFill>
@@ -11884,7 +13997,7 @@
           <a:p>
             <a:pPr algn="ctr"/>
             <a:r>
-              <a:rPr sz="1200">
+              <a:rPr sz="1100">
                 <a:solidFill>
                   <a:srgbClr val="D5DDE4"/>
                 </a:solidFill>
@@ -11897,14 +14010,14 @@
       </p:sp>
       <p:sp>
         <p:nvSpPr>
-          <p:cNvPr id="9" name="Chevron 8"/>
+          <p:cNvPr id="19" name="Chevron 18"/>
           <p:cNvSpPr/>
           <p:nvPr/>
         </p:nvSpPr>
         <p:spPr>
           <a:xfrm>
-            <a:off x="6839712" y="1737360"/>
-            <a:ext cx="1783080" cy="868680"/>
+            <a:off x="6839712" y="4343400"/>
+            <a:ext cx="1783080" cy="822960"/>
           </a:xfrm>
           <a:prstGeom prst="chevron">
             <a:avLst/>
@@ -11937,7 +14050,7 @@
           <a:p>
             <a:pPr algn="ctr"/>
             <a:r>
-              <a:rPr sz="1400" b="1">
+              <a:rPr sz="1300" b="1">
                 <a:solidFill>
                   <a:srgbClr val="FFFFFF"/>
                 </a:solidFill>
@@ -11949,7 +14062,7 @@
           <a:p>
             <a:pPr algn="ctr"/>
             <a:r>
-              <a:rPr sz="1200">
+              <a:rPr sz="1100">
                 <a:solidFill>
                   <a:srgbClr val="D5DDE4"/>
                 </a:solidFill>
@@ -11962,14 +14075,14 @@
       </p:sp>
       <p:sp>
         <p:nvSpPr>
-          <p:cNvPr id="10" name="Chevron 9"/>
+          <p:cNvPr id="20" name="Chevron 19"/>
           <p:cNvSpPr/>
           <p:nvPr/>
         </p:nvSpPr>
         <p:spPr>
           <a:xfrm>
-            <a:off x="8412480" y="1737360"/>
-            <a:ext cx="1783080" cy="868680"/>
+            <a:off x="8412480" y="4343400"/>
+            <a:ext cx="1783080" cy="822960"/>
           </a:xfrm>
           <a:prstGeom prst="chevron">
             <a:avLst/>
@@ -12002,7 +14115,7 @@
           <a:p>
             <a:pPr algn="ctr"/>
             <a:r>
-              <a:rPr sz="1400" b="1">
+              <a:rPr sz="1300" b="1">
                 <a:solidFill>
                   <a:srgbClr val="FFFFFF"/>
                 </a:solidFill>
@@ -12014,7 +14127,7 @@
           <a:p>
             <a:pPr algn="ctr"/>
             <a:r>
-              <a:rPr sz="1200">
+              <a:rPr sz="1100">
                 <a:solidFill>
                   <a:srgbClr val="D5DDE4"/>
                 </a:solidFill>
@@ -12027,173 +14140,14 @@
       </p:sp>
       <p:sp>
         <p:nvSpPr>
-          <p:cNvPr id="11" name="TextBox 10"/>
+          <p:cNvPr id="21" name="TextBox 20"/>
           <p:cNvSpPr txBox="1"/>
           <p:nvPr/>
         </p:nvSpPr>
         <p:spPr>
           <a:xfrm>
-            <a:off x="548640" y="3108960"/>
-            <a:ext cx="11064240" cy="2377440"/>
-          </a:xfrm>
-          <a:prstGeom prst="rect">
-            <a:avLst/>
-          </a:prstGeom>
-          <a:noFill/>
-        </p:spPr>
-        <p:txBody>
-          <a:bodyPr wrap="square">
-            <a:spAutoFit/>
-          </a:bodyPr>
-          <a:lstStyle/>
-          <a:p>
-            <a:pPr>
-              <a:spcAft>
-                <a:spcPts val="1000"/>
-              </a:spcAft>
-            </a:pPr>
-            <a:r>
-              <a:rPr sz="1500">
-                <a:solidFill>
-                  <a:srgbClr val="0F766E"/>
-                </a:solidFill>
-                <a:latin typeface="Calibri"/>
-              </a:rPr>
-              <a:t>▪  </a:t>
-            </a:r>
-            <a:r>
-              <a:rPr sz="1500" b="1">
-                <a:solidFill>
-                  <a:srgbClr val="1F2937"/>
-                </a:solidFill>
-                <a:latin typeface="Calibri"/>
-              </a:rPr>
-              <a:t>Minimal application change</a:t>
-            </a:r>
-            <a:r>
-              <a:rPr sz="1500">
-                <a:solidFill>
-                  <a:srgbClr val="5B6572"/>
-                </a:solidFill>
-                <a:latin typeface="Calibri"/>
-              </a:rPr>
-              <a:t> — the connector sits at the gateway layer, not inside application code.</a:t>
-            </a:r>
-          </a:p>
-          <a:p>
-            <a:pPr>
-              <a:spcAft>
-                <a:spcPts val="1000"/>
-              </a:spcAft>
-            </a:pPr>
-            <a:r>
-              <a:rPr sz="1500">
-                <a:solidFill>
-                  <a:srgbClr val="0F766E"/>
-                </a:solidFill>
-                <a:latin typeface="Calibri"/>
-              </a:rPr>
-              <a:t>▪  </a:t>
-            </a:r>
-            <a:r>
-              <a:rPr sz="1500" b="1">
-                <a:solidFill>
-                  <a:srgbClr val="1F2937"/>
-                </a:solidFill>
-                <a:latin typeface="Calibri"/>
-              </a:rPr>
-              <a:t>Your credentials stay yours</a:t>
-            </a:r>
-            <a:r>
-              <a:rPr sz="1500">
-                <a:solidFill>
-                  <a:srgbClr val="5B6572"/>
-                </a:solidFill>
-                <a:latin typeface="Calibri"/>
-              </a:rPr>
-              <a:t> — onboarding never transfers model-provider credentials or gateway admin access to the platform.</a:t>
-            </a:r>
-          </a:p>
-          <a:p>
-            <a:pPr>
-              <a:spcAft>
-                <a:spcPts val="1000"/>
-              </a:spcAft>
-            </a:pPr>
-            <a:r>
-              <a:rPr sz="1500">
-                <a:solidFill>
-                  <a:srgbClr val="0F766E"/>
-                </a:solidFill>
-                <a:latin typeface="Calibri"/>
-              </a:rPr>
-              <a:t>▪  </a:t>
-            </a:r>
-            <a:r>
-              <a:rPr sz="1500" b="1">
-                <a:solidFill>
-                  <a:srgbClr val="1F2937"/>
-                </a:solidFill>
-                <a:latin typeface="Calibri"/>
-              </a:rPr>
-              <a:t>No gateway takeover</a:t>
-            </a:r>
-            <a:r>
-              <a:rPr sz="1500">
-                <a:solidFill>
-                  <a:srgbClr val="5B6572"/>
-                </a:solidFill>
-                <a:latin typeface="Calibri"/>
-              </a:rPr>
-              <a:t> — “importing” a policy never means cloning or remotely controlling a team's LiteLLM.</a:t>
-            </a:r>
-          </a:p>
-          <a:p>
-            <a:pPr>
-              <a:spcAft>
-                <a:spcPts val="1000"/>
-              </a:spcAft>
-            </a:pPr>
-            <a:r>
-              <a:rPr sz="1500">
-                <a:solidFill>
-                  <a:srgbClr val="0F766E"/>
-                </a:solidFill>
-                <a:latin typeface="Calibri"/>
-              </a:rPr>
-              <a:t>▪  </a:t>
-            </a:r>
-            <a:r>
-              <a:rPr sz="1500" b="1">
-                <a:solidFill>
-                  <a:srgbClr val="1F2937"/>
-                </a:solidFill>
-                <a:latin typeface="Calibri"/>
-              </a:rPr>
-              <a:t>Non-LiteLLM consumers</a:t>
-            </a:r>
-            <a:r>
-              <a:rPr sz="1500">
-                <a:solidFill>
-                  <a:srgbClr val="5B6572"/>
-                </a:solidFill>
-                <a:latin typeface="Calibri"/>
-              </a:rPr>
-              <a:t> — any app or gateway can call the same evaluation service over plain HTTP.</a:t>
-            </a:r>
-          </a:p>
-        </p:txBody>
-      </p:sp>
-      <p:sp>
-        <p:nvSpPr>
-          <p:cNvPr id="12" name="TextBox 11"/>
-          <p:cNvSpPr txBox="1"/>
-          <p:nvPr/>
-        </p:nvSpPr>
-        <p:spPr>
-          <a:xfrm>
-            <a:off x="548640" y="5760720"/>
-            <a:ext cx="11064240" cy="457200"/>
+            <a:off x="548640" y="5349240"/>
+            <a:ext cx="11064240" cy="411480"/>
           </a:xfrm>
           <a:prstGeom prst="rect">
             <a:avLst/>
@@ -12208,27 +14162,27 @@
           <a:p>
             <a:pPr algn="l"/>
             <a:r>
-              <a:rPr sz="1500" b="1" i="0">
-                <a:solidFill>
-                  <a:srgbClr val="2B3440"/>
-                </a:solidFill>
-                <a:latin typeface="Calibri"/>
-              </a:rPr>
-              <a:t>Adopting a policy is a configuration exercise, not an integration project.</a:t>
-            </a:r>
-          </a:p>
-        </p:txBody>
-      </p:sp>
-      <p:sp>
-        <p:nvSpPr>
-          <p:cNvPr id="13" name="TextBox 12"/>
+              <a:rPr sz="1200" b="0" i="0">
+                <a:solidFill>
+                  <a:srgbClr val="5B6572"/>
+                </a:solidFill>
+                <a:latin typeface="Calibri"/>
+              </a:rPr>
+              <a:t>Your credentials stay yours: onboarding never transfers model-provider credentials or gateway admin access.</a:t>
+            </a:r>
+          </a:p>
+        </p:txBody>
+      </p:sp>
+      <p:sp>
+        <p:nvSpPr>
+          <p:cNvPr id="22" name="TextBox 21"/>
           <p:cNvSpPr txBox="1"/>
           <p:nvPr/>
         </p:nvSpPr>
         <p:spPr>
           <a:xfrm>
-            <a:off x="548640" y="6473952"/>
-            <a:ext cx="8686800" cy="274320"/>
+            <a:off x="548640" y="5806440"/>
+            <a:ext cx="11064240" cy="457200"/>
           </a:xfrm>
           <a:prstGeom prst="rect">
             <a:avLst/>
@@ -12243,6 +14197,41 @@
           <a:p>
             <a:pPr algn="l"/>
             <a:r>
+              <a:rPr sz="1500" b="1" i="0">
+                <a:solidFill>
+                  <a:srgbClr val="2B3440"/>
+                </a:solidFill>
+                <a:latin typeface="Calibri"/>
+              </a:rPr>
+              <a:t>Same policy, same decisions, same audit trail — on every consumption path.</a:t>
+            </a:r>
+          </a:p>
+        </p:txBody>
+      </p:sp>
+      <p:sp>
+        <p:nvSpPr>
+          <p:cNvPr id="23" name="TextBox 22"/>
+          <p:cNvSpPr txBox="1"/>
+          <p:nvPr/>
+        </p:nvSpPr>
+        <p:spPr>
+          <a:xfrm>
+            <a:off x="548640" y="6473952"/>
+            <a:ext cx="8686800" cy="274320"/>
+          </a:xfrm>
+          <a:prstGeom prst="rect">
+            <a:avLst/>
+          </a:prstGeom>
+          <a:noFill/>
+        </p:spPr>
+        <p:txBody>
+          <a:bodyPr wrap="square" anchor="t">
+            <a:spAutoFit/>
+          </a:bodyPr>
+          <a:lstStyle/>
+          <a:p>
+            <a:pPr algn="l"/>
+            <a:r>
               <a:rPr sz="900" b="0" i="0">
                 <a:solidFill>
                   <a:srgbClr val="5B6572"/>
@@ -12256,7 +14245,7 @@
       </p:sp>
       <p:sp>
         <p:nvSpPr>
-          <p:cNvPr id="14" name="TextBox 13"/>
+          <p:cNvPr id="24" name="TextBox 23"/>
           <p:cNvSpPr txBox="1"/>
           <p:nvPr/>
         </p:nvSpPr>
@@ -12626,7 +14615,7 @@
                 </a:solidFill>
                 <a:latin typeface="Calibri"/>
               </a:rPr>
-              <a:t>Content IS sent to the hosted service — not a data-local option.</a:t>
+              <a:t>Content IS sent to the hosted service — not a data-local option. MVP weeks 1–2.</a:t>
             </a:r>
           </a:p>
         </p:txBody>
@@ -12836,7 +14825,7 @@
                 </a:solidFill>
                 <a:latin typeface="Calibri"/>
               </a:rPr>
-              <a:t>Delivered in a later phase — not part of today's ask.</a:t>
+              <a:t>Delivered in week 3 of the MVP.</a:t>
             </a:r>
           </a:p>
         </p:txBody>
@@ -13046,7 +15035,7 @@
                 </a:solidFill>
                 <a:latin typeface="Calibri"/>
               </a:rPr>
-              <a:t>Raw content stays in your account by default. Later phase.</a:t>
+              <a:t>Raw content stays in your account by default. Week 4 of the MVP.</a:t>
             </a:r>
           </a:p>
         </p:txBody>
@@ -13081,7 +15070,7 @@
                 </a:solidFill>
                 <a:latin typeface="Calibri"/>
               </a:rPr>
-              <a:t>One policy definition works in all three. Phase 1 exercises Mode A only.</a:t>
+              <a:t>One policy definition works in all three — and all three are delivered inside this MVP.</a:t>
             </a:r>
           </a:p>
         </p:txBody>
@@ -13866,7 +15855,7 @@
                 </a:solidFill>
                 <a:latin typeface="Calibri"/>
               </a:rPr>
-              <a:t>HONEST SCOPE</a:t>
+              <a:t>CAPABILITIES</a:t>
             </a:r>
           </a:p>
         </p:txBody>
@@ -13901,7 +15890,7 @@
                 </a:solidFill>
                 <a:latin typeface="Calibri"/>
               </a:rPr>
-              <a:t>What this is — and what it is not</a:t>
+              <a:t>The full MVP capability set</a:t>
             </a:r>
           </a:p>
         </p:txBody>
@@ -13958,8 +15947,468 @@
         </p:nvSpPr>
         <p:spPr>
           <a:xfrm>
-            <a:off x="548640" y="1554480"/>
-            <a:ext cx="5394960" cy="548640"/>
+            <a:off x="548640" y="1463040"/>
+            <a:ext cx="3611880" cy="502920"/>
+          </a:xfrm>
+          <a:prstGeom prst="roundRect">
+            <a:avLst/>
+          </a:prstGeom>
+          <a:solidFill>
+            <a:srgbClr val="2B3440"/>
+          </a:solidFill>
+          <a:ln>
+            <a:noFill/>
+          </a:ln>
+          <a:effectLst/>
+        </p:spPr>
+        <p:style>
+          <a:lnRef idx="1">
+            <a:schemeClr val="accent1"/>
+          </a:lnRef>
+          <a:fillRef idx="3">
+            <a:schemeClr val="accent1"/>
+          </a:fillRef>
+          <a:effectRef idx="2">
+            <a:schemeClr val="accent1"/>
+          </a:effectRef>
+          <a:fontRef idx="minor">
+            <a:schemeClr val="lt1"/>
+          </a:fontRef>
+        </p:style>
+        <p:txBody>
+          <a:bodyPr rtlCol="0" anchor="ctr" wrap="square" lIns="76200" rIns="76200" tIns="38100" bIns="38100"/>
+          <a:lstStyle/>
+          <a:p>
+            <a:pPr algn="ctr"/>
+            <a:r>
+              <a:rPr sz="1400" b="1">
+                <a:solidFill>
+                  <a:srgbClr val="FFFFFF"/>
+                </a:solidFill>
+                <a:latin typeface="Calibri"/>
+              </a:rPr>
+              <a:t>Policy &amp; governance</a:t>
+            </a:r>
+          </a:p>
+        </p:txBody>
+      </p:sp>
+      <p:sp>
+        <p:nvSpPr>
+          <p:cNvPr id="6" name="Rounded Rectangle 5"/>
+          <p:cNvSpPr/>
+          <p:nvPr/>
+        </p:nvSpPr>
+        <p:spPr>
+          <a:xfrm>
+            <a:off x="548640" y="2084831"/>
+            <a:ext cx="3611880" cy="3566160"/>
+          </a:xfrm>
+          <a:prstGeom prst="roundRect">
+            <a:avLst/>
+          </a:prstGeom>
+          <a:solidFill>
+            <a:srgbClr val="FFFFFF"/>
+          </a:solidFill>
+          <a:ln w="12700">
+            <a:solidFill>
+              <a:srgbClr val="C9D1D9"/>
+            </a:solidFill>
+          </a:ln>
+          <a:effectLst/>
+        </p:spPr>
+        <p:style>
+          <a:lnRef idx="1">
+            <a:schemeClr val="accent1"/>
+          </a:lnRef>
+          <a:fillRef idx="3">
+            <a:schemeClr val="accent1"/>
+          </a:fillRef>
+          <a:effectRef idx="2">
+            <a:schemeClr val="accent1"/>
+          </a:effectRef>
+          <a:fontRef idx="minor">
+            <a:schemeClr val="lt1"/>
+          </a:fontRef>
+        </p:style>
+        <p:txBody>
+          <a:bodyPr rtlCol="0" anchor="t" wrap="square" lIns="127000" rIns="101600" tIns="101600" bIns="38100"/>
+          <a:lstStyle/>
+          <a:p>
+            <a:pPr algn="ctr">
+              <a:spcAft>
+                <a:spcPts val="700"/>
+              </a:spcAft>
+            </a:pPr>
+            <a:r>
+              <a:rPr sz="1200" b="0">
+                <a:solidFill>
+                  <a:srgbClr val="1F2937"/>
+                </a:solidFill>
+                <a:latin typeface="Calibri"/>
+              </a:rPr>
+              <a:t/>
+            </a:r>
+            <a:r>
+              <a:rPr sz="1200">
+                <a:solidFill>
+                  <a:srgbClr val="2B3440"/>
+                </a:solidFill>
+                <a:latin typeface="Calibri"/>
+              </a:rPr>
+              <a:t>▪ </a:t>
+            </a:r>
+            <a:r>
+              <a:rPr sz="1200">
+                <a:solidFill>
+                  <a:srgbClr val="1F2937"/>
+                </a:solidFill>
+                <a:latin typeface="Calibri"/>
+              </a:rPr>
+              <a:t>Versioned policies, promote &amp; roll back</a:t>
+            </a:r>
+          </a:p>
+          <a:p>
+            <a:pPr>
+              <a:spcAft>
+                <a:spcPts val="700"/>
+              </a:spcAft>
+            </a:pPr>
+            <a:r>
+              <a:rPr sz="1200">
+                <a:solidFill>
+                  <a:srgbClr val="2B3440"/>
+                </a:solidFill>
+                <a:latin typeface="Calibri"/>
+              </a:rPr>
+              <a:t>▪ </a:t>
+            </a:r>
+            <a:r>
+              <a:rPr sz="1200">
+                <a:solidFill>
+                  <a:srgbClr val="1F2937"/>
+                </a:solidFill>
+                <a:latin typeface="Calibri"/>
+              </a:rPr>
+              <a:t>Workload registry &amp; policy bindings</a:t>
+            </a:r>
+          </a:p>
+          <a:p>
+            <a:pPr>
+              <a:spcAft>
+                <a:spcPts val="700"/>
+              </a:spcAft>
+            </a:pPr>
+            <a:r>
+              <a:rPr sz="1200">
+                <a:solidFill>
+                  <a:srgbClr val="2B3440"/>
+                </a:solidFill>
+                <a:latin typeface="Calibri"/>
+              </a:rPr>
+              <a:t>▪ </a:t>
+            </a:r>
+            <a:r>
+              <a:rPr sz="1200">
+                <a:solidFill>
+                  <a:srgbClr val="1F2937"/>
+                </a:solidFill>
+                <a:latin typeface="Calibri"/>
+              </a:rPr>
+              <a:t>Observe / warn / redact / block modes</a:t>
+            </a:r>
+          </a:p>
+          <a:p>
+            <a:pPr>
+              <a:spcAft>
+                <a:spcPts val="700"/>
+              </a:spcAft>
+            </a:pPr>
+            <a:r>
+              <a:rPr sz="1200">
+                <a:solidFill>
+                  <a:srgbClr val="2B3440"/>
+                </a:solidFill>
+                <a:latin typeface="Calibri"/>
+              </a:rPr>
+              <a:t>▪ </a:t>
+            </a:r>
+            <a:r>
+              <a:rPr sz="1200">
+                <a:solidFill>
+                  <a:srgbClr val="1F2937"/>
+                </a:solidFill>
+                <a:latin typeface="Calibri"/>
+              </a:rPr>
+              <a:t>Decision audit trail &amp; reason codes</a:t>
+            </a:r>
+          </a:p>
+          <a:p>
+            <a:pPr>
+              <a:spcAft>
+                <a:spcPts val="700"/>
+              </a:spcAft>
+            </a:pPr>
+            <a:r>
+              <a:rPr sz="1200">
+                <a:solidFill>
+                  <a:srgbClr val="2B3440"/>
+                </a:solidFill>
+                <a:latin typeface="Calibri"/>
+              </a:rPr>
+              <a:t>▪ </a:t>
+            </a:r>
+            <a:r>
+              <a:rPr sz="1200">
+                <a:solidFill>
+                  <a:srgbClr val="1F2937"/>
+                </a:solidFill>
+                <a:latin typeface="Calibri"/>
+              </a:rPr>
+              <a:t>Latency metrics per evaluation</a:t>
+            </a:r>
+          </a:p>
+        </p:txBody>
+      </p:sp>
+      <p:sp>
+        <p:nvSpPr>
+          <p:cNvPr id="7" name="Rounded Rectangle 6"/>
+          <p:cNvSpPr/>
+          <p:nvPr/>
+        </p:nvSpPr>
+        <p:spPr>
+          <a:xfrm>
+            <a:off x="4462272" y="1463040"/>
+            <a:ext cx="3611880" cy="502920"/>
+          </a:xfrm>
+          <a:prstGeom prst="roundRect">
+            <a:avLst/>
+          </a:prstGeom>
+          <a:solidFill>
+            <a:srgbClr val="3D7DC8"/>
+          </a:solidFill>
+          <a:ln>
+            <a:noFill/>
+          </a:ln>
+          <a:effectLst/>
+        </p:spPr>
+        <p:style>
+          <a:lnRef idx="1">
+            <a:schemeClr val="accent1"/>
+          </a:lnRef>
+          <a:fillRef idx="3">
+            <a:schemeClr val="accent1"/>
+          </a:fillRef>
+          <a:effectRef idx="2">
+            <a:schemeClr val="accent1"/>
+          </a:effectRef>
+          <a:fontRef idx="minor">
+            <a:schemeClr val="lt1"/>
+          </a:fontRef>
+        </p:style>
+        <p:txBody>
+          <a:bodyPr rtlCol="0" anchor="ctr" wrap="square" lIns="76200" rIns="76200" tIns="38100" bIns="38100"/>
+          <a:lstStyle/>
+          <a:p>
+            <a:pPr algn="ctr"/>
+            <a:r>
+              <a:rPr sz="1400" b="1">
+                <a:solidFill>
+                  <a:srgbClr val="FFFFFF"/>
+                </a:solidFill>
+                <a:latin typeface="Calibri"/>
+              </a:rPr>
+              <a:t>Content evaluation</a:t>
+            </a:r>
+          </a:p>
+        </p:txBody>
+      </p:sp>
+      <p:sp>
+        <p:nvSpPr>
+          <p:cNvPr id="8" name="Rounded Rectangle 7"/>
+          <p:cNvSpPr/>
+          <p:nvPr/>
+        </p:nvSpPr>
+        <p:spPr>
+          <a:xfrm>
+            <a:off x="4462272" y="2084831"/>
+            <a:ext cx="3611880" cy="3566160"/>
+          </a:xfrm>
+          <a:prstGeom prst="roundRect">
+            <a:avLst/>
+          </a:prstGeom>
+          <a:solidFill>
+            <a:srgbClr val="FFFFFF"/>
+          </a:solidFill>
+          <a:ln w="12700">
+            <a:solidFill>
+              <a:srgbClr val="C9D1D9"/>
+            </a:solidFill>
+          </a:ln>
+          <a:effectLst/>
+        </p:spPr>
+        <p:style>
+          <a:lnRef idx="1">
+            <a:schemeClr val="accent1"/>
+          </a:lnRef>
+          <a:fillRef idx="3">
+            <a:schemeClr val="accent1"/>
+          </a:fillRef>
+          <a:effectRef idx="2">
+            <a:schemeClr val="accent1"/>
+          </a:effectRef>
+          <a:fontRef idx="minor">
+            <a:schemeClr val="lt1"/>
+          </a:fontRef>
+        </p:style>
+        <p:txBody>
+          <a:bodyPr rtlCol="0" anchor="t" wrap="square" lIns="127000" rIns="101600" tIns="101600" bIns="38100"/>
+          <a:lstStyle/>
+          <a:p>
+            <a:pPr algn="ctr">
+              <a:spcAft>
+                <a:spcPts val="700"/>
+              </a:spcAft>
+            </a:pPr>
+            <a:r>
+              <a:rPr sz="1200" b="0">
+                <a:solidFill>
+                  <a:srgbClr val="1F2937"/>
+                </a:solidFill>
+                <a:latin typeface="Calibri"/>
+              </a:rPr>
+              <a:t/>
+            </a:r>
+            <a:r>
+              <a:rPr sz="1200">
+                <a:solidFill>
+                  <a:srgbClr val="3D7DC8"/>
+                </a:solidFill>
+                <a:latin typeface="Calibri"/>
+              </a:rPr>
+              <a:t>▪ </a:t>
+            </a:r>
+            <a:r>
+              <a:rPr sz="1200">
+                <a:solidFill>
+                  <a:srgbClr val="1F2937"/>
+                </a:solidFill>
+                <a:latin typeface="Calibri"/>
+              </a:rPr>
+              <a:t>Prompt (input) &amp; response (output) checks</a:t>
+            </a:r>
+          </a:p>
+          <a:p>
+            <a:pPr>
+              <a:spcAft>
+                <a:spcPts val="700"/>
+              </a:spcAft>
+            </a:pPr>
+            <a:r>
+              <a:rPr sz="1200">
+                <a:solidFill>
+                  <a:srgbClr val="3D7DC8"/>
+                </a:solidFill>
+                <a:latin typeface="Calibri"/>
+              </a:rPr>
+              <a:t>▪ </a:t>
+            </a:r>
+            <a:r>
+              <a:rPr sz="1200">
+                <a:solidFill>
+                  <a:srgbClr val="1F2937"/>
+                </a:solidFill>
+                <a:latin typeface="Calibri"/>
+              </a:rPr>
+              <a:t>Amazon Bedrock Guardrails engine</a:t>
+            </a:r>
+          </a:p>
+          <a:p>
+            <a:pPr>
+              <a:spcAft>
+                <a:spcPts val="700"/>
+              </a:spcAft>
+            </a:pPr>
+            <a:r>
+              <a:rPr sz="1200">
+                <a:solidFill>
+                  <a:srgbClr val="3D7DC8"/>
+                </a:solidFill>
+                <a:latin typeface="Calibri"/>
+              </a:rPr>
+              <a:t>▪ </a:t>
+            </a:r>
+            <a:r>
+              <a:rPr sz="1200">
+                <a:solidFill>
+                  <a:srgbClr val="1F2937"/>
+                </a:solidFill>
+                <a:latin typeface="Calibri"/>
+              </a:rPr>
+              <a:t>Deterministic organization rules</a:t>
+            </a:r>
+          </a:p>
+          <a:p>
+            <a:pPr>
+              <a:spcAft>
+                <a:spcPts val="700"/>
+              </a:spcAft>
+            </a:pPr>
+            <a:r>
+              <a:rPr sz="1200">
+                <a:solidFill>
+                  <a:srgbClr val="3D7DC8"/>
+                </a:solidFill>
+                <a:latin typeface="Calibri"/>
+              </a:rPr>
+              <a:t>▪ </a:t>
+            </a:r>
+            <a:r>
+              <a:rPr sz="1200">
+                <a:solidFill>
+                  <a:srgbClr val="1F2937"/>
+                </a:solidFill>
+                <a:latin typeface="Calibri"/>
+              </a:rPr>
+              <a:t>Sensitive-data (PII) detection</a:t>
+            </a:r>
+          </a:p>
+          <a:p>
+            <a:pPr>
+              <a:spcAft>
+                <a:spcPts val="700"/>
+              </a:spcAft>
+            </a:pPr>
+            <a:r>
+              <a:rPr sz="1200">
+                <a:solidFill>
+                  <a:srgbClr val="3D7DC8"/>
+                </a:solidFill>
+                <a:latin typeface="Calibri"/>
+              </a:rPr>
+              <a:t>▪ </a:t>
+            </a:r>
+            <a:r>
+              <a:rPr sz="1200">
+                <a:solidFill>
+                  <a:srgbClr val="1F2937"/>
+                </a:solidFill>
+                <a:latin typeface="Calibri"/>
+              </a:rPr>
+              <a:t>One normalized decision, any engine</a:t>
+            </a:r>
+          </a:p>
+        </p:txBody>
+      </p:sp>
+      <p:sp>
+        <p:nvSpPr>
+          <p:cNvPr id="9" name="Rounded Rectangle 8"/>
+          <p:cNvSpPr/>
+          <p:nvPr/>
+        </p:nvSpPr>
+        <p:spPr>
+          <a:xfrm>
+            <a:off x="8375904" y="1463040"/>
+            <a:ext cx="3611880" cy="502920"/>
           </a:xfrm>
           <a:prstGeom prst="roundRect">
             <a:avLst/>
@@ -13992,161 +16441,38 @@
           <a:p>
             <a:pPr algn="ctr"/>
             <a:r>
-              <a:rPr sz="1500" b="1">
+              <a:rPr sz="1400" b="1">
                 <a:solidFill>
                   <a:srgbClr val="FFFFFF"/>
                 </a:solidFill>
                 <a:latin typeface="Calibri"/>
               </a:rPr>
-              <a:t>It is</a:t>
-            </a:r>
-          </a:p>
-        </p:txBody>
-      </p:sp>
-      <p:sp>
-        <p:nvSpPr>
-          <p:cNvPr id="6" name="TextBox 5"/>
-          <p:cNvSpPr txBox="1"/>
-          <p:nvPr/>
-        </p:nvSpPr>
-        <p:spPr>
-          <a:xfrm>
-            <a:off x="685800" y="2286000"/>
-            <a:ext cx="5212080" cy="3291840"/>
-          </a:xfrm>
-          <a:prstGeom prst="rect">
-            <a:avLst/>
-          </a:prstGeom>
-          <a:noFill/>
-        </p:spPr>
-        <p:txBody>
-          <a:bodyPr wrap="square">
-            <a:spAutoFit/>
-          </a:bodyPr>
-          <a:lstStyle/>
-          <a:p>
-            <a:pPr>
-              <a:spcAft>
-                <a:spcPts val="1000"/>
-              </a:spcAft>
-            </a:pPr>
-            <a:r>
-              <a:rPr sz="1400">
-                <a:solidFill>
-                  <a:srgbClr val="0F766E"/>
-                </a:solidFill>
-                <a:latin typeface="Calibri"/>
-              </a:rPr>
-              <a:t>▪  </a:t>
-            </a:r>
-            <a:r>
-              <a:rPr sz="1400" b="1">
-                <a:solidFill>
-                  <a:srgbClr val="1F2937"/>
-                </a:solidFill>
-                <a:latin typeface="Calibri"/>
-              </a:rPr>
-              <a:t>Content evaluation</a:t>
-            </a:r>
-            <a:r>
-              <a:rPr sz="1400">
-                <a:solidFill>
-                  <a:srgbClr val="5B6572"/>
-                </a:solidFill>
-                <a:latin typeface="Calibri"/>
-              </a:rPr>
-              <a:t> — of prompts and responses, against a versioned policy.</a:t>
-            </a:r>
-          </a:p>
-          <a:p>
-            <a:pPr>
-              <a:spcAft>
-                <a:spcPts val="1000"/>
-              </a:spcAft>
-            </a:pPr>
-            <a:r>
-              <a:rPr sz="1400">
-                <a:solidFill>
-                  <a:srgbClr val="0F766E"/>
-                </a:solidFill>
-                <a:latin typeface="Calibri"/>
-              </a:rPr>
-              <a:t>▪  </a:t>
-            </a:r>
-            <a:r>
-              <a:rPr sz="1400" b="1">
-                <a:solidFill>
-                  <a:srgbClr val="1F2937"/>
-                </a:solidFill>
-                <a:latin typeface="Calibri"/>
-              </a:rPr>
-              <a:t>Consistent enforcement</a:t>
-            </a:r>
-            <a:r>
-              <a:rPr sz="1400">
-                <a:solidFill>
-                  <a:srgbClr val="5B6572"/>
-                </a:solidFill>
-                <a:latin typeface="Calibri"/>
-              </a:rPr>
-              <a:t> — same decisions and reason codes on every gateway.</a:t>
-            </a:r>
-          </a:p>
-          <a:p>
-            <a:pPr>
-              <a:spcAft>
-                <a:spcPts val="1000"/>
-              </a:spcAft>
-            </a:pPr>
-            <a:r>
-              <a:rPr sz="1400">
-                <a:solidFill>
-                  <a:srgbClr val="0F766E"/>
-                </a:solidFill>
-                <a:latin typeface="Calibri"/>
-              </a:rPr>
-              <a:t>▪  </a:t>
-            </a:r>
-            <a:r>
-              <a:rPr sz="1400" b="1">
-                <a:solidFill>
-                  <a:srgbClr val="1F2937"/>
-                </a:solidFill>
-                <a:latin typeface="Calibri"/>
-              </a:rPr>
-              <a:t>Audit evidence</a:t>
-            </a:r>
-            <a:r>
-              <a:rPr sz="1400">
-                <a:solidFill>
-                  <a:srgbClr val="5B6572"/>
-                </a:solidFill>
-                <a:latin typeface="Calibri"/>
-              </a:rPr>
-              <a:t> — who was evaluated, by which policy version, with what result.</a:t>
-            </a:r>
-          </a:p>
-        </p:txBody>
-      </p:sp>
-      <p:sp>
-        <p:nvSpPr>
-          <p:cNvPr id="7" name="Rounded Rectangle 6"/>
+              <a:t>Advanced agent protection</a:t>
+            </a:r>
+          </a:p>
+        </p:txBody>
+      </p:sp>
+      <p:sp>
+        <p:nvSpPr>
+          <p:cNvPr id="10" name="Rounded Rectangle 9"/>
           <p:cNvSpPr/>
           <p:nvPr/>
         </p:nvSpPr>
         <p:spPr>
           <a:xfrm>
-            <a:off x="6217920" y="1554480"/>
-            <a:ext cx="5394960" cy="548640"/>
+            <a:off x="8375904" y="2084831"/>
+            <a:ext cx="3611880" cy="3566160"/>
           </a:xfrm>
           <a:prstGeom prst="roundRect">
             <a:avLst/>
           </a:prstGeom>
           <a:solidFill>
-            <a:srgbClr val="2B3440"/>
+            <a:srgbClr val="E4F0EE"/>
           </a:solidFill>
-          <a:ln>
-            <a:noFill/>
+          <a:ln w="25400">
+            <a:solidFill>
+              <a:srgbClr val="0F766E"/>
+            </a:solidFill>
           </a:ln>
           <a:effectLst/>
         </p:spPr>
@@ -14165,157 +16491,204 @@
           </a:fontRef>
         </p:style>
         <p:txBody>
-          <a:bodyPr rtlCol="0" anchor="ctr" wrap="square" lIns="76200" rIns="76200" tIns="38100" bIns="38100"/>
-          <a:lstStyle/>
-          <a:p>
-            <a:pPr algn="ctr"/>
-            <a:r>
-              <a:rPr sz="1500" b="1">
-                <a:solidFill>
-                  <a:srgbClr val="FFFFFF"/>
-                </a:solidFill>
-                <a:latin typeface="Calibri"/>
-              </a:rPr>
-              <a:t>It is not</a:t>
-            </a:r>
-          </a:p>
-        </p:txBody>
-      </p:sp>
-      <p:sp>
-        <p:nvSpPr>
-          <p:cNvPr id="8" name="TextBox 7"/>
-          <p:cNvSpPr txBox="1"/>
-          <p:nvPr/>
-        </p:nvSpPr>
-        <p:spPr>
-          <a:xfrm>
-            <a:off x="6355080" y="2286000"/>
-            <a:ext cx="5212080" cy="3566160"/>
-          </a:xfrm>
-          <a:prstGeom prst="rect">
-            <a:avLst/>
-          </a:prstGeom>
-          <a:noFill/>
-        </p:spPr>
-        <p:txBody>
-          <a:bodyPr wrap="square">
-            <a:spAutoFit/>
-          </a:bodyPr>
-          <a:lstStyle/>
+          <a:bodyPr rtlCol="0" anchor="t" wrap="square" lIns="127000" rIns="101600" tIns="101600" bIns="38100"/>
+          <a:lstStyle/>
+          <a:p>
+            <a:pPr algn="ctr">
+              <a:spcAft>
+                <a:spcPts val="700"/>
+              </a:spcAft>
+            </a:pPr>
+            <a:r>
+              <a:rPr sz="1200" b="0">
+                <a:solidFill>
+                  <a:srgbClr val="1F2937"/>
+                </a:solidFill>
+                <a:latin typeface="Calibri"/>
+              </a:rPr>
+              <a:t/>
+            </a:r>
+            <a:r>
+              <a:rPr sz="1200">
+                <a:solidFill>
+                  <a:srgbClr val="0F766E"/>
+                </a:solidFill>
+                <a:latin typeface="Calibri"/>
+              </a:rPr>
+              <a:t>▪ </a:t>
+            </a:r>
+            <a:r>
+              <a:rPr sz="1200">
+                <a:solidFill>
+                  <a:srgbClr val="1F2937"/>
+                </a:solidFill>
+                <a:latin typeface="Calibri"/>
+              </a:rPr>
+              <a:t>Tool-call validation before execution</a:t>
+            </a:r>
+          </a:p>
           <a:p>
             <a:pPr>
               <a:spcAft>
-                <a:spcPts val="1000"/>
+                <a:spcPts val="700"/>
               </a:spcAft>
             </a:pPr>
             <a:r>
-              <a:rPr sz="1400">
+              <a:rPr sz="1200">
                 <a:solidFill>
                   <a:srgbClr val="0F766E"/>
                 </a:solidFill>
                 <a:latin typeface="Calibri"/>
               </a:rPr>
-              <a:t>▪  </a:t>
-            </a:r>
-            <a:r>
-              <a:rPr sz="1400" b="1">
+              <a:t>▪ </a:t>
+            </a:r>
+            <a:r>
+              <a:rPr sz="1200">
                 <a:solidFill>
                   <a:srgbClr val="1F2937"/>
                 </a:solidFill>
                 <a:latin typeface="Calibri"/>
               </a:rPr>
-              <a:t>Not authorization</a:t>
-            </a:r>
-            <a:r>
-              <a:rPr sz="1400">
-                <a:solidFill>
-                  <a:srgbClr val="5B6572"/>
-                </a:solidFill>
-                <a:latin typeface="Calibri"/>
-              </a:rPr>
-              <a:t> — “content looks safe” never means “this user may do this” — that stays with your application.</a:t>
+              <a:t>Retrieved-content evaluation (RAG)</a:t>
             </a:r>
           </a:p>
           <a:p>
             <a:pPr>
               <a:spcAft>
-                <a:spcPts val="1000"/>
+                <a:spcPts val="700"/>
               </a:spcAft>
             </a:pPr>
             <a:r>
-              <a:rPr sz="1400">
+              <a:rPr sz="1200">
                 <a:solidFill>
                   <a:srgbClr val="0F766E"/>
                 </a:solidFill>
                 <a:latin typeface="Calibri"/>
               </a:rPr>
-              <a:t>▪  </a:t>
-            </a:r>
-            <a:r>
-              <a:rPr sz="1400" b="1">
+              <a:t>▪ </a:t>
+            </a:r>
+            <a:r>
+              <a:rPr sz="1200">
                 <a:solidFill>
                   <a:srgbClr val="1F2937"/>
                 </a:solidFill>
                 <a:latin typeface="Calibri"/>
               </a:rPr>
-              <a:t>Not bypass-proof (yet)</a:t>
-            </a:r>
-            <a:r>
-              <a:rPr sz="1400">
-                <a:solidFill>
-                  <a:srgbClr val="5B6572"/>
-                </a:solidFill>
-                <a:latin typeface="Calibri"/>
-              </a:rPr>
-              <a:t> — a cooperatively installed connector can be removed; stronger enforcement postures come later, by design.</a:t>
+              <a:t>Indirect prompt-injection detection</a:t>
             </a:r>
           </a:p>
           <a:p>
             <a:pPr>
               <a:spcAft>
-                <a:spcPts val="1000"/>
+                <a:spcPts val="700"/>
               </a:spcAft>
             </a:pPr>
             <a:r>
-              <a:rPr sz="1400">
+              <a:rPr sz="1200">
                 <a:solidFill>
                   <a:srgbClr val="0F766E"/>
                 </a:solidFill>
                 <a:latin typeface="Calibri"/>
               </a:rPr>
-              <a:t>▪  </a:t>
-            </a:r>
-            <a:r>
-              <a:rPr sz="1400" b="1">
+              <a:t>▪ </a:t>
+            </a:r>
+            <a:r>
+              <a:rPr sz="1200">
                 <a:solidFill>
                   <a:srgbClr val="1F2937"/>
                 </a:solidFill>
                 <a:latin typeface="Calibri"/>
               </a:rPr>
-              <a:t>Not a complete AI-security platform</a:t>
-            </a:r>
-            <a:r>
-              <a:rPr sz="1400">
-                <a:solidFill>
-                  <a:srgbClr val="5B6572"/>
-                </a:solidFill>
-                <a:latin typeface="Calibri"/>
-              </a:rPr>
-              <a:t> — not full governance, not DLP, not compliance certification.</a:t>
-            </a:r>
-          </a:p>
-        </p:txBody>
-      </p:sp>
-      <p:sp>
-        <p:nvSpPr>
-          <p:cNvPr id="9" name="TextBox 8"/>
+              <a:t>Memory-write validation</a:t>
+            </a:r>
+          </a:p>
+          <a:p>
+            <a:pPr>
+              <a:spcAft>
+                <a:spcPts val="700"/>
+              </a:spcAft>
+            </a:pPr>
+            <a:r>
+              <a:rPr sz="1200">
+                <a:solidFill>
+                  <a:srgbClr val="0F766E"/>
+                </a:solidFill>
+                <a:latin typeface="Calibri"/>
+              </a:rPr>
+              <a:t>▪ </a:t>
+            </a:r>
+            <a:r>
+              <a:rPr sz="1200">
+                <a:solidFill>
+                  <a:srgbClr val="1F2937"/>
+                </a:solidFill>
+                <a:latin typeface="Calibri"/>
+              </a:rPr>
+              <a:t>Streaming output evaluation</a:t>
+            </a:r>
+          </a:p>
+          <a:p>
+            <a:pPr>
+              <a:spcAft>
+                <a:spcPts val="700"/>
+              </a:spcAft>
+            </a:pPr>
+            <a:r>
+              <a:rPr sz="1200">
+                <a:solidFill>
+                  <a:srgbClr val="0F766E"/>
+                </a:solidFill>
+                <a:latin typeface="Calibri"/>
+              </a:rPr>
+              <a:t>▪ </a:t>
+            </a:r>
+            <a:r>
+              <a:rPr sz="1200">
+                <a:solidFill>
+                  <a:srgbClr val="1F2937"/>
+                </a:solidFill>
+                <a:latin typeface="Calibri"/>
+              </a:rPr>
+              <a:t>MCP tool authorization controls</a:t>
+            </a:r>
+          </a:p>
+          <a:p>
+            <a:pPr>
+              <a:spcAft>
+                <a:spcPts val="700"/>
+              </a:spcAft>
+            </a:pPr>
+            <a:r>
+              <a:rPr sz="1200">
+                <a:solidFill>
+                  <a:srgbClr val="0F766E"/>
+                </a:solidFill>
+                <a:latin typeface="Calibri"/>
+              </a:rPr>
+              <a:t>▪ </a:t>
+            </a:r>
+            <a:r>
+              <a:rPr sz="1200">
+                <a:solidFill>
+                  <a:srgbClr val="1F2937"/>
+                </a:solidFill>
+                <a:latin typeface="Calibri"/>
+              </a:rPr>
+              <a:t>Human-approval workflows</a:t>
+            </a:r>
+          </a:p>
+        </p:txBody>
+      </p:sp>
+      <p:sp>
+        <p:nvSpPr>
+          <p:cNvPr id="11" name="TextBox 10"/>
           <p:cNvSpPr txBox="1"/>
           <p:nvPr/>
         </p:nvSpPr>
         <p:spPr>
           <a:xfrm>
-            <a:off x="548640" y="5760720"/>
-            <a:ext cx="11064240" cy="548640"/>
+            <a:off x="8229600" y="5669280"/>
+            <a:ext cx="3291840" cy="320040"/>
           </a:xfrm>
           <a:prstGeom prst="rect">
             <a:avLst/>
@@ -14328,29 +16701,29 @@
           </a:bodyPr>
           <a:lstStyle/>
           <a:p>
-            <a:pPr algn="l"/>
-            <a:r>
-              <a:rPr sz="1500" b="1" i="0">
-                <a:solidFill>
-                  <a:srgbClr val="2B3440"/>
-                </a:solidFill>
-                <a:latin typeface="Calibri"/>
-              </a:rPr>
-              <a:t>We state the limits plainly — that is why you can trust what it does claim.</a:t>
-            </a:r>
-          </a:p>
-        </p:txBody>
-      </p:sp>
-      <p:sp>
-        <p:nvSpPr>
-          <p:cNvPr id="10" name="TextBox 9"/>
+            <a:pPr algn="ctr"/>
+            <a:r>
+              <a:rPr sz="1100" b="1" i="0">
+                <a:solidFill>
+                  <a:srgbClr val="0F766E"/>
+                </a:solidFill>
+                <a:latin typeface="Calibri"/>
+              </a:rPr>
+              <a:t>delivered in week 5</a:t>
+            </a:r>
+          </a:p>
+        </p:txBody>
+      </p:sp>
+      <p:sp>
+        <p:nvSpPr>
+          <p:cNvPr id="12" name="TextBox 11"/>
           <p:cNvSpPr txBox="1"/>
           <p:nvPr/>
         </p:nvSpPr>
         <p:spPr>
           <a:xfrm>
-            <a:off x="548640" y="6473952"/>
-            <a:ext cx="8686800" cy="274320"/>
+            <a:off x="548640" y="5989320"/>
+            <a:ext cx="11064240" cy="457200"/>
           </a:xfrm>
           <a:prstGeom prst="rect">
             <a:avLst/>
@@ -14365,6 +16738,41 @@
           <a:p>
             <a:pPr algn="l"/>
             <a:r>
+              <a:rPr sz="1400" b="1" i="0">
+                <a:solidFill>
+                  <a:srgbClr val="2B3440"/>
+                </a:solidFill>
+                <a:latin typeface="Calibri"/>
+              </a:rPr>
+              <a:t>Content guardrails for every LLM app — plus action guardrails for agentic workloads (LangGraph, MCP, custom agents).</a:t>
+            </a:r>
+          </a:p>
+        </p:txBody>
+      </p:sp>
+      <p:sp>
+        <p:nvSpPr>
+          <p:cNvPr id="13" name="TextBox 12"/>
+          <p:cNvSpPr txBox="1"/>
+          <p:nvPr/>
+        </p:nvSpPr>
+        <p:spPr>
+          <a:xfrm>
+            <a:off x="548640" y="6473952"/>
+            <a:ext cx="8686800" cy="274320"/>
+          </a:xfrm>
+          <a:prstGeom prst="rect">
+            <a:avLst/>
+          </a:prstGeom>
+          <a:noFill/>
+        </p:spPr>
+        <p:txBody>
+          <a:bodyPr wrap="square" anchor="t">
+            <a:spAutoFit/>
+          </a:bodyPr>
+          <a:lstStyle/>
+          <a:p>
+            <a:pPr algn="l"/>
+            <a:r>
               <a:rPr sz="900" b="0" i="0">
                 <a:solidFill>
                   <a:srgbClr val="5B6572"/>
@@ -14378,7 +16786,7 @@
       </p:sp>
       <p:sp>
         <p:nvSpPr>
-          <p:cNvPr id="11" name="TextBox 10"/>
+          <p:cNvPr id="14" name="TextBox 13"/>
           <p:cNvSpPr txBox="1"/>
           <p:nvPr/>
         </p:nvSpPr>
